--- a/docs/融合算子自动生成_MM_AllReduce.pptx
+++ b/docs/融合算子自动生成_MM_AllReduce.pptx
@@ -26,6 +26,8 @@
     <p:sldId id="274" r:id="rId25"/>
     <p:sldId id="275" r:id="rId26"/>
     <p:sldId id="276" r:id="rId27"/>
+    <p:sldId id="277" r:id="rId28"/>
+    <p:sldId id="278" r:id="rId29"/>
   </p:sldIdLst>
   <p:sldSz cx="12191695" cy="6858000" type="screen4x3"/>
   <p:notesSz cx="6858000" cy="9144000"/>
@@ -3307,8 +3309,8 @@
                 </a:solidFill>
                 <a:latin typeface="Droid Sans Fallback"/>
               </a:rPr>
-              <a:t>把集合通信 MILP 求解器扩展到「边算边传」：
-计算编译器给定切块和计算顺序，求解器只编排通信。</a:t>
+              <a:t>把集合通信求解器扩展到「边算边传」：
+运行时只认计算→通信依赖；估时只为离线选型，不进内核当闹钟。</a:t>
             </a:r>
           </a:p>
         </p:txBody>
@@ -3433,7 +3435,7 @@
                 </a:solidFill>
                 <a:latin typeface="Droid Sans Fallback"/>
               </a:rPr>
-              <a:t>1  计算怎么切、何时算完</a:t>
+              <a:t>1  计算怎么切、谁先算完</a:t>
             </a:r>
           </a:p>
         </p:txBody>
@@ -3513,7 +3515,7 @@
                 </a:solidFill>
                 <a:latin typeface="Droid Sans Fallback"/>
               </a:rPr>
-              <a:t>2  通信何时发、走哪条路</a:t>
+              <a:t>2  写完才允许发给谁</a:t>
             </a:r>
           </a:p>
         </p:txBody>
@@ -3593,7 +3595,7 @@
                 </a:solidFill>
                 <a:latin typeface="Droid Sans Fallback"/>
               </a:rPr>
-              <a:t>3  两件事重叠，不互相改写</a:t>
+              <a:t>3  重叠靠事件，不靠闹钟</a:t>
             </a:r>
           </a:p>
         </p:txBody>
@@ -4568,7 +4570,7 @@
                 </a:solidFill>
                 <a:latin typeface="Droid Sans Fallback"/>
               </a:rPr>
-              <a:t>背景  ready = 写完 + 2 μs（写到通信可见的固定延迟）。第一包 12 μs 才能进 AllReduce，不是 0 时刻。若 wave=2（C00 与 C01 同时算），两块都是 12 μs 就有货——切块相同，出炉时刻不同，所以必须给流图。</a:t>
+              <a:t>背景  ready = 写完 + 2 μs（写到通信可见的固定延迟）。这 12/22/32/42 只是离线估算，用来比较打包方案。运行时是 C00 写完就发，不是到点闹钟。见下一页。</a:t>
             </a:r>
           </a:p>
         </p:txBody>
@@ -4629,7 +4631,7 @@
                 </a:solidFill>
                 <a:latin typeface="Droid Sans Fallback"/>
               </a:rPr>
-              <a:t>名词  /  MILP 综合器</a:t>
+              <a:t>拍板  /  抖动与争抢</a:t>
             </a:r>
           </a:p>
         </p:txBody>
@@ -4664,7 +4666,7 @@
                 </a:solidFill>
                 <a:latin typeface="Droid Sans Fallback"/>
               </a:rPr>
-              <a:t>背景：现有求解器本来只干一件事——编通信</a:t>
+              <a:t>运行时只要先后依赖，不要通信启动时刻</a:t>
             </a:r>
           </a:p>
         </p:txBody>
@@ -4751,50 +4753,14 @@
       </p:sp>
       <p:sp>
         <p:nvSpPr>
-          <p:cNvPr id="6" name="TextBox 5"/>
-          <p:cNvSpPr txBox="1"/>
-          <p:nvPr/>
-        </p:nvSpPr>
-        <p:spPr>
-          <a:xfrm>
-            <a:off x="640080" y="1115568"/>
-            <a:ext cx="10972800" cy="640080"/>
-          </a:xfrm>
-          <a:prstGeom prst="rect">
-            <a:avLst/>
-          </a:prstGeom>
-          <a:noFill/>
-        </p:spPr>
-        <p:txBody>
-          <a:bodyPr wrap="square" anchor="ctr">
-            <a:spAutoFit/>
-          </a:bodyPr>
-          <a:lstStyle/>
-          <a:p>
-            <a:pPr algn="l"/>
-            <a:r>
-              <a:rPr sz="1600" b="0">
-                <a:solidFill>
-                  <a:srgbClr val="E5ECF5"/>
-                </a:solidFill>
-                <a:latin typeface="Droid Sans Fallback"/>
-              </a:rPr>
-              <a:t>输入：卡怎么连、每条链路多慢、要做哪种集合、数据切成几块。
-输出：一张时刻表——谁在何时把哪一块发给谁。</a:t>
-            </a:r>
-          </a:p>
-        </p:txBody>
-      </p:sp>
-      <p:sp>
-        <p:nvSpPr>
-          <p:cNvPr id="7" name="Rounded Rectangle 6"/>
+          <p:cNvPr id="6" name="Rounded Rectangle 5"/>
           <p:cNvSpPr/>
           <p:nvPr/>
         </p:nvSpPr>
         <p:spPr>
           <a:xfrm>
-            <a:off x="548640" y="1920240"/>
-            <a:ext cx="3611880" cy="1965960"/>
+            <a:off x="548640" y="1170432"/>
+            <a:ext cx="5532120" cy="3154680"/>
           </a:xfrm>
           <a:prstGeom prst="roundRect">
             <a:avLst/>
@@ -4832,24 +4798,24 @@
       </p:sp>
       <p:sp>
         <p:nvSpPr>
-          <p:cNvPr id="8" name="Rectangle 7"/>
+          <p:cNvPr id="7" name="Rectangle 6"/>
           <p:cNvSpPr/>
           <p:nvPr/>
         </p:nvSpPr>
         <p:spPr>
           <a:xfrm>
-            <a:off x="548640" y="1920240"/>
-            <a:ext cx="64008" cy="1965960"/>
+            <a:off x="548640" y="1170432"/>
+            <a:ext cx="64008" cy="3154680"/>
           </a:xfrm>
           <a:prstGeom prst="rect">
             <a:avLst/>
           </a:prstGeom>
           <a:solidFill>
-            <a:srgbClr val="266CFF"/>
+            <a:srgbClr val="21B573"/>
           </a:solidFill>
           <a:ln>
             <a:solidFill>
-              <a:srgbClr val="266CFF"/>
+              <a:srgbClr val="21B573"/>
             </a:solidFill>
           </a:ln>
         </p:spPr>
@@ -4877,85 +4843,87 @@
       </p:sp>
       <p:sp>
         <p:nvSpPr>
+          <p:cNvPr id="8" name="TextBox 7"/>
+          <p:cNvSpPr txBox="1"/>
+          <p:nvPr/>
+        </p:nvSpPr>
+        <p:spPr>
+          <a:xfrm>
+            <a:off x="731520" y="1261872"/>
+            <a:ext cx="5239512" cy="310896"/>
+          </a:xfrm>
+          <a:prstGeom prst="rect">
+            <a:avLst/>
+          </a:prstGeom>
+          <a:noFill/>
+        </p:spPr>
+        <p:txBody>
+          <a:bodyPr wrap="square" anchor="ctr">
+            <a:spAutoFit/>
+          </a:bodyPr>
+          <a:lstStyle/>
+          <a:p>
+            <a:pPr algn="l"/>
+            <a:r>
+              <a:rPr sz="1600" b="1">
+                <a:solidFill>
+                  <a:srgbClr val="F8FAFD"/>
+                </a:solidFill>
+                <a:latin typeface="Droid Sans Fallback"/>
+              </a:rPr>
+              <a:t>正确性：一条边就够</a:t>
+            </a:r>
+          </a:p>
+        </p:txBody>
+      </p:sp>
+      <p:sp>
+        <p:nvSpPr>
           <p:cNvPr id="9" name="TextBox 8"/>
           <p:cNvSpPr txBox="1"/>
           <p:nvPr/>
         </p:nvSpPr>
         <p:spPr>
           <a:xfrm>
-            <a:off x="731520" y="2011680"/>
-            <a:ext cx="3319272" cy="310896"/>
-          </a:xfrm>
-          <a:prstGeom prst="rect">
-            <a:avLst/>
-          </a:prstGeom>
-          <a:noFill/>
-        </p:spPr>
-        <p:txBody>
-          <a:bodyPr wrap="square" anchor="ctr">
+            <a:off x="731520" y="1609344"/>
+            <a:ext cx="5202936" cy="2606040"/>
+          </a:xfrm>
+          <a:prstGeom prst="rect">
+            <a:avLst/>
+          </a:prstGeom>
+          <a:noFill/>
+        </p:spPr>
+        <p:txBody>
+          <a:bodyPr wrap="square" anchor="t">
             <a:spAutoFit/>
           </a:bodyPr>
           <a:lstStyle/>
           <a:p>
             <a:pPr algn="l"/>
             <a:r>
-              <a:rPr sz="1600" b="1">
-                <a:solidFill>
-                  <a:srgbClr val="F8FAFD"/>
-                </a:solidFill>
-                <a:latin typeface="Droid Sans Fallback"/>
-              </a:rPr>
-              <a:t>TACCL</a:t>
-            </a:r>
-          </a:p>
-        </p:txBody>
-      </p:sp>
-      <p:sp>
-        <p:nvSpPr>
-          <p:cNvPr id="10" name="TextBox 9"/>
-          <p:cNvSpPr txBox="1"/>
-          <p:nvPr/>
-        </p:nvSpPr>
-        <p:spPr>
-          <a:xfrm>
-            <a:off x="731520" y="2359152"/>
-            <a:ext cx="3282696" cy="1417319"/>
-          </a:xfrm>
-          <a:prstGeom prst="rect">
-            <a:avLst/>
-          </a:prstGeom>
-          <a:noFill/>
-        </p:spPr>
-        <p:txBody>
-          <a:bodyPr wrap="square" anchor="t">
-            <a:spAutoFit/>
-          </a:bodyPr>
-          <a:lstStyle/>
-          <a:p>
-            <a:pPr algn="l"/>
-            <a:r>
               <a:rPr sz="1400" b="0">
                 <a:solidFill>
                   <a:srgbClr val="E5ECF5"/>
                 </a:solidFill>
                 <a:latin typeface="Droid Sans Fallback"/>
               </a:rPr>
-              <a:t>把拓扑和集体语义写成整数规划
-搜通信日程</a:t>
-            </a:r>
-          </a:p>
-        </p:txBody>
-      </p:sp>
-      <p:sp>
-        <p:nvSpPr>
-          <p:cNvPr id="11" name="Rounded Rectangle 10"/>
+              <a:t>C-tile 写完（事件）→ 才允许 post 这一包
+下一块继续算，上一包已经在路上
+重叠是事件调度的自然结果
+不需要、也不该给出「第 12 微秒启动」</a:t>
+            </a:r>
+          </a:p>
+        </p:txBody>
+      </p:sp>
+      <p:sp>
+        <p:nvSpPr>
+          <p:cNvPr id="10" name="Rounded Rectangle 9"/>
           <p:cNvSpPr/>
           <p:nvPr/>
         </p:nvSpPr>
         <p:spPr>
           <a:xfrm>
-            <a:off x="4343400" y="1920240"/>
-            <a:ext cx="3611880" cy="1965960"/>
+            <a:off x="6309360" y="1170432"/>
+            <a:ext cx="5349240" cy="3154680"/>
           </a:xfrm>
           <a:prstGeom prst="roundRect">
             <a:avLst/>
@@ -4993,24 +4961,24 @@
       </p:sp>
       <p:sp>
         <p:nvSpPr>
-          <p:cNvPr id="12" name="Rectangle 11"/>
+          <p:cNvPr id="11" name="Rectangle 10"/>
           <p:cNvSpPr/>
           <p:nvPr/>
         </p:nvSpPr>
         <p:spPr>
           <a:xfrm>
-            <a:off x="4343400" y="1920240"/>
-            <a:ext cx="64008" cy="1965960"/>
+            <a:off x="6309360" y="1170432"/>
+            <a:ext cx="64008" cy="3154680"/>
           </a:xfrm>
           <a:prstGeom prst="rect">
             <a:avLst/>
           </a:prstGeom>
           <a:solidFill>
-            <a:srgbClr val="25C8DD"/>
+            <a:srgbClr val="FF9933"/>
           </a:solidFill>
           <a:ln>
             <a:solidFill>
-              <a:srgbClr val="25C8DD"/>
+              <a:srgbClr val="FF9933"/>
             </a:solidFill>
           </a:ln>
         </p:spPr>
@@ -5038,246 +5006,88 @@
       </p:sp>
       <p:sp>
         <p:nvSpPr>
+          <p:cNvPr id="12" name="TextBox 11"/>
+          <p:cNvSpPr txBox="1"/>
+          <p:nvPr/>
+        </p:nvSpPr>
+        <p:spPr>
+          <a:xfrm>
+            <a:off x="6492240" y="1261872"/>
+            <a:ext cx="5056631" cy="310896"/>
+          </a:xfrm>
+          <a:prstGeom prst="rect">
+            <a:avLst/>
+          </a:prstGeom>
+          <a:noFill/>
+        </p:spPr>
+        <p:txBody>
+          <a:bodyPr wrap="square" anchor="ctr">
+            <a:spAutoFit/>
+          </a:bodyPr>
+          <a:lstStyle/>
+          <a:p>
+            <a:pPr algn="l"/>
+            <a:r>
+              <a:rPr sz="1600" b="1">
+                <a:solidFill>
+                  <a:srgbClr val="F8FAFD"/>
+                </a:solidFill>
+                <a:latin typeface="Droid Sans Fallback"/>
+              </a:rPr>
+              <a:t>估时不准是必然，也没关系</a:t>
+            </a:r>
+          </a:p>
+        </p:txBody>
+      </p:sp>
+      <p:sp>
+        <p:nvSpPr>
           <p:cNvPr id="13" name="TextBox 12"/>
           <p:cNvSpPr txBox="1"/>
           <p:nvPr/>
         </p:nvSpPr>
         <p:spPr>
           <a:xfrm>
-            <a:off x="4526280" y="2011680"/>
-            <a:ext cx="3319272" cy="310896"/>
-          </a:xfrm>
-          <a:prstGeom prst="rect">
-            <a:avLst/>
-          </a:prstGeom>
-          <a:noFill/>
-        </p:spPr>
-        <p:txBody>
-          <a:bodyPr wrap="square" anchor="ctr">
+            <a:off x="6492240" y="1609344"/>
+            <a:ext cx="5020055" cy="2606040"/>
+          </a:xfrm>
+          <a:prstGeom prst="rect">
+            <a:avLst/>
+          </a:prstGeom>
+          <a:noFill/>
+        </p:spPr>
+        <p:txBody>
+          <a:bodyPr wrap="square" anchor="t">
             <a:spAutoFit/>
           </a:bodyPr>
           <a:lstStyle/>
           <a:p>
             <a:pPr algn="l"/>
             <a:r>
-              <a:rPr sz="1600" b="1">
-                <a:solidFill>
-                  <a:srgbClr val="F8FAFD"/>
-                </a:solidFill>
-                <a:latin typeface="Droid Sans Fallback"/>
-              </a:rPr>
-              <a:t>TE-CCL / OptCCL</a:t>
-            </a:r>
-          </a:p>
-        </p:txBody>
-      </p:sp>
-      <p:sp>
-        <p:nvSpPr>
-          <p:cNvPr id="14" name="TextBox 13"/>
-          <p:cNvSpPr txBox="1"/>
-          <p:nvPr/>
-        </p:nvSpPr>
-        <p:spPr>
-          <a:xfrm>
-            <a:off x="4526280" y="2359152"/>
-            <a:ext cx="3282696" cy="1417319"/>
-          </a:xfrm>
-          <a:prstGeom prst="rect">
-            <a:avLst/>
-          </a:prstGeom>
-          <a:noFill/>
-        </p:spPr>
-        <p:txBody>
-          <a:bodyPr wrap="square" anchor="t">
-            <a:spAutoFit/>
-          </a:bodyPr>
-          <a:lstStyle/>
-          <a:p>
-            <a:pPr algn="l"/>
-            <a:r>
               <a:rPr sz="1400" b="0">
                 <a:solidFill>
                   <a:srgbClr val="E5ECF5"/>
                 </a:solidFill>
                 <a:latin typeface="Droid Sans Fallback"/>
               </a:rPr>
-              <a:t>更细的时间或代价模型
-仍只搜通信</a:t>
-            </a:r>
-          </a:p>
-        </p:txBody>
-      </p:sp>
-      <p:sp>
-        <p:nvSpPr>
-          <p:cNvPr id="15" name="Rounded Rectangle 14"/>
+              <a:t>边算边传会抢同一套访存
+规划时的 dur 一定会被带偏
+再估也估不圆，因为一发通信 dur 就变
+拆开循环：不用启动点，用完成事件
+晚到就晚发，结果仍对</a:t>
+            </a:r>
+          </a:p>
+        </p:txBody>
+      </p:sp>
+      <p:sp>
+        <p:nvSpPr>
+          <p:cNvPr id="14" name="Rounded Rectangle 13"/>
           <p:cNvSpPr/>
           <p:nvPr/>
         </p:nvSpPr>
         <p:spPr>
           <a:xfrm>
-            <a:off x="8138160" y="1920240"/>
-            <a:ext cx="3611880" cy="1965960"/>
-          </a:xfrm>
-          <a:prstGeom prst="roundRect">
-            <a:avLst/>
-          </a:prstGeom>
-          <a:solidFill>
-            <a:srgbClr val="1C2739"/>
-          </a:solidFill>
-          <a:ln>
-            <a:solidFill>
-              <a:srgbClr val="334560"/>
-            </a:solidFill>
-          </a:ln>
-        </p:spPr>
-        <p:style>
-          <a:lnRef idx="1">
-            <a:schemeClr val="accent1"/>
-          </a:lnRef>
-          <a:fillRef idx="3">
-            <a:schemeClr val="accent1"/>
-          </a:fillRef>
-          <a:effectRef idx="2">
-            <a:schemeClr val="accent1"/>
-          </a:effectRef>
-          <a:fontRef idx="minor">
-            <a:schemeClr val="lt1"/>
-          </a:fontRef>
-        </p:style>
-        <p:txBody>
-          <a:bodyPr rtlCol="0" anchor="ctr"/>
-          <a:lstStyle/>
-          <a:p>
-            <a:pPr algn="ctr"/>
-          </a:p>
-        </p:txBody>
-      </p:sp>
-      <p:sp>
-        <p:nvSpPr>
-          <p:cNvPr id="16" name="Rectangle 15"/>
-          <p:cNvSpPr/>
-          <p:nvPr/>
-        </p:nvSpPr>
-        <p:spPr>
-          <a:xfrm>
-            <a:off x="8138160" y="1920240"/>
-            <a:ext cx="64008" cy="1965960"/>
-          </a:xfrm>
-          <a:prstGeom prst="rect">
-            <a:avLst/>
-          </a:prstGeom>
-          <a:solidFill>
-            <a:srgbClr val="21B573"/>
-          </a:solidFill>
-          <a:ln>
-            <a:solidFill>
-              <a:srgbClr val="21B573"/>
-            </a:solidFill>
-          </a:ln>
-        </p:spPr>
-        <p:style>
-          <a:lnRef idx="1">
-            <a:schemeClr val="accent1"/>
-          </a:lnRef>
-          <a:fillRef idx="3">
-            <a:schemeClr val="accent1"/>
-          </a:fillRef>
-          <a:effectRef idx="2">
-            <a:schemeClr val="accent1"/>
-          </a:effectRef>
-          <a:fontRef idx="minor">
-            <a:schemeClr val="lt1"/>
-          </a:fontRef>
-        </p:style>
-        <p:txBody>
-          <a:bodyPr rtlCol="0" anchor="ctr"/>
-          <a:lstStyle/>
-          <a:p>
-            <a:pPr algn="ctr"/>
-          </a:p>
-        </p:txBody>
-      </p:sp>
-      <p:sp>
-        <p:nvSpPr>
-          <p:cNvPr id="17" name="TextBox 16"/>
-          <p:cNvSpPr txBox="1"/>
-          <p:nvPr/>
-        </p:nvSpPr>
-        <p:spPr>
-          <a:xfrm>
-            <a:off x="8321040" y="2011680"/>
-            <a:ext cx="3319272" cy="310896"/>
-          </a:xfrm>
-          <a:prstGeom prst="rect">
-            <a:avLst/>
-          </a:prstGeom>
-          <a:noFill/>
-        </p:spPr>
-        <p:txBody>
-          <a:bodyPr wrap="square" anchor="ctr">
-            <a:spAutoFit/>
-          </a:bodyPr>
-          <a:lstStyle/>
-          <a:p>
-            <a:pPr algn="l"/>
-            <a:r>
-              <a:rPr sz="1600" b="1">
-                <a:solidFill>
-                  <a:srgbClr val="F8FAFD"/>
-                </a:solidFill>
-                <a:latin typeface="Droid Sans Fallback"/>
-              </a:rPr>
-              <a:t>SyCCL</a:t>
-            </a:r>
-          </a:p>
-        </p:txBody>
-      </p:sp>
-      <p:sp>
-        <p:nvSpPr>
-          <p:cNvPr id="18" name="TextBox 17"/>
-          <p:cNvSpPr txBox="1"/>
-          <p:nvPr/>
-        </p:nvSpPr>
-        <p:spPr>
-          <a:xfrm>
-            <a:off x="8321040" y="2359152"/>
-            <a:ext cx="3282696" cy="1417319"/>
-          </a:xfrm>
-          <a:prstGeom prst="rect">
-            <a:avLst/>
-          </a:prstGeom>
-          <a:noFill/>
-        </p:spPr>
-        <p:txBody>
-          <a:bodyPr wrap="square" anchor="t">
-            <a:spAutoFit/>
-          </a:bodyPr>
-          <a:lstStyle/>
-          <a:p>
-            <a:pPr algn="l"/>
-            <a:r>
-              <a:rPr sz="1400" b="0">
-                <a:solidFill>
-                  <a:srgbClr val="E5ECF5"/>
-                </a:solidFill>
-                <a:latin typeface="Droid Sans Fallback"/>
-              </a:rPr>
-              <a:t>用对称把大规模切成小问题
-仍然不碰矩阵乘切块</a:t>
-            </a:r>
-          </a:p>
-        </p:txBody>
-      </p:sp>
-      <p:sp>
-        <p:nvSpPr>
-          <p:cNvPr id="19" name="Rounded Rectangle 18"/>
-          <p:cNvSpPr/>
-          <p:nvPr/>
-        </p:nvSpPr>
-        <p:spPr>
-          <a:xfrm>
-            <a:off x="548640" y="4160520"/>
-            <a:ext cx="11109960" cy="1737360"/>
+            <a:off x="548640" y="4526280"/>
+            <a:ext cx="11109960" cy="1371600"/>
           </a:xfrm>
           <a:prstGeom prst="roundRect">
             <a:avLst/>
@@ -5315,14 +5125,14 @@
       </p:sp>
       <p:sp>
         <p:nvSpPr>
-          <p:cNvPr id="20" name="TextBox 19"/>
-          <p:cNvSpPr txBox="1"/>
-          <p:nvPr/>
-        </p:nvSpPr>
-        <p:spPr>
-          <a:xfrm>
-            <a:off x="694944" y="4215383"/>
-            <a:ext cx="10853928" cy="1627631"/>
+          <p:cNvPr id="15" name="TextBox 14"/>
+          <p:cNvSpPr txBox="1"/>
+          <p:nvPr/>
+        </p:nvSpPr>
+        <p:spPr>
+          <a:xfrm>
+            <a:off x="694944" y="4581144"/>
+            <a:ext cx="10853928" cy="1261872"/>
           </a:xfrm>
           <a:prstGeom prst="rect">
             <a:avLst/>
@@ -5343,7 +5153,7 @@
                 </a:solidFill>
                 <a:latin typeface="Droid Sans Fallback"/>
               </a:rPr>
-              <a:t>背景  这些求解器假设「数据一开始就在」。融合场景里，数据是矩阵乘一块块生产出来的——所以我们只多加一条规矩：这块还没算完，不准发。求解器本体不用推倒重来。</a:t>
+              <a:t>背景  背景：集合通信库（NCCL/HCCL）本来就是「上一跳 CQE 到了再发下一跳」，没有墙上时钟。融合只是多挂一条「本地这块矩阵乘写完」。定时器 post 在争抢下既慢又可能早发，属于错误下降。</a:t>
             </a:r>
           </a:p>
         </p:txBody>
@@ -5404,7 +5214,7 @@
                 </a:solidFill>
                 <a:latin typeface="Droid Sans Fallback"/>
               </a:rPr>
-              <a:t>动机</a:t>
+              <a:t>拍板  /  两层分工</a:t>
             </a:r>
           </a:p>
         </p:txBody>
@@ -5439,7 +5249,7 @@
                 </a:solidFill>
                 <a:latin typeface="Droid Sans Fallback"/>
               </a:rPr>
-              <a:t>要解决的低效：算完再传 vs 边算边传</a:t>
+              <a:t>估时只给离线选型用，用完扔掉微秒数</a:t>
             </a:r>
           </a:p>
         </p:txBody>
@@ -5532,8 +5342,8 @@
         </p:nvSpPr>
         <p:spPr>
           <a:xfrm>
-            <a:off x="548640" y="1188720"/>
-            <a:ext cx="5394960" cy="2788920"/>
+            <a:off x="548640" y="1170432"/>
+            <a:ext cx="5532120" cy="2606040"/>
           </a:xfrm>
           <a:prstGeom prst="roundRect">
             <a:avLst/>
@@ -5577,18 +5387,18 @@
         </p:nvSpPr>
         <p:spPr>
           <a:xfrm>
-            <a:off x="548640" y="1188720"/>
-            <a:ext cx="64008" cy="2788920"/>
+            <a:off x="548640" y="1170432"/>
+            <a:ext cx="64008" cy="2606040"/>
           </a:xfrm>
           <a:prstGeom prst="rect">
             <a:avLst/>
           </a:prstGeom>
           <a:solidFill>
-            <a:srgbClr val="E14848"/>
+            <a:srgbClr val="266CFF"/>
           </a:solidFill>
           <a:ln>
             <a:solidFill>
-              <a:srgbClr val="E14848"/>
+              <a:srgbClr val="266CFF"/>
             </a:solidFill>
           </a:ln>
         </p:spPr>
@@ -5622,8 +5432,8 @@
         </p:nvSpPr>
         <p:spPr>
           <a:xfrm>
-            <a:off x="731520" y="1280160"/>
-            <a:ext cx="5102352" cy="310896"/>
+            <a:off x="731520" y="1261872"/>
+            <a:ext cx="5239512" cy="310896"/>
           </a:xfrm>
           <a:prstGeom prst="rect">
             <a:avLst/>
@@ -5644,7 +5454,7 @@
                 </a:solidFill>
                 <a:latin typeface="Droid Sans Fallback"/>
               </a:rPr>
-              <a:t>现在常见（两阶段）</a:t>
+              <a:t>策略已钉死：可以没有 dur</a:t>
             </a:r>
           </a:p>
         </p:txBody>
@@ -5657,8 +5467,8 @@
         </p:nvSpPr>
         <p:spPr>
           <a:xfrm>
-            <a:off x="731520" y="1627632"/>
-            <a:ext cx="5065776" cy="2240279"/>
+            <a:off x="731520" y="1609344"/>
+            <a:ext cx="5202936" cy="2057400"/>
           </a:xfrm>
           <a:prstGeom prst="rect">
             <a:avLst/>
@@ -5673,16 +5483,15 @@
           <a:p>
             <a:pPr algn="l"/>
             <a:r>
-              <a:rPr sz="1500" b="0">
+              <a:rPr sz="1400" b="0">
                 <a:solidFill>
                   <a:srgbClr val="E5ECF5"/>
                 </a:solidFill>
                 <a:latin typeface="Droid Sans Fallback"/>
               </a:rPr>
-              <a:t>全部 C-tile 算完
-→ 再启动一次 AllReduce
-时间 ≈ 计算 + 通信
-卡在通信时计算单元空转</a:t>
+              <a:t>冻 Ring、一块就是一包、写完就发、VT 已定
+没有选择可搜 → 不要 MILP，不要启动时刻
+编译器只给 tiling +「谁生产哪一包」这条边</a:t>
             </a:r>
           </a:p>
         </p:txBody>
@@ -5695,8 +5504,8 @@
         </p:nvSpPr>
         <p:spPr>
           <a:xfrm>
-            <a:off x="6263640" y="1188720"/>
-            <a:ext cx="5394960" cy="2788920"/>
+            <a:off x="6309360" y="1170432"/>
+            <a:ext cx="5349240" cy="2606040"/>
           </a:xfrm>
           <a:prstGeom prst="roundRect">
             <a:avLst/>
@@ -5740,18 +5549,18 @@
         </p:nvSpPr>
         <p:spPr>
           <a:xfrm>
-            <a:off x="6263640" y="1188720"/>
-            <a:ext cx="64008" cy="2788920"/>
+            <a:off x="6309360" y="1170432"/>
+            <a:ext cx="64008" cy="2606040"/>
           </a:xfrm>
           <a:prstGeom prst="rect">
             <a:avLst/>
           </a:prstGeom>
           <a:solidFill>
-            <a:srgbClr val="21B573"/>
+            <a:srgbClr val="25C8DD"/>
           </a:solidFill>
           <a:ln>
             <a:solidFill>
-              <a:srgbClr val="21B573"/>
+              <a:srgbClr val="25C8DD"/>
             </a:solidFill>
           </a:ln>
         </p:spPr>
@@ -5785,8 +5594,8 @@
         </p:nvSpPr>
         <p:spPr>
           <a:xfrm>
-            <a:off x="6446520" y="1280160"/>
-            <a:ext cx="5102352" cy="310896"/>
+            <a:off x="6492240" y="1261872"/>
+            <a:ext cx="5056631" cy="310896"/>
           </a:xfrm>
           <a:prstGeom prst="rect">
             <a:avLst/>
@@ -5807,7 +5616,7 @@
                 </a:solidFill>
                 <a:latin typeface="Droid Sans Fallback"/>
               </a:rPr>
-              <a:t>融合算子（目标）</a:t>
+              <a:t>还要选结构：才估时跑求解器</a:t>
             </a:r>
           </a:p>
         </p:txBody>
@@ -5820,8 +5629,8 @@
         </p:nvSpPr>
         <p:spPr>
           <a:xfrm>
-            <a:off x="6446520" y="1627632"/>
-            <a:ext cx="5065776" cy="2240279"/>
+            <a:off x="6492240" y="1609344"/>
+            <a:ext cx="5020055" cy="2057400"/>
           </a:xfrm>
           <a:prstGeom prst="rect">
             <a:avLst/>
@@ -5836,16 +5645,16 @@
           <a:p>
             <a:pPr algn="l"/>
             <a:r>
-              <a:rPr sz="1500" b="0">
+              <a:rPr sz="1400" b="0">
                 <a:solidFill>
                   <a:srgbClr val="E5ECF5"/>
                 </a:solidFill>
                 <a:latin typeface="Droid Sans Fallback"/>
               </a:rPr>
-              <a:t>第 1 块写出来就开始传
-后面的块边算边传
-时间 ≈ max(计算, 通信) 量级
-这就是 MM+AllReduce 融合</a:t>
+              <a:t>几块打一包、几条 VT、走哪条路
+用估时比较谁的总时间短
+交出的是打包和映射，不是闹钟
+下降：wait(写完事件); post_wqe</a:t>
             </a:r>
           </a:p>
         </p:txBody>
@@ -5858,8 +5667,8 @@
         </p:nvSpPr>
         <p:spPr>
           <a:xfrm>
-            <a:off x="548640" y="4206240"/>
-            <a:ext cx="11109960" cy="1645920"/>
+            <a:off x="548640" y="3977639"/>
+            <a:ext cx="11109960" cy="1874519"/>
           </a:xfrm>
           <a:prstGeom prst="roundRect">
             <a:avLst/>
@@ -5903,8 +5712,8 @@
         </p:nvSpPr>
         <p:spPr>
           <a:xfrm>
-            <a:off x="694944" y="4261103"/>
-            <a:ext cx="10853928" cy="1536192"/>
+            <a:off x="694944" y="4032503"/>
+            <a:ext cx="10853928" cy="1764791"/>
           </a:xfrm>
           <a:prstGeom prst="rect">
             <a:avLst/>
@@ -5925,7 +5734,7 @@
                 </a:solidFill>
                 <a:latin typeface="Droid Sans Fallback"/>
               </a:rPr>
-              <a:t>背景  「融合算子」不是把两个 API 写成一个函数名就完了。关键是时间上重叠，且重叠必须合法：没生产出来的数不能提前进 AllReduce，否则结果是错的。</a:t>
+              <a:t>背景  一句话：依赖保证对；估时只用来选方案；时钟不进内核。访存争抢的残差交给硬件仲裁；若还要运行时再切分，走自适应 VT，而不是改启动时刻。</a:t>
             </a:r>
           </a:p>
         </p:txBody>
@@ -5986,7 +5795,7 @@
                 </a:solidFill>
                 <a:latin typeface="Droid Sans Fallback"/>
               </a:rPr>
-              <a:t>分工理由</a:t>
+              <a:t>名词  /  MILP 综合器</a:t>
             </a:r>
           </a:p>
         </p:txBody>
@@ -6021,7 +5830,7 @@
                 </a:solidFill>
                 <a:latin typeface="Droid Sans Fallback"/>
               </a:rPr>
-              <a:t>为什么不让求解器连切块一起搜</a:t>
+              <a:t>背景：现有求解器本来只干一件事——编通信</a:t>
             </a:r>
           </a:p>
         </p:txBody>
@@ -6108,14 +5917,50 @@
       </p:sp>
       <p:sp>
         <p:nvSpPr>
-          <p:cNvPr id="6" name="Rounded Rectangle 5"/>
+          <p:cNvPr id="6" name="TextBox 5"/>
+          <p:cNvSpPr txBox="1"/>
+          <p:nvPr/>
+        </p:nvSpPr>
+        <p:spPr>
+          <a:xfrm>
+            <a:off x="640080" y="1115568"/>
+            <a:ext cx="10972800" cy="640080"/>
+          </a:xfrm>
+          <a:prstGeom prst="rect">
+            <a:avLst/>
+          </a:prstGeom>
+          <a:noFill/>
+        </p:spPr>
+        <p:txBody>
+          <a:bodyPr wrap="square" anchor="ctr">
+            <a:spAutoFit/>
+          </a:bodyPr>
+          <a:lstStyle/>
+          <a:p>
+            <a:pPr algn="l"/>
+            <a:r>
+              <a:rPr sz="1600" b="0">
+                <a:solidFill>
+                  <a:srgbClr val="E5ECF5"/>
+                </a:solidFill>
+                <a:latin typeface="Droid Sans Fallback"/>
+              </a:rPr>
+              <a:t>输入：卡怎么连、每条链路多慢、要做哪种集合、数据切成几块。
+输出：一张时刻表——谁在何时把哪一块发给谁。</a:t>
+            </a:r>
+          </a:p>
+        </p:txBody>
+      </p:sp>
+      <p:sp>
+        <p:nvSpPr>
+          <p:cNvPr id="7" name="Rounded Rectangle 6"/>
           <p:cNvSpPr/>
           <p:nvPr/>
         </p:nvSpPr>
         <p:spPr>
           <a:xfrm>
-            <a:off x="548640" y="1188720"/>
-            <a:ext cx="3611880" cy="2880360"/>
+            <a:off x="548640" y="1920240"/>
+            <a:ext cx="3611880" cy="1965960"/>
           </a:xfrm>
           <a:prstGeom prst="roundRect">
             <a:avLst/>
@@ -6153,24 +5998,24 @@
       </p:sp>
       <p:sp>
         <p:nvSpPr>
-          <p:cNvPr id="7" name="Rectangle 6"/>
+          <p:cNvPr id="8" name="Rectangle 7"/>
           <p:cNvSpPr/>
           <p:nvPr/>
         </p:nvSpPr>
         <p:spPr>
           <a:xfrm>
-            <a:off x="548640" y="1188720"/>
-            <a:ext cx="64008" cy="2880360"/>
+            <a:off x="548640" y="1920240"/>
+            <a:ext cx="64008" cy="1965960"/>
           </a:xfrm>
           <a:prstGeom prst="rect">
             <a:avLst/>
           </a:prstGeom>
           <a:solidFill>
-            <a:srgbClr val="E14848"/>
+            <a:srgbClr val="266CFF"/>
           </a:solidFill>
           <a:ln>
             <a:solidFill>
-              <a:srgbClr val="E14848"/>
+              <a:srgbClr val="266CFF"/>
             </a:solidFill>
           </a:ln>
         </p:spPr>
@@ -6198,13 +6043,13 @@
       </p:sp>
       <p:sp>
         <p:nvSpPr>
-          <p:cNvPr id="8" name="TextBox 7"/>
-          <p:cNvSpPr txBox="1"/>
-          <p:nvPr/>
-        </p:nvSpPr>
-        <p:spPr>
-          <a:xfrm>
-            <a:off x="731520" y="1280160"/>
+          <p:cNvPr id="9" name="TextBox 8"/>
+          <p:cNvSpPr txBox="1"/>
+          <p:nvPr/>
+        </p:nvSpPr>
+        <p:spPr>
+          <a:xfrm>
+            <a:off x="731520" y="2011680"/>
             <a:ext cx="3319272" cy="310896"/>
           </a:xfrm>
           <a:prstGeom prst="rect">
@@ -6226,21 +6071,21 @@
                 </a:solidFill>
                 <a:latin typeface="Droid Sans Fallback"/>
               </a:rPr>
-              <a:t>搜的东西不一样</a:t>
-            </a:r>
-          </a:p>
-        </p:txBody>
-      </p:sp>
-      <p:sp>
-        <p:nvSpPr>
-          <p:cNvPr id="9" name="TextBox 8"/>
-          <p:cNvSpPr txBox="1"/>
-          <p:nvPr/>
-        </p:nvSpPr>
-        <p:spPr>
-          <a:xfrm>
-            <a:off x="731520" y="1627632"/>
-            <a:ext cx="3282696" cy="2331720"/>
+              <a:t>TACCL</a:t>
+            </a:r>
+          </a:p>
+        </p:txBody>
+      </p:sp>
+      <p:sp>
+        <p:nvSpPr>
+          <p:cNvPr id="10" name="TextBox 9"/>
+          <p:cNvSpPr txBox="1"/>
+          <p:nvPr/>
+        </p:nvSpPr>
+        <p:spPr>
+          <a:xfrm>
+            <a:off x="731520" y="2359152"/>
+            <a:ext cx="3282696" cy="1417319"/>
           </a:xfrm>
           <a:prstGeom prst="rect">
             <a:avLst/>
@@ -6255,29 +6100,28 @@
           <a:p>
             <a:pPr algn="l"/>
             <a:r>
-              <a:rPr sz="1300" b="0">
+              <a:rPr sz="1400" b="0">
                 <a:solidFill>
                   <a:srgbClr val="E5ECF5"/>
                 </a:solidFill>
                 <a:latin typeface="Droid Sans Fallback"/>
               </a:rPr>
-              <a:t>通信变量：哪块数据走哪条链路。
-切块变量：小矩形长宽、流水级数。
-乘在一起，方程规模爆炸。</a:t>
-            </a:r>
-          </a:p>
-        </p:txBody>
-      </p:sp>
-      <p:sp>
-        <p:nvSpPr>
-          <p:cNvPr id="10" name="Rounded Rectangle 9"/>
+              <a:t>把拓扑和集体语义写成整数规划
+搜通信日程</a:t>
+            </a:r>
+          </a:p>
+        </p:txBody>
+      </p:sp>
+      <p:sp>
+        <p:nvSpPr>
+          <p:cNvPr id="11" name="Rounded Rectangle 10"/>
           <p:cNvSpPr/>
           <p:nvPr/>
         </p:nvSpPr>
         <p:spPr>
           <a:xfrm>
-            <a:off x="4343400" y="1188720"/>
-            <a:ext cx="3611880" cy="2880360"/>
+            <a:off x="4343400" y="1920240"/>
+            <a:ext cx="3611880" cy="1965960"/>
           </a:xfrm>
           <a:prstGeom prst="roundRect">
             <a:avLst/>
@@ -6315,24 +6159,24 @@
       </p:sp>
       <p:sp>
         <p:nvSpPr>
-          <p:cNvPr id="11" name="Rectangle 10"/>
+          <p:cNvPr id="12" name="Rectangle 11"/>
           <p:cNvSpPr/>
           <p:nvPr/>
         </p:nvSpPr>
         <p:spPr>
           <a:xfrm>
-            <a:off x="4343400" y="1188720"/>
-            <a:ext cx="64008" cy="2880360"/>
+            <a:off x="4343400" y="1920240"/>
+            <a:ext cx="64008" cy="1965960"/>
           </a:xfrm>
           <a:prstGeom prst="rect">
             <a:avLst/>
           </a:prstGeom>
           <a:solidFill>
-            <a:srgbClr val="FF9933"/>
+            <a:srgbClr val="25C8DD"/>
           </a:solidFill>
           <a:ln>
             <a:solidFill>
-              <a:srgbClr val="FF9933"/>
+              <a:srgbClr val="25C8DD"/>
             </a:solidFill>
           </a:ln>
         </p:spPr>
@@ -6360,13 +6204,13 @@
       </p:sp>
       <p:sp>
         <p:nvSpPr>
-          <p:cNvPr id="12" name="TextBox 11"/>
-          <p:cNvSpPr txBox="1"/>
-          <p:nvPr/>
-        </p:nvSpPr>
-        <p:spPr>
-          <a:xfrm>
-            <a:off x="4526280" y="1280160"/>
+          <p:cNvPr id="13" name="TextBox 12"/>
+          <p:cNvSpPr txBox="1"/>
+          <p:nvPr/>
+        </p:nvSpPr>
+        <p:spPr>
+          <a:xfrm>
+            <a:off x="4526280" y="2011680"/>
             <a:ext cx="3319272" cy="310896"/>
           </a:xfrm>
           <a:prstGeom prst="rect">
@@ -6388,21 +6232,21 @@
                 </a:solidFill>
                 <a:latin typeface="Droid Sans Fallback"/>
               </a:rPr>
-              <a:t>快慢模型不一样</a:t>
-            </a:r>
-          </a:p>
-        </p:txBody>
-      </p:sp>
-      <p:sp>
-        <p:nvSpPr>
-          <p:cNvPr id="13" name="TextBox 12"/>
-          <p:cNvSpPr txBox="1"/>
-          <p:nvPr/>
-        </p:nvSpPr>
-        <p:spPr>
-          <a:xfrm>
-            <a:off x="4526280" y="1627632"/>
-            <a:ext cx="3282696" cy="2331720"/>
+              <a:t>TE-CCL / OptCCL</a:t>
+            </a:r>
+          </a:p>
+        </p:txBody>
+      </p:sp>
+      <p:sp>
+        <p:nvSpPr>
+          <p:cNvPr id="14" name="TextBox 13"/>
+          <p:cNvSpPr txBox="1"/>
+          <p:nvPr/>
+        </p:nvSpPr>
+        <p:spPr>
+          <a:xfrm>
+            <a:off x="4526280" y="2359152"/>
+            <a:ext cx="3282696" cy="1417319"/>
           </a:xfrm>
           <a:prstGeom prst="rect">
             <a:avLst/>
@@ -6417,29 +6261,28 @@
           <a:p>
             <a:pPr algn="l"/>
             <a:r>
-              <a:rPr sz="1300" b="0">
+              <a:rPr sz="1400" b="0">
                 <a:solidFill>
                   <a:srgbClr val="E5ECF5"/>
                 </a:solidFill>
                 <a:latin typeface="Droid Sans Fallback"/>
               </a:rPr>
-              <a:t>链路用「启动延迟 + 每字节时间」。
-切块快慢取决于计算单元和内存层次。
-通信求解器没有一份可信的切块耗时表。</a:t>
-            </a:r>
-          </a:p>
-        </p:txBody>
-      </p:sp>
-      <p:sp>
-        <p:nvSpPr>
-          <p:cNvPr id="14" name="Rounded Rectangle 13"/>
+              <a:t>更细的时间或代价模型
+仍只搜通信</a:t>
+            </a:r>
+          </a:p>
+        </p:txBody>
+      </p:sp>
+      <p:sp>
+        <p:nvSpPr>
+          <p:cNvPr id="15" name="Rounded Rectangle 14"/>
           <p:cNvSpPr/>
           <p:nvPr/>
         </p:nvSpPr>
         <p:spPr>
           <a:xfrm>
-            <a:off x="8138160" y="1188720"/>
-            <a:ext cx="3611880" cy="2880360"/>
+            <a:off x="8138160" y="1920240"/>
+            <a:ext cx="3611880" cy="1965960"/>
           </a:xfrm>
           <a:prstGeom prst="roundRect">
             <a:avLst/>
@@ -6477,24 +6320,24 @@
       </p:sp>
       <p:sp>
         <p:nvSpPr>
-          <p:cNvPr id="15" name="Rectangle 14"/>
+          <p:cNvPr id="16" name="Rectangle 15"/>
           <p:cNvSpPr/>
           <p:nvPr/>
         </p:nvSpPr>
         <p:spPr>
           <a:xfrm>
-            <a:off x="8138160" y="1188720"/>
-            <a:ext cx="64008" cy="2880360"/>
+            <a:off x="8138160" y="1920240"/>
+            <a:ext cx="64008" cy="1965960"/>
           </a:xfrm>
           <a:prstGeom prst="rect">
             <a:avLst/>
           </a:prstGeom>
           <a:solidFill>
-            <a:srgbClr val="25C8DD"/>
+            <a:srgbClr val="21B573"/>
           </a:solidFill>
           <a:ln>
             <a:solidFill>
-              <a:srgbClr val="25C8DD"/>
+              <a:srgbClr val="21B573"/>
             </a:solidFill>
           </a:ln>
         </p:spPr>
@@ -6522,13 +6365,13 @@
       </p:sp>
       <p:sp>
         <p:nvSpPr>
-          <p:cNvPr id="16" name="TextBox 15"/>
-          <p:cNvSpPr txBox="1"/>
-          <p:nvPr/>
-        </p:nvSpPr>
-        <p:spPr>
-          <a:xfrm>
-            <a:off x="8321040" y="1280160"/>
+          <p:cNvPr id="17" name="TextBox 16"/>
+          <p:cNvSpPr txBox="1"/>
+          <p:nvPr/>
+        </p:nvSpPr>
+        <p:spPr>
+          <a:xfrm>
+            <a:off x="8321040" y="2011680"/>
             <a:ext cx="3319272" cy="310896"/>
           </a:xfrm>
           <a:prstGeom prst="rect">
@@ -6550,21 +6393,21 @@
                 </a:solidFill>
                 <a:latin typeface="Droid Sans Fallback"/>
               </a:rPr>
-              <a:t>改切块等于改实现</a:t>
-            </a:r>
-          </a:p>
-        </p:txBody>
-      </p:sp>
-      <p:sp>
-        <p:nvSpPr>
-          <p:cNvPr id="17" name="TextBox 16"/>
-          <p:cNvSpPr txBox="1"/>
-          <p:nvPr/>
-        </p:nvSpPr>
-        <p:spPr>
-          <a:xfrm>
-            <a:off x="8321040" y="1627632"/>
-            <a:ext cx="3282696" cy="2331720"/>
+              <a:t>SyCCL</a:t>
+            </a:r>
+          </a:p>
+        </p:txBody>
+      </p:sp>
+      <p:sp>
+        <p:nvSpPr>
+          <p:cNvPr id="18" name="TextBox 17"/>
+          <p:cNvSpPr txBox="1"/>
+          <p:nvPr/>
+        </p:nvSpPr>
+        <p:spPr>
+          <a:xfrm>
+            <a:off x="8321040" y="2359152"/>
+            <a:ext cx="3282696" cy="1417319"/>
           </a:xfrm>
           <a:prstGeom prst="rect">
             <a:avLst/>
@@ -6579,29 +6422,28 @@
           <a:p>
             <a:pPr algn="l"/>
             <a:r>
-              <a:rPr sz="1300" b="0">
+              <a:rPr sz="1400" b="0">
                 <a:solidFill>
                   <a:srgbClr val="E5ECF5"/>
                 </a:solidFill>
                 <a:latin typeface="Droid Sans Fallback"/>
               </a:rPr>
-              <a:t>切块、累加顺序、尾处理（bias/激活）
-影响数值。这是计算编译器的职责，
-通信求解器改了就是改 GEMM。</a:t>
-            </a:r>
-          </a:p>
-        </p:txBody>
-      </p:sp>
-      <p:sp>
-        <p:nvSpPr>
-          <p:cNvPr id="18" name="Rounded Rectangle 17"/>
+              <a:t>用对称把大规模切成小问题
+仍然不碰矩阵乘切块</a:t>
+            </a:r>
+          </a:p>
+        </p:txBody>
+      </p:sp>
+      <p:sp>
+        <p:nvSpPr>
+          <p:cNvPr id="19" name="Rounded Rectangle 18"/>
           <p:cNvSpPr/>
           <p:nvPr/>
         </p:nvSpPr>
         <p:spPr>
           <a:xfrm>
-            <a:off x="548640" y="4297680"/>
-            <a:ext cx="11109960" cy="1554480"/>
+            <a:off x="548640" y="4160520"/>
+            <a:ext cx="11109960" cy="1737360"/>
           </a:xfrm>
           <a:prstGeom prst="roundRect">
             <a:avLst/>
@@ -6639,14 +6481,14 @@
       </p:sp>
       <p:sp>
         <p:nvSpPr>
-          <p:cNvPr id="19" name="TextBox 18"/>
-          <p:cNvSpPr txBox="1"/>
-          <p:nvPr/>
-        </p:nvSpPr>
-        <p:spPr>
-          <a:xfrm>
-            <a:off x="694944" y="4352544"/>
-            <a:ext cx="10853928" cy="1444752"/>
+          <p:cNvPr id="20" name="TextBox 19"/>
+          <p:cNvSpPr txBox="1"/>
+          <p:nvPr/>
+        </p:nvSpPr>
+        <p:spPr>
+          <a:xfrm>
+            <a:off x="694944" y="4215383"/>
+            <a:ext cx="10853928" cy="1627631"/>
           </a:xfrm>
           <a:prstGeom prst="rect">
             <a:avLst/>
@@ -6667,7 +6509,7 @@
                 </a:solidFill>
                 <a:latin typeface="Droid Sans Fallback"/>
               </a:rPr>
-              <a:t>背景  如果以后要试几种切块，放在外层：计算编译器给出 3～5 套候选，每套跑一次通信求解器，比较总完成时间。切块仍然不进求解器内部。</a:t>
+              <a:t>背景  这些求解器假设「数据一开始就在」。融合场景里，数据是矩阵乘一块块生产出来的——所以我们只多加一条规矩：这块还没算完，不准发。求解器本体不用推倒重来。</a:t>
             </a:r>
           </a:p>
         </p:txBody>
@@ -6728,7 +6570,7 @@
                 </a:solidFill>
                 <a:latin typeface="Droid Sans Fallback"/>
               </a:rPr>
-              <a:t>架构</a:t>
+              <a:t>动机</a:t>
             </a:r>
           </a:p>
         </p:txBody>
@@ -6763,7 +6605,7 @@
                 </a:solidFill>
                 <a:latin typeface="Droid Sans Fallback"/>
               </a:rPr>
-              <a:t>方案：编译器给两份，求解器只编通信</a:t>
+              <a:t>要解决的低效：算完再传 vs 边算边传</a:t>
             </a:r>
           </a:p>
         </p:txBody>
@@ -6856,8 +6698,8 @@
         </p:nvSpPr>
         <p:spPr>
           <a:xfrm>
-            <a:off x="502920" y="1234440"/>
-            <a:ext cx="2697480" cy="2331720"/>
+            <a:off x="548640" y="1188720"/>
+            <a:ext cx="5394960" cy="2788920"/>
           </a:xfrm>
           <a:prstGeom prst="roundRect">
             <a:avLst/>
@@ -6867,7 +6709,7 @@
           </a:solidFill>
           <a:ln>
             <a:solidFill>
-              <a:srgbClr val="266CFF"/>
+              <a:srgbClr val="334560"/>
             </a:solidFill>
           </a:ln>
         </p:spPr>
@@ -6895,24 +6737,24 @@
       </p:sp>
       <p:sp>
         <p:nvSpPr>
-          <p:cNvPr id="7" name="Rounded Rectangle 6"/>
+          <p:cNvPr id="7" name="Rectangle 6"/>
           <p:cNvSpPr/>
           <p:nvPr/>
         </p:nvSpPr>
         <p:spPr>
           <a:xfrm>
-            <a:off x="640080" y="1417320"/>
-            <a:ext cx="2423160" cy="310896"/>
-          </a:xfrm>
-          <a:prstGeom prst="roundRect">
+            <a:off x="548640" y="1188720"/>
+            <a:ext cx="64008" cy="2788920"/>
+          </a:xfrm>
+          <a:prstGeom prst="rect">
             <a:avLst/>
           </a:prstGeom>
           <a:solidFill>
-            <a:srgbClr val="266CFF"/>
+            <a:srgbClr val="E14848"/>
           </a:solidFill>
           <a:ln>
             <a:solidFill>
-              <a:srgbClr val="266CFF"/>
+              <a:srgbClr val="E14848"/>
             </a:solidFill>
           </a:ln>
         </p:spPr>
@@ -6946,8 +6788,8 @@
         </p:nvSpPr>
         <p:spPr>
           <a:xfrm>
-            <a:off x="640080" y="1417320"/>
-            <a:ext cx="2423160" cy="310896"/>
+            <a:off x="731520" y="1280160"/>
+            <a:ext cx="5102352" cy="310896"/>
           </a:xfrm>
           <a:prstGeom prst="rect">
             <a:avLst/>
@@ -6960,15 +6802,15 @@
           </a:bodyPr>
           <a:lstStyle/>
           <a:p>
-            <a:pPr algn="ctr"/>
-            <a:r>
-              <a:rPr sz="1300" b="1">
+            <a:pPr algn="l"/>
+            <a:r>
+              <a:rPr sz="1600" b="1">
                 <a:solidFill>
                   <a:srgbClr val="F8FAFD"/>
                 </a:solidFill>
                 <a:latin typeface="Droid Sans Fallback"/>
               </a:rPr>
-              <a:t>计算编译器</a:t>
+              <a:t>现在常见（两阶段）</a:t>
             </a:r>
           </a:p>
         </p:txBody>
@@ -6981,21 +6823,21 @@
         </p:nvSpPr>
         <p:spPr>
           <a:xfrm>
-            <a:off x="667512" y="1965960"/>
-            <a:ext cx="2377440" cy="1371600"/>
-          </a:xfrm>
-          <a:prstGeom prst="rect">
-            <a:avLst/>
-          </a:prstGeom>
-          <a:noFill/>
-        </p:spPr>
-        <p:txBody>
-          <a:bodyPr wrap="square" anchor="ctr">
-            <a:spAutoFit/>
-          </a:bodyPr>
-          <a:lstStyle/>
-          <a:p>
-            <a:pPr algn="ctr"/>
+            <a:off x="731520" y="1627632"/>
+            <a:ext cx="5065776" cy="2240279"/>
+          </a:xfrm>
+          <a:prstGeom prst="rect">
+            <a:avLst/>
+          </a:prstGeom>
+          <a:noFill/>
+        </p:spPr>
+        <p:txBody>
+          <a:bodyPr wrap="square" anchor="t">
+            <a:spAutoFit/>
+          </a:bodyPr>
+          <a:lstStyle/>
+          <a:p>
+            <a:pPr algn="l"/>
             <a:r>
               <a:rPr sz="1500" b="0">
                 <a:solidFill>
@@ -7003,57 +6845,24 @@
                 </a:solidFill>
                 <a:latin typeface="Droid Sans Fallback"/>
               </a:rPr>
-              <a:t>① tiling
-② 计算流图</a:t>
-            </a:r>
-          </a:p>
-        </p:txBody>
-      </p:sp>
-      <p:sp>
-        <p:nvSpPr>
-          <p:cNvPr id="10" name="TextBox 9"/>
-          <p:cNvSpPr txBox="1"/>
-          <p:nvPr/>
-        </p:nvSpPr>
-        <p:spPr>
-          <a:xfrm>
-            <a:off x="3108960" y="2011680"/>
-            <a:ext cx="365760" cy="457200"/>
-          </a:xfrm>
-          <a:prstGeom prst="rect">
-            <a:avLst/>
-          </a:prstGeom>
-          <a:noFill/>
-        </p:spPr>
-        <p:txBody>
-          <a:bodyPr wrap="square" anchor="ctr">
-            <a:spAutoFit/>
-          </a:bodyPr>
-          <a:lstStyle/>
-          <a:p>
-            <a:pPr algn="ctr"/>
-            <a:r>
-              <a:rPr sz="2200" b="1">
-                <a:solidFill>
-                  <a:srgbClr val="8294AE"/>
-                </a:solidFill>
-                <a:latin typeface="Droid Sans Fallback"/>
-              </a:rPr>
-              <a:t>→</a:t>
-            </a:r>
-          </a:p>
-        </p:txBody>
-      </p:sp>
-      <p:sp>
-        <p:nvSpPr>
-          <p:cNvPr id="11" name="Rounded Rectangle 10"/>
+              <a:t>全部 C-tile 算完
+→ 再启动一次 AllReduce
+时间 ≈ 计算 + 通信
+卡在通信时计算单元空转</a:t>
+            </a:r>
+          </a:p>
+        </p:txBody>
+      </p:sp>
+      <p:sp>
+        <p:nvSpPr>
+          <p:cNvPr id="10" name="Rounded Rectangle 9"/>
           <p:cNvSpPr/>
           <p:nvPr/>
         </p:nvSpPr>
         <p:spPr>
           <a:xfrm>
-            <a:off x="3429000" y="1234440"/>
-            <a:ext cx="2697480" cy="2331720"/>
+            <a:off x="6263640" y="1188720"/>
+            <a:ext cx="5394960" cy="2788920"/>
           </a:xfrm>
           <a:prstGeom prst="roundRect">
             <a:avLst/>
@@ -7063,7 +6872,7 @@
           </a:solidFill>
           <a:ln>
             <a:solidFill>
-              <a:srgbClr val="FF9933"/>
+              <a:srgbClr val="334560"/>
             </a:solidFill>
           </a:ln>
         </p:spPr>
@@ -7091,212 +6900,16 @@
       </p:sp>
       <p:sp>
         <p:nvSpPr>
-          <p:cNvPr id="12" name="Rounded Rectangle 11"/>
+          <p:cNvPr id="11" name="Rectangle 10"/>
           <p:cNvSpPr/>
           <p:nvPr/>
         </p:nvSpPr>
         <p:spPr>
           <a:xfrm>
-            <a:off x="3566160" y="1417320"/>
-            <a:ext cx="2423160" cy="310896"/>
-          </a:xfrm>
-          <a:prstGeom prst="roundRect">
-            <a:avLst/>
-          </a:prstGeom>
-          <a:solidFill>
-            <a:srgbClr val="FF9933"/>
-          </a:solidFill>
-          <a:ln>
-            <a:solidFill>
-              <a:srgbClr val="FF9933"/>
-            </a:solidFill>
-          </a:ln>
-        </p:spPr>
-        <p:style>
-          <a:lnRef idx="1">
-            <a:schemeClr val="accent1"/>
-          </a:lnRef>
-          <a:fillRef idx="3">
-            <a:schemeClr val="accent1"/>
-          </a:fillRef>
-          <a:effectRef idx="2">
-            <a:schemeClr val="accent1"/>
-          </a:effectRef>
-          <a:fontRef idx="minor">
-            <a:schemeClr val="lt1"/>
-          </a:fontRef>
-        </p:style>
-        <p:txBody>
-          <a:bodyPr rtlCol="0" anchor="ctr"/>
-          <a:lstStyle/>
-          <a:p>
-            <a:pPr algn="ctr"/>
-          </a:p>
-        </p:txBody>
-      </p:sp>
-      <p:sp>
-        <p:nvSpPr>
-          <p:cNvPr id="13" name="TextBox 12"/>
-          <p:cNvSpPr txBox="1"/>
-          <p:nvPr/>
-        </p:nvSpPr>
-        <p:spPr>
-          <a:xfrm>
-            <a:off x="3566160" y="1417320"/>
-            <a:ext cx="2423160" cy="310896"/>
-          </a:xfrm>
-          <a:prstGeom prst="rect">
-            <a:avLst/>
-          </a:prstGeom>
-          <a:noFill/>
-        </p:spPr>
-        <p:txBody>
-          <a:bodyPr wrap="square" anchor="ctr">
-            <a:spAutoFit/>
-          </a:bodyPr>
-          <a:lstStyle/>
-          <a:p>
-            <a:pPr algn="ctr"/>
-            <a:r>
-              <a:rPr sz="1300" b="1">
-                <a:solidFill>
-                  <a:srgbClr val="F8FAFD"/>
-                </a:solidFill>
-                <a:latin typeface="Droid Sans Fallback"/>
-              </a:rPr>
-              <a:t>机械推导  不搜</a:t>
-            </a:r>
-          </a:p>
-        </p:txBody>
-      </p:sp>
-      <p:sp>
-        <p:nvSpPr>
-          <p:cNvPr id="14" name="TextBox 13"/>
-          <p:cNvSpPr txBox="1"/>
-          <p:nvPr/>
-        </p:nvSpPr>
-        <p:spPr>
-          <a:xfrm>
-            <a:off x="3593592" y="1965960"/>
-            <a:ext cx="2377440" cy="1371600"/>
-          </a:xfrm>
-          <a:prstGeom prst="rect">
-            <a:avLst/>
-          </a:prstGeom>
-          <a:noFill/>
-        </p:spPr>
-        <p:txBody>
-          <a:bodyPr wrap="square" anchor="ctr">
-            <a:spAutoFit/>
-          </a:bodyPr>
-          <a:lstStyle/>
-          <a:p>
-            <a:pPr algn="ctr"/>
-            <a:r>
-              <a:rPr sz="1500" b="0">
-                <a:solidFill>
-                  <a:srgbClr val="E5ECF5"/>
-                </a:solidFill>
-                <a:latin typeface="Droid Sans Fallback"/>
-              </a:rPr>
-              <a:t>何时有货 ready
-计算占了哪些资源</a:t>
-            </a:r>
-          </a:p>
-        </p:txBody>
-      </p:sp>
-      <p:sp>
-        <p:nvSpPr>
-          <p:cNvPr id="15" name="TextBox 14"/>
-          <p:cNvSpPr txBox="1"/>
-          <p:nvPr/>
-        </p:nvSpPr>
-        <p:spPr>
-          <a:xfrm>
-            <a:off x="6035040" y="2011680"/>
-            <a:ext cx="365760" cy="457200"/>
-          </a:xfrm>
-          <a:prstGeom prst="rect">
-            <a:avLst/>
-          </a:prstGeom>
-          <a:noFill/>
-        </p:spPr>
-        <p:txBody>
-          <a:bodyPr wrap="square" anchor="ctr">
-            <a:spAutoFit/>
-          </a:bodyPr>
-          <a:lstStyle/>
-          <a:p>
-            <a:pPr algn="ctr"/>
-            <a:r>
-              <a:rPr sz="2200" b="1">
-                <a:solidFill>
-                  <a:srgbClr val="8294AE"/>
-                </a:solidFill>
-                <a:latin typeface="Droid Sans Fallback"/>
-              </a:rPr>
-              <a:t>→</a:t>
-            </a:r>
-          </a:p>
-        </p:txBody>
-      </p:sp>
-      <p:sp>
-        <p:nvSpPr>
-          <p:cNvPr id="16" name="Rounded Rectangle 15"/>
-          <p:cNvSpPr/>
-          <p:nvPr/>
-        </p:nvSpPr>
-        <p:spPr>
-          <a:xfrm>
-            <a:off x="6355080" y="1234440"/>
-            <a:ext cx="2697480" cy="2331720"/>
-          </a:xfrm>
-          <a:prstGeom prst="roundRect">
-            <a:avLst/>
-          </a:prstGeom>
-          <a:solidFill>
-            <a:srgbClr val="1C2739"/>
-          </a:solidFill>
-          <a:ln>
-            <a:solidFill>
-              <a:srgbClr val="21B573"/>
-            </a:solidFill>
-          </a:ln>
-        </p:spPr>
-        <p:style>
-          <a:lnRef idx="1">
-            <a:schemeClr val="accent1"/>
-          </a:lnRef>
-          <a:fillRef idx="3">
-            <a:schemeClr val="accent1"/>
-          </a:fillRef>
-          <a:effectRef idx="2">
-            <a:schemeClr val="accent1"/>
-          </a:effectRef>
-          <a:fontRef idx="minor">
-            <a:schemeClr val="lt1"/>
-          </a:fontRef>
-        </p:style>
-        <p:txBody>
-          <a:bodyPr rtlCol="0" anchor="ctr"/>
-          <a:lstStyle/>
-          <a:p>
-            <a:pPr algn="ctr"/>
-          </a:p>
-        </p:txBody>
-      </p:sp>
-      <p:sp>
-        <p:nvSpPr>
-          <p:cNvPr id="17" name="Rounded Rectangle 16"/>
-          <p:cNvSpPr/>
-          <p:nvPr/>
-        </p:nvSpPr>
-        <p:spPr>
-          <a:xfrm>
-            <a:off x="6492240" y="1417320"/>
-            <a:ext cx="2423160" cy="310896"/>
-          </a:xfrm>
-          <a:prstGeom prst="roundRect">
+            <a:off x="6263640" y="1188720"/>
+            <a:ext cx="64008" cy="2788920"/>
+          </a:xfrm>
+          <a:prstGeom prst="rect">
             <a:avLst/>
           </a:prstGeom>
           <a:solidFill>
@@ -7332,14 +6945,14 @@
       </p:sp>
       <p:sp>
         <p:nvSpPr>
-          <p:cNvPr id="18" name="TextBox 17"/>
-          <p:cNvSpPr txBox="1"/>
-          <p:nvPr/>
-        </p:nvSpPr>
-        <p:spPr>
-          <a:xfrm>
-            <a:off x="6492240" y="1417320"/>
-            <a:ext cx="2423160" cy="310896"/>
+          <p:cNvPr id="12" name="TextBox 11"/>
+          <p:cNvSpPr txBox="1"/>
+          <p:nvPr/>
+        </p:nvSpPr>
+        <p:spPr>
+          <a:xfrm>
+            <a:off x="6446520" y="1280160"/>
+            <a:ext cx="5102352" cy="310896"/>
           </a:xfrm>
           <a:prstGeom prst="rect">
             <a:avLst/>
@@ -7352,42 +6965,42 @@
           </a:bodyPr>
           <a:lstStyle/>
           <a:p>
-            <a:pPr algn="ctr"/>
-            <a:r>
-              <a:rPr sz="1300" b="1">
+            <a:pPr algn="l"/>
+            <a:r>
+              <a:rPr sz="1600" b="1">
                 <a:solidFill>
                   <a:srgbClr val="F8FAFD"/>
                 </a:solidFill>
                 <a:latin typeface="Droid Sans Fallback"/>
               </a:rPr>
-              <a:t>通信 MILP</a:t>
-            </a:r>
-          </a:p>
-        </p:txBody>
-      </p:sp>
-      <p:sp>
-        <p:nvSpPr>
-          <p:cNvPr id="19" name="TextBox 18"/>
-          <p:cNvSpPr txBox="1"/>
-          <p:nvPr/>
-        </p:nvSpPr>
-        <p:spPr>
-          <a:xfrm>
-            <a:off x="6519672" y="1965960"/>
-            <a:ext cx="2377440" cy="1371600"/>
-          </a:xfrm>
-          <a:prstGeom prst="rect">
-            <a:avLst/>
-          </a:prstGeom>
-          <a:noFill/>
-        </p:spPr>
-        <p:txBody>
-          <a:bodyPr wrap="square" anchor="ctr">
-            <a:spAutoFit/>
-          </a:bodyPr>
-          <a:lstStyle/>
-          <a:p>
-            <a:pPr algn="ctr"/>
+              <a:t>融合算子（目标）</a:t>
+            </a:r>
+          </a:p>
+        </p:txBody>
+      </p:sp>
+      <p:sp>
+        <p:nvSpPr>
+          <p:cNvPr id="13" name="TextBox 12"/>
+          <p:cNvSpPr txBox="1"/>
+          <p:nvPr/>
+        </p:nvSpPr>
+        <p:spPr>
+          <a:xfrm>
+            <a:off x="6446520" y="1627632"/>
+            <a:ext cx="5065776" cy="2240279"/>
+          </a:xfrm>
+          <a:prstGeom prst="rect">
+            <a:avLst/>
+          </a:prstGeom>
+          <a:noFill/>
+        </p:spPr>
+        <p:txBody>
+          <a:bodyPr wrap="square" anchor="t">
+            <a:spAutoFit/>
+          </a:bodyPr>
+          <a:lstStyle/>
+          <a:p>
+            <a:pPr algn="l"/>
             <a:r>
               <a:rPr sz="1500" b="0">
                 <a:solidFill>
@@ -7395,289 +7008,24 @@
                 </a:solidFill>
                 <a:latin typeface="Droid Sans Fallback"/>
               </a:rPr>
-              <a:t>在「不准早发」下
-排出 AllReduce 时刻表</a:t>
-            </a:r>
-          </a:p>
-        </p:txBody>
-      </p:sp>
-      <p:sp>
-        <p:nvSpPr>
-          <p:cNvPr id="20" name="TextBox 19"/>
-          <p:cNvSpPr txBox="1"/>
-          <p:nvPr/>
-        </p:nvSpPr>
-        <p:spPr>
-          <a:xfrm>
-            <a:off x="8961120" y="2011680"/>
-            <a:ext cx="365760" cy="457200"/>
-          </a:xfrm>
-          <a:prstGeom prst="rect">
-            <a:avLst/>
-          </a:prstGeom>
-          <a:noFill/>
-        </p:spPr>
-        <p:txBody>
-          <a:bodyPr wrap="square" anchor="ctr">
-            <a:spAutoFit/>
-          </a:bodyPr>
-          <a:lstStyle/>
-          <a:p>
-            <a:pPr algn="ctr"/>
-            <a:r>
-              <a:rPr sz="2200" b="1">
-                <a:solidFill>
-                  <a:srgbClr val="8294AE"/>
-                </a:solidFill>
-                <a:latin typeface="Droid Sans Fallback"/>
-              </a:rPr>
-              <a:t>→</a:t>
-            </a:r>
-          </a:p>
-        </p:txBody>
-      </p:sp>
-      <p:sp>
-        <p:nvSpPr>
-          <p:cNvPr id="21" name="Rounded Rectangle 20"/>
+              <a:t>第 1 块写出来就开始传
+后面的块边算边传
+时间 ≈ max(计算, 通信) 量级
+这就是 MM+AllReduce 融合</a:t>
+            </a:r>
+          </a:p>
+        </p:txBody>
+      </p:sp>
+      <p:sp>
+        <p:nvSpPr>
+          <p:cNvPr id="14" name="Rounded Rectangle 13"/>
           <p:cNvSpPr/>
           <p:nvPr/>
         </p:nvSpPr>
         <p:spPr>
           <a:xfrm>
-            <a:off x="9281160" y="1234440"/>
-            <a:ext cx="2697480" cy="2331720"/>
-          </a:xfrm>
-          <a:prstGeom prst="roundRect">
-            <a:avLst/>
-          </a:prstGeom>
-          <a:solidFill>
-            <a:srgbClr val="1C2739"/>
-          </a:solidFill>
-          <a:ln>
-            <a:solidFill>
-              <a:srgbClr val="25C8DD"/>
-            </a:solidFill>
-          </a:ln>
-        </p:spPr>
-        <p:style>
-          <a:lnRef idx="1">
-            <a:schemeClr val="accent1"/>
-          </a:lnRef>
-          <a:fillRef idx="3">
-            <a:schemeClr val="accent1"/>
-          </a:fillRef>
-          <a:effectRef idx="2">
-            <a:schemeClr val="accent1"/>
-          </a:effectRef>
-          <a:fontRef idx="minor">
-            <a:schemeClr val="lt1"/>
-          </a:fontRef>
-        </p:style>
-        <p:txBody>
-          <a:bodyPr rtlCol="0" anchor="ctr"/>
-          <a:lstStyle/>
-          <a:p>
-            <a:pPr algn="ctr"/>
-          </a:p>
-        </p:txBody>
-      </p:sp>
-      <p:sp>
-        <p:nvSpPr>
-          <p:cNvPr id="22" name="Rounded Rectangle 21"/>
-          <p:cNvSpPr/>
-          <p:nvPr/>
-        </p:nvSpPr>
-        <p:spPr>
-          <a:xfrm>
-            <a:off x="9418320" y="1417320"/>
-            <a:ext cx="2423160" cy="310896"/>
-          </a:xfrm>
-          <a:prstGeom prst="roundRect">
-            <a:avLst/>
-          </a:prstGeom>
-          <a:solidFill>
-            <a:srgbClr val="25C8DD"/>
-          </a:solidFill>
-          <a:ln>
-            <a:solidFill>
-              <a:srgbClr val="25C8DD"/>
-            </a:solidFill>
-          </a:ln>
-        </p:spPr>
-        <p:style>
-          <a:lnRef idx="1">
-            <a:schemeClr val="accent1"/>
-          </a:lnRef>
-          <a:fillRef idx="3">
-            <a:schemeClr val="accent1"/>
-          </a:fillRef>
-          <a:effectRef idx="2">
-            <a:schemeClr val="accent1"/>
-          </a:effectRef>
-          <a:fontRef idx="minor">
-            <a:schemeClr val="lt1"/>
-          </a:fontRef>
-        </p:style>
-        <p:txBody>
-          <a:bodyPr rtlCol="0" anchor="ctr"/>
-          <a:lstStyle/>
-          <a:p>
-            <a:pPr algn="ctr"/>
-          </a:p>
-        </p:txBody>
-      </p:sp>
-      <p:sp>
-        <p:nvSpPr>
-          <p:cNvPr id="23" name="TextBox 22"/>
-          <p:cNvSpPr txBox="1"/>
-          <p:nvPr/>
-        </p:nvSpPr>
-        <p:spPr>
-          <a:xfrm>
-            <a:off x="9418320" y="1417320"/>
-            <a:ext cx="2423160" cy="310896"/>
-          </a:xfrm>
-          <a:prstGeom prst="rect">
-            <a:avLst/>
-          </a:prstGeom>
-          <a:noFill/>
-        </p:spPr>
-        <p:txBody>
-          <a:bodyPr wrap="square" anchor="ctr">
-            <a:spAutoFit/>
-          </a:bodyPr>
-          <a:lstStyle/>
-          <a:p>
-            <a:pPr algn="ctr"/>
-            <a:r>
-              <a:rPr sz="1300" b="1">
-                <a:solidFill>
-                  <a:srgbClr val="F8FAFD"/>
-                </a:solidFill>
-                <a:latin typeface="Droid Sans Fallback"/>
-              </a:rPr>
-              <a:t>融合算子</a:t>
-            </a:r>
-          </a:p>
-        </p:txBody>
-      </p:sp>
-      <p:sp>
-        <p:nvSpPr>
-          <p:cNvPr id="24" name="TextBox 23"/>
-          <p:cNvSpPr txBox="1"/>
-          <p:nvPr/>
-        </p:nvSpPr>
-        <p:spPr>
-          <a:xfrm>
-            <a:off x="9445752" y="1965960"/>
-            <a:ext cx="2377440" cy="1371600"/>
-          </a:xfrm>
-          <a:prstGeom prst="rect">
-            <a:avLst/>
-          </a:prstGeom>
-          <a:noFill/>
-        </p:spPr>
-        <p:txBody>
-          <a:bodyPr wrap="square" anchor="ctr">
-            <a:spAutoFit/>
-          </a:bodyPr>
-          <a:lstStyle/>
-          <a:p>
-            <a:pPr algn="ctr"/>
-            <a:r>
-              <a:rPr sz="1500" b="0">
-                <a:solidFill>
-                  <a:srgbClr val="E5ECF5"/>
-                </a:solidFill>
-                <a:latin typeface="Droid Sans Fallback"/>
-              </a:rPr>
-              <a:t>按时刻表
-边算边传</a:t>
-            </a:r>
-          </a:p>
-        </p:txBody>
-      </p:sp>
-      <p:sp>
-        <p:nvSpPr>
-          <p:cNvPr id="25" name="TextBox 24"/>
-          <p:cNvSpPr txBox="1"/>
-          <p:nvPr/>
-        </p:nvSpPr>
-        <p:spPr>
-          <a:xfrm>
-            <a:off x="640080" y="3840480"/>
-            <a:ext cx="10972800" cy="1417320"/>
-          </a:xfrm>
-          <a:prstGeom prst="rect">
-            <a:avLst/>
-          </a:prstGeom>
-          <a:noFill/>
-        </p:spPr>
-        <p:txBody>
-          <a:bodyPr wrap="square">
-            <a:spAutoFit/>
-          </a:bodyPr>
-          <a:lstStyle/>
-          <a:p>
-            <a:pPr>
-              <a:spcAft>
-                <a:spcPts val="800"/>
-              </a:spcAft>
-              <a:defRPr sz="1500">
-                <a:solidFill>
-                  <a:srgbClr val="E5ECF5"/>
-                </a:solidFill>
-                <a:latin typeface="Droid Sans Fallback"/>
-              </a:defRPr>
-            </a:pPr>
-            <a:r>
-              <a:t>•  求解器可以决定：某块数据 ready 之后，走哪条链路、哪个时刻发出</a:t>
-            </a:r>
-          </a:p>
-          <a:p>
-            <a:pPr>
-              <a:spcAft>
-                <a:spcPts val="800"/>
-              </a:spcAft>
-              <a:defRPr sz="1500">
-                <a:solidFill>
-                  <a:srgbClr val="E5ECF5"/>
-                </a:solidFill>
-                <a:latin typeface="Droid Sans Fallback"/>
-              </a:defRPr>
-            </a:pPr>
-            <a:r>
-              <a:t>•  求解器不可以决定：切块长宽、计算顺序、激活做在 AllReduce 前还是后</a:t>
-            </a:r>
-          </a:p>
-          <a:p>
-            <a:pPr>
-              <a:spcAft>
-                <a:spcPts val="800"/>
-              </a:spcAft>
-              <a:defRPr sz="1500">
-                <a:solidFill>
-                  <a:srgbClr val="E5ECF5"/>
-                </a:solidFill>
-                <a:latin typeface="Droid Sans Fallback"/>
-              </a:defRPr>
-            </a:pPr>
-            <a:r>
-              <a:t>•  AllReduce 的邻居关系（Ring / HD）建议一并给定，求解器不换算法</a:t>
-            </a:r>
-          </a:p>
-        </p:txBody>
-      </p:sp>
-      <p:sp>
-        <p:nvSpPr>
-          <p:cNvPr id="26" name="Rounded Rectangle 25"/>
-          <p:cNvSpPr/>
-          <p:nvPr/>
-        </p:nvSpPr>
-        <p:spPr>
-          <a:xfrm>
-            <a:off x="548640" y="5349240"/>
-            <a:ext cx="11109960" cy="960120"/>
+            <a:off x="548640" y="4206240"/>
+            <a:ext cx="11109960" cy="1645920"/>
           </a:xfrm>
           <a:prstGeom prst="roundRect">
             <a:avLst/>
@@ -7715,14 +7063,14 @@
       </p:sp>
       <p:sp>
         <p:nvSpPr>
-          <p:cNvPr id="27" name="TextBox 26"/>
-          <p:cNvSpPr txBox="1"/>
-          <p:nvPr/>
-        </p:nvSpPr>
-        <p:spPr>
-          <a:xfrm>
-            <a:off x="694944" y="5404103"/>
-            <a:ext cx="10853928" cy="850392"/>
+          <p:cNvPr id="15" name="TextBox 14"/>
+          <p:cNvSpPr txBox="1"/>
+          <p:nvPr/>
+        </p:nvSpPr>
+        <p:spPr>
+          <a:xfrm>
+            <a:off x="694944" y="4261103"/>
+            <a:ext cx="10853928" cy="1536192"/>
           </a:xfrm>
           <a:prstGeom prst="rect">
             <a:avLst/>
@@ -7743,7 +7091,7 @@
                 </a:solidFill>
                 <a:latin typeface="Droid Sans Fallback"/>
               </a:rPr>
-              <a:t>背景  和上一页合起来：我们扩展的是「数据什么时候存在」，不是扩展求解器去当计算编译器。</a:t>
+              <a:t>背景  「融合算子」不是把两个 API 写成一个函数名就完了。关键是时间上重叠，且重叠必须合法：没生产出来的数不能提前进 AllReduce，否则结果是错的。</a:t>
             </a:r>
           </a:p>
         </p:txBody>
@@ -7804,7 +7152,7 @@
                 </a:solidFill>
                 <a:latin typeface="Droid Sans Fallback"/>
               </a:rPr>
-              <a:t>编译器接口</a:t>
+              <a:t>分工理由</a:t>
             </a:r>
           </a:p>
         </p:txBody>
@@ -7839,7 +7187,7 @@
                 </a:solidFill>
                 <a:latin typeface="Droid Sans Fallback"/>
               </a:rPr>
-              <a:t>两份输入分别回答什么</a:t>
+              <a:t>为什么不让求解器连切块一起搜</a:t>
             </a:r>
           </a:p>
         </p:txBody>
@@ -7932,8 +7280,8 @@
         </p:nvSpPr>
         <p:spPr>
           <a:xfrm>
-            <a:off x="548640" y="1170432"/>
-            <a:ext cx="5532120" cy="3246120"/>
+            <a:off x="548640" y="1188720"/>
+            <a:ext cx="3611880" cy="2880360"/>
           </a:xfrm>
           <a:prstGeom prst="roundRect">
             <a:avLst/>
@@ -7977,18 +7325,18 @@
         </p:nvSpPr>
         <p:spPr>
           <a:xfrm>
-            <a:off x="548640" y="1170432"/>
-            <a:ext cx="64008" cy="3246120"/>
+            <a:off x="548640" y="1188720"/>
+            <a:ext cx="64008" cy="2880360"/>
           </a:xfrm>
           <a:prstGeom prst="rect">
             <a:avLst/>
           </a:prstGeom>
           <a:solidFill>
-            <a:srgbClr val="266CFF"/>
+            <a:srgbClr val="E14848"/>
           </a:solidFill>
           <a:ln>
             <a:solidFill>
-              <a:srgbClr val="266CFF"/>
+              <a:srgbClr val="E14848"/>
             </a:solidFill>
           </a:ln>
         </p:spPr>
@@ -8022,8 +7370,8 @@
         </p:nvSpPr>
         <p:spPr>
           <a:xfrm>
-            <a:off x="731520" y="1261872"/>
-            <a:ext cx="5239512" cy="310896"/>
+            <a:off x="731520" y="1280160"/>
+            <a:ext cx="3319272" cy="310896"/>
           </a:xfrm>
           <a:prstGeom prst="rect">
             <a:avLst/>
@@ -8044,7 +7392,7 @@
                 </a:solidFill>
                 <a:latin typeface="Droid Sans Fallback"/>
               </a:rPr>
-              <a:t>tiling = 空间怎么切</a:t>
+              <a:t>搜的东西不一样</a:t>
             </a:r>
           </a:p>
         </p:txBody>
@@ -8057,8 +7405,8 @@
         </p:nvSpPr>
         <p:spPr>
           <a:xfrm>
-            <a:off x="731520" y="1609344"/>
-            <a:ext cx="5202936" cy="2697479"/>
+            <a:off x="731520" y="1627632"/>
+            <a:ext cx="3282696" cy="2331720"/>
           </a:xfrm>
           <a:prstGeom prst="rect">
             <a:avLst/>
@@ -8073,17 +7421,15 @@
           <a:p>
             <a:pPr algn="l"/>
             <a:r>
-              <a:rPr sz="1400" b="0">
+              <a:rPr sz="1300" b="0">
                 <a:solidFill>
                   <a:srgbClr val="E5ECF5"/>
                 </a:solidFill>
                 <a:latin typeface="Droid Sans Fallback"/>
               </a:rPr>
-              <a:t>Y 切成多少个 C-tile、每块多大
-沿 K 要折几次才写完一块
-循环先走哪一维、一拍并几块
-写到内存后过多久通信才看得见
-没有「第 3 块几点钟出炉」</a:t>
+              <a:t>通信变量：哪块数据走哪条链路。
+切块变量：小矩形长宽、流水级数。
+乘在一起，方程规模爆炸。</a:t>
             </a:r>
           </a:p>
         </p:txBody>
@@ -8096,8 +7442,8 @@
         </p:nvSpPr>
         <p:spPr>
           <a:xfrm>
-            <a:off x="6309360" y="1170432"/>
-            <a:ext cx="5349240" cy="3246120"/>
+            <a:off x="4343400" y="1188720"/>
+            <a:ext cx="3611880" cy="2880360"/>
           </a:xfrm>
           <a:prstGeom prst="roundRect">
             <a:avLst/>
@@ -8141,18 +7487,18 @@
         </p:nvSpPr>
         <p:spPr>
           <a:xfrm>
-            <a:off x="6309360" y="1170432"/>
-            <a:ext cx="64008" cy="3246120"/>
+            <a:off x="4343400" y="1188720"/>
+            <a:ext cx="64008" cy="2880360"/>
           </a:xfrm>
           <a:prstGeom prst="rect">
             <a:avLst/>
           </a:prstGeom>
           <a:solidFill>
-            <a:srgbClr val="21B573"/>
+            <a:srgbClr val="FF9933"/>
           </a:solidFill>
           <a:ln>
             <a:solidFill>
-              <a:srgbClr val="21B573"/>
+              <a:srgbClr val="FF9933"/>
             </a:solidFill>
           </a:ln>
         </p:spPr>
@@ -8186,8 +7532,8 @@
         </p:nvSpPr>
         <p:spPr>
           <a:xfrm>
-            <a:off x="6492240" y="1261872"/>
-            <a:ext cx="5056631" cy="310896"/>
+            <a:off x="4526280" y="1280160"/>
+            <a:ext cx="3319272" cy="310896"/>
           </a:xfrm>
           <a:prstGeom prst="rect">
             <a:avLst/>
@@ -8208,7 +7554,7 @@
                 </a:solidFill>
                 <a:latin typeface="Droid Sans Fallback"/>
               </a:rPr>
-              <a:t>计算流图 = 这些块何时算完</a:t>
+              <a:t>快慢模型不一样</a:t>
             </a:r>
           </a:p>
         </p:txBody>
@@ -8221,8 +7567,8 @@
         </p:nvSpPr>
         <p:spPr>
           <a:xfrm>
-            <a:off x="6492240" y="1609344"/>
-            <a:ext cx="5020055" cy="2697479"/>
+            <a:off x="4526280" y="1627632"/>
+            <a:ext cx="3282696" cy="2331720"/>
           </a:xfrm>
           <a:prstGeom prst="rect">
             <a:avLst/>
@@ -8237,17 +7583,15 @@
           <a:p>
             <a:pPr algn="l"/>
             <a:r>
-              <a:rPr sz="1400" b="0">
+              <a:rPr sz="1300" b="0">
                 <a:solidFill>
                   <a:srgbClr val="E5ECF5"/>
                 </a:solidFill>
                 <a:latin typeface="Droid Sans Fallback"/>
               </a:rPr>
-              <a:t>节点 = 上面那些 C-tile（同一套编号）
-边 = 已排好的计算顺序
-每节点做多久
-没有「几块拼成一次 AllReduce 的一包」
-那是切块网格上的简单合并规则</a:t>
+              <a:t>链路用「启动延迟 + 每字节时间」。
+切块快慢取决于计算单元和内存层次。
+通信求解器没有一份可信的切块耗时表。</a:t>
             </a:r>
           </a:p>
         </p:txBody>
@@ -8260,8 +7604,170 @@
         </p:nvSpPr>
         <p:spPr>
           <a:xfrm>
-            <a:off x="548640" y="4617720"/>
-            <a:ext cx="11109960" cy="1280160"/>
+            <a:off x="8138160" y="1188720"/>
+            <a:ext cx="3611880" cy="2880360"/>
+          </a:xfrm>
+          <a:prstGeom prst="roundRect">
+            <a:avLst/>
+          </a:prstGeom>
+          <a:solidFill>
+            <a:srgbClr val="1C2739"/>
+          </a:solidFill>
+          <a:ln>
+            <a:solidFill>
+              <a:srgbClr val="334560"/>
+            </a:solidFill>
+          </a:ln>
+        </p:spPr>
+        <p:style>
+          <a:lnRef idx="1">
+            <a:schemeClr val="accent1"/>
+          </a:lnRef>
+          <a:fillRef idx="3">
+            <a:schemeClr val="accent1"/>
+          </a:fillRef>
+          <a:effectRef idx="2">
+            <a:schemeClr val="accent1"/>
+          </a:effectRef>
+          <a:fontRef idx="minor">
+            <a:schemeClr val="lt1"/>
+          </a:fontRef>
+        </p:style>
+        <p:txBody>
+          <a:bodyPr rtlCol="0" anchor="ctr"/>
+          <a:lstStyle/>
+          <a:p>
+            <a:pPr algn="ctr"/>
+          </a:p>
+        </p:txBody>
+      </p:sp>
+      <p:sp>
+        <p:nvSpPr>
+          <p:cNvPr id="15" name="Rectangle 14"/>
+          <p:cNvSpPr/>
+          <p:nvPr/>
+        </p:nvSpPr>
+        <p:spPr>
+          <a:xfrm>
+            <a:off x="8138160" y="1188720"/>
+            <a:ext cx="64008" cy="2880360"/>
+          </a:xfrm>
+          <a:prstGeom prst="rect">
+            <a:avLst/>
+          </a:prstGeom>
+          <a:solidFill>
+            <a:srgbClr val="25C8DD"/>
+          </a:solidFill>
+          <a:ln>
+            <a:solidFill>
+              <a:srgbClr val="25C8DD"/>
+            </a:solidFill>
+          </a:ln>
+        </p:spPr>
+        <p:style>
+          <a:lnRef idx="1">
+            <a:schemeClr val="accent1"/>
+          </a:lnRef>
+          <a:fillRef idx="3">
+            <a:schemeClr val="accent1"/>
+          </a:fillRef>
+          <a:effectRef idx="2">
+            <a:schemeClr val="accent1"/>
+          </a:effectRef>
+          <a:fontRef idx="minor">
+            <a:schemeClr val="lt1"/>
+          </a:fontRef>
+        </p:style>
+        <p:txBody>
+          <a:bodyPr rtlCol="0" anchor="ctr"/>
+          <a:lstStyle/>
+          <a:p>
+            <a:pPr algn="ctr"/>
+          </a:p>
+        </p:txBody>
+      </p:sp>
+      <p:sp>
+        <p:nvSpPr>
+          <p:cNvPr id="16" name="TextBox 15"/>
+          <p:cNvSpPr txBox="1"/>
+          <p:nvPr/>
+        </p:nvSpPr>
+        <p:spPr>
+          <a:xfrm>
+            <a:off x="8321040" y="1280160"/>
+            <a:ext cx="3319272" cy="310896"/>
+          </a:xfrm>
+          <a:prstGeom prst="rect">
+            <a:avLst/>
+          </a:prstGeom>
+          <a:noFill/>
+        </p:spPr>
+        <p:txBody>
+          <a:bodyPr wrap="square" anchor="ctr">
+            <a:spAutoFit/>
+          </a:bodyPr>
+          <a:lstStyle/>
+          <a:p>
+            <a:pPr algn="l"/>
+            <a:r>
+              <a:rPr sz="1600" b="1">
+                <a:solidFill>
+                  <a:srgbClr val="F8FAFD"/>
+                </a:solidFill>
+                <a:latin typeface="Droid Sans Fallback"/>
+              </a:rPr>
+              <a:t>改切块等于改实现</a:t>
+            </a:r>
+          </a:p>
+        </p:txBody>
+      </p:sp>
+      <p:sp>
+        <p:nvSpPr>
+          <p:cNvPr id="17" name="TextBox 16"/>
+          <p:cNvSpPr txBox="1"/>
+          <p:nvPr/>
+        </p:nvSpPr>
+        <p:spPr>
+          <a:xfrm>
+            <a:off x="8321040" y="1627632"/>
+            <a:ext cx="3282696" cy="2331720"/>
+          </a:xfrm>
+          <a:prstGeom prst="rect">
+            <a:avLst/>
+          </a:prstGeom>
+          <a:noFill/>
+        </p:spPr>
+        <p:txBody>
+          <a:bodyPr wrap="square" anchor="t">
+            <a:spAutoFit/>
+          </a:bodyPr>
+          <a:lstStyle/>
+          <a:p>
+            <a:pPr algn="l"/>
+            <a:r>
+              <a:rPr sz="1300" b="0">
+                <a:solidFill>
+                  <a:srgbClr val="E5ECF5"/>
+                </a:solidFill>
+                <a:latin typeface="Droid Sans Fallback"/>
+              </a:rPr>
+              <a:t>切块、累加顺序、尾处理（bias/激活）
+影响数值。这是计算编译器的职责，
+通信求解器改了就是改 GEMM。</a:t>
+            </a:r>
+          </a:p>
+        </p:txBody>
+      </p:sp>
+      <p:sp>
+        <p:nvSpPr>
+          <p:cNvPr id="18" name="Rounded Rectangle 17"/>
+          <p:cNvSpPr/>
+          <p:nvPr/>
+        </p:nvSpPr>
+        <p:spPr>
+          <a:xfrm>
+            <a:off x="548640" y="4297680"/>
+            <a:ext cx="11109960" cy="1554480"/>
           </a:xfrm>
           <a:prstGeom prst="roundRect">
             <a:avLst/>
@@ -8299,14 +7805,14 @@
       </p:sp>
       <p:sp>
         <p:nvSpPr>
-          <p:cNvPr id="15" name="TextBox 14"/>
-          <p:cNvSpPr txBox="1"/>
-          <p:nvPr/>
-        </p:nvSpPr>
-        <p:spPr>
-          <a:xfrm>
-            <a:off x="694944" y="4672583"/>
-            <a:ext cx="10853928" cy="1170431"/>
+          <p:cNvPr id="19" name="TextBox 18"/>
+          <p:cNvSpPr txBox="1"/>
+          <p:nvPr/>
+        </p:nvSpPr>
+        <p:spPr>
+          <a:xfrm>
+            <a:off x="694944" y="4352544"/>
+            <a:ext cx="10853928" cy="1444752"/>
           </a:xfrm>
           <a:prstGeom prst="rect">
             <a:avLst/>
@@ -8327,7 +7833,7 @@
                 </a:solidFill>
                 <a:latin typeface="Droid Sans Fallback"/>
               </a:rPr>
-              <a:t>背景  只有 tiling：知道切成哪些块，不知道何时有货。只有流图：知道何时算完哪块，不知道通信按几块打一包。所以两份都要，但各自只答一件事。</a:t>
+              <a:t>背景  如果以后要试几种切块，放在外层：计算编译器给出 3～5 套候选，每套跑一次通信求解器，比较总完成时间。切块仍然不进求解器内部。</a:t>
             </a:r>
           </a:p>
         </p:txBody>
@@ -8388,7 +7894,7 @@
                 </a:solidFill>
                 <a:latin typeface="Droid Sans Fallback"/>
               </a:rPr>
-              <a:t>推导  /  避免重复输入</a:t>
+              <a:t>架构</a:t>
             </a:r>
           </a:p>
         </p:txBody>
@@ -8423,7 +7929,7 @@
                 </a:solidFill>
                 <a:latin typeface="Droid Sans Fallback"/>
               </a:rPr>
-              <a:t>不必再要第三份：有货时间和资源占用都能推出来</a:t>
+              <a:t>方案：编译器给两份，求解器只编通信</a:t>
             </a:r>
           </a:p>
         </p:txBody>
@@ -8510,49 +8016,14 @@
       </p:sp>
       <p:sp>
         <p:nvSpPr>
-          <p:cNvPr id="6" name="TextBox 5"/>
-          <p:cNvSpPr txBox="1"/>
-          <p:nvPr/>
-        </p:nvSpPr>
-        <p:spPr>
-          <a:xfrm>
-            <a:off x="640080" y="1115568"/>
-            <a:ext cx="10972800" cy="365760"/>
-          </a:xfrm>
-          <a:prstGeom prst="rect">
-            <a:avLst/>
-          </a:prstGeom>
-          <a:noFill/>
-        </p:spPr>
-        <p:txBody>
-          <a:bodyPr wrap="square" anchor="ctr">
-            <a:spAutoFit/>
-          </a:bodyPr>
-          <a:lstStyle/>
-          <a:p>
-            <a:pPr algn="l"/>
-            <a:r>
-              <a:rPr sz="1400" b="0">
-                <a:solidFill>
-                  <a:srgbClr val="E5ECF5"/>
-                </a:solidFill>
-                <a:latin typeface="Droid Sans Fallback"/>
-              </a:rPr>
-              <a:t>上一轮讨论里出现过 produce、占用时间轴。它们不是编译器另交的图，而是下面两个函数。</a:t>
-            </a:r>
-          </a:p>
-        </p:txBody>
-      </p:sp>
-      <p:sp>
-        <p:nvSpPr>
-          <p:cNvPr id="7" name="Rounded Rectangle 6"/>
+          <p:cNvPr id="6" name="Rounded Rectangle 5"/>
           <p:cNvSpPr/>
           <p:nvPr/>
         </p:nvSpPr>
         <p:spPr>
           <a:xfrm>
-            <a:off x="548640" y="1554480"/>
-            <a:ext cx="5532120" cy="2606040"/>
+            <a:off x="502920" y="1234440"/>
+            <a:ext cx="2697480" cy="2331720"/>
           </a:xfrm>
           <a:prstGeom prst="roundRect">
             <a:avLst/>
@@ -8562,7 +8033,7 @@
           </a:solidFill>
           <a:ln>
             <a:solidFill>
-              <a:srgbClr val="334560"/>
+              <a:srgbClr val="266CFF"/>
             </a:solidFill>
           </a:ln>
         </p:spPr>
@@ -8590,16 +8061,212 @@
       </p:sp>
       <p:sp>
         <p:nvSpPr>
-          <p:cNvPr id="8" name="Rectangle 7"/>
+          <p:cNvPr id="7" name="Rounded Rectangle 6"/>
           <p:cNvSpPr/>
           <p:nvPr/>
         </p:nvSpPr>
         <p:spPr>
           <a:xfrm>
-            <a:off x="548640" y="1554480"/>
-            <a:ext cx="64008" cy="2606040"/>
-          </a:xfrm>
-          <a:prstGeom prst="rect">
+            <a:off x="640080" y="1417320"/>
+            <a:ext cx="2423160" cy="310896"/>
+          </a:xfrm>
+          <a:prstGeom prst="roundRect">
+            <a:avLst/>
+          </a:prstGeom>
+          <a:solidFill>
+            <a:srgbClr val="266CFF"/>
+          </a:solidFill>
+          <a:ln>
+            <a:solidFill>
+              <a:srgbClr val="266CFF"/>
+            </a:solidFill>
+          </a:ln>
+        </p:spPr>
+        <p:style>
+          <a:lnRef idx="1">
+            <a:schemeClr val="accent1"/>
+          </a:lnRef>
+          <a:fillRef idx="3">
+            <a:schemeClr val="accent1"/>
+          </a:fillRef>
+          <a:effectRef idx="2">
+            <a:schemeClr val="accent1"/>
+          </a:effectRef>
+          <a:fontRef idx="minor">
+            <a:schemeClr val="lt1"/>
+          </a:fontRef>
+        </p:style>
+        <p:txBody>
+          <a:bodyPr rtlCol="0" anchor="ctr"/>
+          <a:lstStyle/>
+          <a:p>
+            <a:pPr algn="ctr"/>
+          </a:p>
+        </p:txBody>
+      </p:sp>
+      <p:sp>
+        <p:nvSpPr>
+          <p:cNvPr id="8" name="TextBox 7"/>
+          <p:cNvSpPr txBox="1"/>
+          <p:nvPr/>
+        </p:nvSpPr>
+        <p:spPr>
+          <a:xfrm>
+            <a:off x="640080" y="1417320"/>
+            <a:ext cx="2423160" cy="310896"/>
+          </a:xfrm>
+          <a:prstGeom prst="rect">
+            <a:avLst/>
+          </a:prstGeom>
+          <a:noFill/>
+        </p:spPr>
+        <p:txBody>
+          <a:bodyPr wrap="square" anchor="ctr">
+            <a:spAutoFit/>
+          </a:bodyPr>
+          <a:lstStyle/>
+          <a:p>
+            <a:pPr algn="ctr"/>
+            <a:r>
+              <a:rPr sz="1300" b="1">
+                <a:solidFill>
+                  <a:srgbClr val="F8FAFD"/>
+                </a:solidFill>
+                <a:latin typeface="Droid Sans Fallback"/>
+              </a:rPr>
+              <a:t>计算编译器</a:t>
+            </a:r>
+          </a:p>
+        </p:txBody>
+      </p:sp>
+      <p:sp>
+        <p:nvSpPr>
+          <p:cNvPr id="9" name="TextBox 8"/>
+          <p:cNvSpPr txBox="1"/>
+          <p:nvPr/>
+        </p:nvSpPr>
+        <p:spPr>
+          <a:xfrm>
+            <a:off x="667512" y="1965960"/>
+            <a:ext cx="2377440" cy="1371600"/>
+          </a:xfrm>
+          <a:prstGeom prst="rect">
+            <a:avLst/>
+          </a:prstGeom>
+          <a:noFill/>
+        </p:spPr>
+        <p:txBody>
+          <a:bodyPr wrap="square" anchor="ctr">
+            <a:spAutoFit/>
+          </a:bodyPr>
+          <a:lstStyle/>
+          <a:p>
+            <a:pPr algn="ctr"/>
+            <a:r>
+              <a:rPr sz="1500" b="0">
+                <a:solidFill>
+                  <a:srgbClr val="E5ECF5"/>
+                </a:solidFill>
+                <a:latin typeface="Droid Sans Fallback"/>
+              </a:rPr>
+              <a:t>① tiling
+② 计算流图</a:t>
+            </a:r>
+          </a:p>
+        </p:txBody>
+      </p:sp>
+      <p:sp>
+        <p:nvSpPr>
+          <p:cNvPr id="10" name="TextBox 9"/>
+          <p:cNvSpPr txBox="1"/>
+          <p:nvPr/>
+        </p:nvSpPr>
+        <p:spPr>
+          <a:xfrm>
+            <a:off x="3108960" y="2011680"/>
+            <a:ext cx="365760" cy="457200"/>
+          </a:xfrm>
+          <a:prstGeom prst="rect">
+            <a:avLst/>
+          </a:prstGeom>
+          <a:noFill/>
+        </p:spPr>
+        <p:txBody>
+          <a:bodyPr wrap="square" anchor="ctr">
+            <a:spAutoFit/>
+          </a:bodyPr>
+          <a:lstStyle/>
+          <a:p>
+            <a:pPr algn="ctr"/>
+            <a:r>
+              <a:rPr sz="2200" b="1">
+                <a:solidFill>
+                  <a:srgbClr val="8294AE"/>
+                </a:solidFill>
+                <a:latin typeface="Droid Sans Fallback"/>
+              </a:rPr>
+              <a:t>→</a:t>
+            </a:r>
+          </a:p>
+        </p:txBody>
+      </p:sp>
+      <p:sp>
+        <p:nvSpPr>
+          <p:cNvPr id="11" name="Rounded Rectangle 10"/>
+          <p:cNvSpPr/>
+          <p:nvPr/>
+        </p:nvSpPr>
+        <p:spPr>
+          <a:xfrm>
+            <a:off x="3429000" y="1234440"/>
+            <a:ext cx="2697480" cy="2331720"/>
+          </a:xfrm>
+          <a:prstGeom prst="roundRect">
+            <a:avLst/>
+          </a:prstGeom>
+          <a:solidFill>
+            <a:srgbClr val="1C2739"/>
+          </a:solidFill>
+          <a:ln>
+            <a:solidFill>
+              <a:srgbClr val="FF9933"/>
+            </a:solidFill>
+          </a:ln>
+        </p:spPr>
+        <p:style>
+          <a:lnRef idx="1">
+            <a:schemeClr val="accent1"/>
+          </a:lnRef>
+          <a:fillRef idx="3">
+            <a:schemeClr val="accent1"/>
+          </a:fillRef>
+          <a:effectRef idx="2">
+            <a:schemeClr val="accent1"/>
+          </a:effectRef>
+          <a:fontRef idx="minor">
+            <a:schemeClr val="lt1"/>
+          </a:fontRef>
+        </p:style>
+        <p:txBody>
+          <a:bodyPr rtlCol="0" anchor="ctr"/>
+          <a:lstStyle/>
+          <a:p>
+            <a:pPr algn="ctr"/>
+          </a:p>
+        </p:txBody>
+      </p:sp>
+      <p:sp>
+        <p:nvSpPr>
+          <p:cNvPr id="12" name="Rounded Rectangle 11"/>
+          <p:cNvSpPr/>
+          <p:nvPr/>
+        </p:nvSpPr>
+        <p:spPr>
+          <a:xfrm>
+            <a:off x="3566160" y="1417320"/>
+            <a:ext cx="2423160" cy="310896"/>
+          </a:xfrm>
+          <a:prstGeom prst="roundRect">
             <a:avLst/>
           </a:prstGeom>
           <a:solidFill>
@@ -8635,14 +8302,14 @@
       </p:sp>
       <p:sp>
         <p:nvSpPr>
-          <p:cNvPr id="9" name="TextBox 8"/>
-          <p:cNvSpPr txBox="1"/>
-          <p:nvPr/>
-        </p:nvSpPr>
-        <p:spPr>
-          <a:xfrm>
-            <a:off x="731520" y="1645920"/>
-            <a:ext cx="5239512" cy="310896"/>
+          <p:cNvPr id="13" name="TextBox 12"/>
+          <p:cNvSpPr txBox="1"/>
+          <p:nvPr/>
+        </p:nvSpPr>
+        <p:spPr>
+          <a:xfrm>
+            <a:off x="3566160" y="1417320"/>
+            <a:ext cx="2423160" cy="310896"/>
           </a:xfrm>
           <a:prstGeom prst="rect">
             <a:avLst/>
@@ -8655,67 +8322,100 @@
           </a:bodyPr>
           <a:lstStyle/>
           <a:p>
-            <a:pPr algn="l"/>
-            <a:r>
-              <a:rPr sz="1600" b="1">
+            <a:pPr algn="ctr"/>
+            <a:r>
+              <a:rPr sz="1300" b="1">
                 <a:solidFill>
                   <a:srgbClr val="F8FAFD"/>
                 </a:solidFill>
                 <a:latin typeface="Droid Sans Fallback"/>
               </a:rPr>
-              <a:t>何时有货 ready</a:t>
-            </a:r>
-          </a:p>
-        </p:txBody>
-      </p:sp>
-      <p:sp>
-        <p:nvSpPr>
-          <p:cNvPr id="10" name="TextBox 9"/>
-          <p:cNvSpPr txBox="1"/>
-          <p:nvPr/>
-        </p:nvSpPr>
-        <p:spPr>
-          <a:xfrm>
-            <a:off x="731520" y="1993391"/>
-            <a:ext cx="5202936" cy="2057400"/>
-          </a:xfrm>
-          <a:prstGeom prst="rect">
-            <a:avLst/>
-          </a:prstGeom>
-          <a:noFill/>
-        </p:spPr>
-        <p:txBody>
-          <a:bodyPr wrap="square" anchor="t">
-            <a:spAutoFit/>
-          </a:bodyPr>
-          <a:lstStyle/>
-          <a:p>
-            <a:pPr algn="l"/>
-            <a:r>
-              <a:rPr sz="1400" b="0">
+              <a:t>机械推导</a:t>
+            </a:r>
+          </a:p>
+        </p:txBody>
+      </p:sp>
+      <p:sp>
+        <p:nvSpPr>
+          <p:cNvPr id="14" name="TextBox 13"/>
+          <p:cNvSpPr txBox="1"/>
+          <p:nvPr/>
+        </p:nvSpPr>
+        <p:spPr>
+          <a:xfrm>
+            <a:off x="3593592" y="1965960"/>
+            <a:ext cx="2377440" cy="1371600"/>
+          </a:xfrm>
+          <a:prstGeom prst="rect">
+            <a:avLst/>
+          </a:prstGeom>
+          <a:noFill/>
+        </p:spPr>
+        <p:txBody>
+          <a:bodyPr wrap="square" anchor="ctr">
+            <a:spAutoFit/>
+          </a:bodyPr>
+          <a:lstStyle/>
+          <a:p>
+            <a:pPr algn="ctr"/>
+            <a:r>
+              <a:rPr sz="1500" b="0">
                 <a:solidFill>
                   <a:srgbClr val="E5ECF5"/>
                 </a:solidFill>
                 <a:latin typeface="Droid Sans Fallback"/>
               </a:rPr>
-              <a:t>约定：连续若干个 C-tile 合成通信的一包
-（默认同一块 C-tile 就是一包，最简单）
-这一包的 ready = 其中最晚写完的那块
-再加一个固定的写出延迟</a:t>
-            </a:r>
-          </a:p>
-        </p:txBody>
-      </p:sp>
-      <p:sp>
-        <p:nvSpPr>
-          <p:cNvPr id="11" name="Rounded Rectangle 10"/>
+              <a:t>produce 边必须有
+dur 仅离线可选</a:t>
+            </a:r>
+          </a:p>
+        </p:txBody>
+      </p:sp>
+      <p:sp>
+        <p:nvSpPr>
+          <p:cNvPr id="15" name="TextBox 14"/>
+          <p:cNvSpPr txBox="1"/>
+          <p:nvPr/>
+        </p:nvSpPr>
+        <p:spPr>
+          <a:xfrm>
+            <a:off x="6035040" y="2011680"/>
+            <a:ext cx="365760" cy="457200"/>
+          </a:xfrm>
+          <a:prstGeom prst="rect">
+            <a:avLst/>
+          </a:prstGeom>
+          <a:noFill/>
+        </p:spPr>
+        <p:txBody>
+          <a:bodyPr wrap="square" anchor="ctr">
+            <a:spAutoFit/>
+          </a:bodyPr>
+          <a:lstStyle/>
+          <a:p>
+            <a:pPr algn="ctr"/>
+            <a:r>
+              <a:rPr sz="2200" b="1">
+                <a:solidFill>
+                  <a:srgbClr val="8294AE"/>
+                </a:solidFill>
+                <a:latin typeface="Droid Sans Fallback"/>
+              </a:rPr>
+              <a:t>→</a:t>
+            </a:r>
+          </a:p>
+        </p:txBody>
+      </p:sp>
+      <p:sp>
+        <p:nvSpPr>
+          <p:cNvPr id="16" name="Rounded Rectangle 15"/>
           <p:cNvSpPr/>
           <p:nvPr/>
         </p:nvSpPr>
         <p:spPr>
           <a:xfrm>
-            <a:off x="6309360" y="1554480"/>
-            <a:ext cx="5349240" cy="2606040"/>
+            <a:off x="6355080" y="1234440"/>
+            <a:ext cx="2697480" cy="2331720"/>
           </a:xfrm>
           <a:prstGeom prst="roundRect">
             <a:avLst/>
@@ -8725,7 +8425,7 @@
           </a:solidFill>
           <a:ln>
             <a:solidFill>
-              <a:srgbClr val="334560"/>
+              <a:srgbClr val="21B573"/>
             </a:solidFill>
           </a:ln>
         </p:spPr>
@@ -8753,16 +8453,212 @@
       </p:sp>
       <p:sp>
         <p:nvSpPr>
-          <p:cNvPr id="12" name="Rectangle 11"/>
+          <p:cNvPr id="17" name="Rounded Rectangle 16"/>
           <p:cNvSpPr/>
           <p:nvPr/>
         </p:nvSpPr>
         <p:spPr>
           <a:xfrm>
-            <a:off x="6309360" y="1554480"/>
-            <a:ext cx="64008" cy="2606040"/>
-          </a:xfrm>
-          <a:prstGeom prst="rect">
+            <a:off x="6492240" y="1417320"/>
+            <a:ext cx="2423160" cy="310896"/>
+          </a:xfrm>
+          <a:prstGeom prst="roundRect">
+            <a:avLst/>
+          </a:prstGeom>
+          <a:solidFill>
+            <a:srgbClr val="21B573"/>
+          </a:solidFill>
+          <a:ln>
+            <a:solidFill>
+              <a:srgbClr val="21B573"/>
+            </a:solidFill>
+          </a:ln>
+        </p:spPr>
+        <p:style>
+          <a:lnRef idx="1">
+            <a:schemeClr val="accent1"/>
+          </a:lnRef>
+          <a:fillRef idx="3">
+            <a:schemeClr val="accent1"/>
+          </a:fillRef>
+          <a:effectRef idx="2">
+            <a:schemeClr val="accent1"/>
+          </a:effectRef>
+          <a:fontRef idx="minor">
+            <a:schemeClr val="lt1"/>
+          </a:fontRef>
+        </p:style>
+        <p:txBody>
+          <a:bodyPr rtlCol="0" anchor="ctr"/>
+          <a:lstStyle/>
+          <a:p>
+            <a:pPr algn="ctr"/>
+          </a:p>
+        </p:txBody>
+      </p:sp>
+      <p:sp>
+        <p:nvSpPr>
+          <p:cNvPr id="18" name="TextBox 17"/>
+          <p:cNvSpPr txBox="1"/>
+          <p:nvPr/>
+        </p:nvSpPr>
+        <p:spPr>
+          <a:xfrm>
+            <a:off x="6492240" y="1417320"/>
+            <a:ext cx="2423160" cy="310896"/>
+          </a:xfrm>
+          <a:prstGeom prst="rect">
+            <a:avLst/>
+          </a:prstGeom>
+          <a:noFill/>
+        </p:spPr>
+        <p:txBody>
+          <a:bodyPr wrap="square" anchor="ctr">
+            <a:spAutoFit/>
+          </a:bodyPr>
+          <a:lstStyle/>
+          <a:p>
+            <a:pPr algn="ctr"/>
+            <a:r>
+              <a:rPr sz="1300" b="1">
+                <a:solidFill>
+                  <a:srgbClr val="F8FAFD"/>
+                </a:solidFill>
+                <a:latin typeface="Droid Sans Fallback"/>
+              </a:rPr>
+              <a:t>通信 MILP</a:t>
+            </a:r>
+          </a:p>
+        </p:txBody>
+      </p:sp>
+      <p:sp>
+        <p:nvSpPr>
+          <p:cNvPr id="19" name="TextBox 18"/>
+          <p:cNvSpPr txBox="1"/>
+          <p:nvPr/>
+        </p:nvSpPr>
+        <p:spPr>
+          <a:xfrm>
+            <a:off x="6519672" y="1965960"/>
+            <a:ext cx="2377440" cy="1371600"/>
+          </a:xfrm>
+          <a:prstGeom prst="rect">
+            <a:avLst/>
+          </a:prstGeom>
+          <a:noFill/>
+        </p:spPr>
+        <p:txBody>
+          <a:bodyPr wrap="square" anchor="ctr">
+            <a:spAutoFit/>
+          </a:bodyPr>
+          <a:lstStyle/>
+          <a:p>
+            <a:pPr algn="ctr"/>
+            <a:r>
+              <a:rPr sz="1500" b="0">
+                <a:solidFill>
+                  <a:srgbClr val="E5ECF5"/>
+                </a:solidFill>
+                <a:latin typeface="Droid Sans Fallback"/>
+              </a:rPr>
+              <a:t>离线搜结构
+打包 / 链路 / VT</a:t>
+            </a:r>
+          </a:p>
+        </p:txBody>
+      </p:sp>
+      <p:sp>
+        <p:nvSpPr>
+          <p:cNvPr id="20" name="TextBox 19"/>
+          <p:cNvSpPr txBox="1"/>
+          <p:nvPr/>
+        </p:nvSpPr>
+        <p:spPr>
+          <a:xfrm>
+            <a:off x="8961120" y="2011680"/>
+            <a:ext cx="365760" cy="457200"/>
+          </a:xfrm>
+          <a:prstGeom prst="rect">
+            <a:avLst/>
+          </a:prstGeom>
+          <a:noFill/>
+        </p:spPr>
+        <p:txBody>
+          <a:bodyPr wrap="square" anchor="ctr">
+            <a:spAutoFit/>
+          </a:bodyPr>
+          <a:lstStyle/>
+          <a:p>
+            <a:pPr algn="ctr"/>
+            <a:r>
+              <a:rPr sz="2200" b="1">
+                <a:solidFill>
+                  <a:srgbClr val="8294AE"/>
+                </a:solidFill>
+                <a:latin typeface="Droid Sans Fallback"/>
+              </a:rPr>
+              <a:t>→</a:t>
+            </a:r>
+          </a:p>
+        </p:txBody>
+      </p:sp>
+      <p:sp>
+        <p:nvSpPr>
+          <p:cNvPr id="21" name="Rounded Rectangle 20"/>
+          <p:cNvSpPr/>
+          <p:nvPr/>
+        </p:nvSpPr>
+        <p:spPr>
+          <a:xfrm>
+            <a:off x="9281160" y="1234440"/>
+            <a:ext cx="2697480" cy="2331720"/>
+          </a:xfrm>
+          <a:prstGeom prst="roundRect">
+            <a:avLst/>
+          </a:prstGeom>
+          <a:solidFill>
+            <a:srgbClr val="1C2739"/>
+          </a:solidFill>
+          <a:ln>
+            <a:solidFill>
+              <a:srgbClr val="25C8DD"/>
+            </a:solidFill>
+          </a:ln>
+        </p:spPr>
+        <p:style>
+          <a:lnRef idx="1">
+            <a:schemeClr val="accent1"/>
+          </a:lnRef>
+          <a:fillRef idx="3">
+            <a:schemeClr val="accent1"/>
+          </a:fillRef>
+          <a:effectRef idx="2">
+            <a:schemeClr val="accent1"/>
+          </a:effectRef>
+          <a:fontRef idx="minor">
+            <a:schemeClr val="lt1"/>
+          </a:fontRef>
+        </p:style>
+        <p:txBody>
+          <a:bodyPr rtlCol="0" anchor="ctr"/>
+          <a:lstStyle/>
+          <a:p>
+            <a:pPr algn="ctr"/>
+          </a:p>
+        </p:txBody>
+      </p:sp>
+      <p:sp>
+        <p:nvSpPr>
+          <p:cNvPr id="22" name="Rounded Rectangle 21"/>
+          <p:cNvSpPr/>
+          <p:nvPr/>
+        </p:nvSpPr>
+        <p:spPr>
+          <a:xfrm>
+            <a:off x="9418320" y="1417320"/>
+            <a:ext cx="2423160" cy="310896"/>
+          </a:xfrm>
+          <a:prstGeom prst="roundRect">
             <a:avLst/>
           </a:prstGeom>
           <a:solidFill>
@@ -8798,14 +8694,14 @@
       </p:sp>
       <p:sp>
         <p:nvSpPr>
-          <p:cNvPr id="13" name="TextBox 12"/>
-          <p:cNvSpPr txBox="1"/>
-          <p:nvPr/>
-        </p:nvSpPr>
-        <p:spPr>
-          <a:xfrm>
-            <a:off x="6492240" y="1645920"/>
-            <a:ext cx="5056631" cy="310896"/>
+          <p:cNvPr id="23" name="TextBox 22"/>
+          <p:cNvSpPr txBox="1"/>
+          <p:nvPr/>
+        </p:nvSpPr>
+        <p:spPr>
+          <a:xfrm>
+            <a:off x="9418320" y="1417320"/>
+            <a:ext cx="2423160" cy="310896"/>
           </a:xfrm>
           <a:prstGeom prst="rect">
             <a:avLst/>
@@ -8818,67 +8714,136 @@
           </a:bodyPr>
           <a:lstStyle/>
           <a:p>
-            <a:pPr algn="l"/>
-            <a:r>
-              <a:rPr sz="1600" b="1">
+            <a:pPr algn="ctr"/>
+            <a:r>
+              <a:rPr sz="1300" b="1">
                 <a:solidFill>
                   <a:srgbClr val="F8FAFD"/>
                 </a:solidFill>
                 <a:latin typeface="Droid Sans Fallback"/>
               </a:rPr>
-              <a:t>计算占了哪些资源</a:t>
-            </a:r>
-          </a:p>
-        </p:txBody>
-      </p:sp>
-      <p:sp>
-        <p:nvSpPr>
-          <p:cNvPr id="14" name="TextBox 13"/>
-          <p:cNvSpPr txBox="1"/>
-          <p:nvPr/>
-        </p:nvSpPr>
-        <p:spPr>
-          <a:xfrm>
-            <a:off x="6492240" y="1993391"/>
-            <a:ext cx="5020055" cy="2057400"/>
-          </a:xfrm>
-          <a:prstGeom prst="rect">
-            <a:avLst/>
-          </a:prstGeom>
-          <a:noFill/>
-        </p:spPr>
-        <p:txBody>
-          <a:bodyPr wrap="square" anchor="t">
-            <a:spAutoFit/>
-          </a:bodyPr>
-          <a:lstStyle/>
-          <a:p>
-            <a:pPr algn="l"/>
-            <a:r>
-              <a:rPr sz="1400" b="0">
+              <a:t>运行时</a:t>
+            </a:r>
+          </a:p>
+        </p:txBody>
+      </p:sp>
+      <p:sp>
+        <p:nvSpPr>
+          <p:cNvPr id="24" name="TextBox 23"/>
+          <p:cNvSpPr txBox="1"/>
+          <p:nvPr/>
+        </p:nvSpPr>
+        <p:spPr>
+          <a:xfrm>
+            <a:off x="9445752" y="1965960"/>
+            <a:ext cx="2377440" cy="1371600"/>
+          </a:xfrm>
+          <a:prstGeom prst="rect">
+            <a:avLst/>
+          </a:prstGeom>
+          <a:noFill/>
+        </p:spPr>
+        <p:txBody>
+          <a:bodyPr wrap="square" anchor="ctr">
+            <a:spAutoFit/>
+          </a:bodyPr>
+          <a:lstStyle/>
+          <a:p>
+            <a:pPr algn="ctr"/>
+            <a:r>
+              <a:rPr sz="1500" b="0">
                 <a:solidFill>
                   <a:srgbClr val="E5ECF5"/>
                 </a:solidFill>
                 <a:latin typeface="Droid Sans Fallback"/>
               </a:rPr>
-              <a:t>每个 C-tile 带一份固定配额
-（占几条计算单元、吃多少内存带宽）
-按流图的起止时间扫一遍
-就得到每个时刻还剩多少给通信</a:t>
-            </a:r>
-          </a:p>
-        </p:txBody>
-      </p:sp>
-      <p:sp>
-        <p:nvSpPr>
-          <p:cNvPr id="15" name="Rounded Rectangle 14"/>
+              <a:t>等写完事件再发
+无启动时刻表</a:t>
+            </a:r>
+          </a:p>
+        </p:txBody>
+      </p:sp>
+      <p:sp>
+        <p:nvSpPr>
+          <p:cNvPr id="25" name="TextBox 24"/>
+          <p:cNvSpPr txBox="1"/>
+          <p:nvPr/>
+        </p:nvSpPr>
+        <p:spPr>
+          <a:xfrm>
+            <a:off x="640080" y="3840480"/>
+            <a:ext cx="10972800" cy="1417320"/>
+          </a:xfrm>
+          <a:prstGeom prst="rect">
+            <a:avLst/>
+          </a:prstGeom>
+          <a:noFill/>
+        </p:spPr>
+        <p:txBody>
+          <a:bodyPr wrap="square">
+            <a:spAutoFit/>
+          </a:bodyPr>
+          <a:lstStyle/>
+          <a:p>
+            <a:pPr>
+              <a:spcAft>
+                <a:spcPts val="800"/>
+              </a:spcAft>
+              <a:defRPr sz="1500">
+                <a:solidFill>
+                  <a:srgbClr val="E5ECF5"/>
+                </a:solidFill>
+                <a:latin typeface="Droid Sans Fallback"/>
+              </a:defRPr>
+            </a:pPr>
+            <a:r>
+              <a:t>•  求解器可以决定：走哪条链路、哪个 VT、由哪个计算完成事件触发</a:t>
+            </a:r>
+          </a:p>
+          <a:p>
+            <a:pPr>
+              <a:spcAft>
+                <a:spcPts val="800"/>
+              </a:spcAft>
+              <a:defRPr sz="1500">
+                <a:solidFill>
+                  <a:srgbClr val="E5ECF5"/>
+                </a:solidFill>
+                <a:latin typeface="Droid Sans Fallback"/>
+              </a:defRPr>
+            </a:pPr>
+            <a:r>
+              <a:t>•  求解器不可以决定：切块长宽、计算顺序、以及内核里的通信启动时刻</a:t>
+            </a:r>
+          </a:p>
+          <a:p>
+            <a:pPr>
+              <a:spcAft>
+                <a:spcPts val="800"/>
+              </a:spcAft>
+              <a:defRPr sz="1500">
+                <a:solidFill>
+                  <a:srgbClr val="E5ECF5"/>
+                </a:solidFill>
+                <a:latin typeface="Droid Sans Fallback"/>
+              </a:defRPr>
+            </a:pPr>
+            <a:r>
+              <a:t>•  写完就发且 Ring/VT 已定时：连 MILP 都可以不做，只要 produce 边</a:t>
+            </a:r>
+          </a:p>
+        </p:txBody>
+      </p:sp>
+      <p:sp>
+        <p:nvSpPr>
+          <p:cNvPr id="26" name="Rounded Rectangle 25"/>
           <p:cNvSpPr/>
           <p:nvPr/>
         </p:nvSpPr>
         <p:spPr>
           <a:xfrm>
-            <a:off x="548640" y="4389120"/>
-            <a:ext cx="11109960" cy="1508760"/>
+            <a:off x="548640" y="5349240"/>
+            <a:ext cx="11109960" cy="960120"/>
           </a:xfrm>
           <a:prstGeom prst="roundRect">
             <a:avLst/>
@@ -8916,14 +8881,14 @@
       </p:sp>
       <p:sp>
         <p:nvSpPr>
-          <p:cNvPr id="16" name="TextBox 15"/>
-          <p:cNvSpPr txBox="1"/>
-          <p:nvPr/>
-        </p:nvSpPr>
-        <p:spPr>
-          <a:xfrm>
-            <a:off x="694944" y="4443983"/>
-            <a:ext cx="10853928" cy="1399031"/>
+          <p:cNvPr id="27" name="TextBox 26"/>
+          <p:cNvSpPr txBox="1"/>
+          <p:nvPr/>
+        </p:nvSpPr>
+        <p:spPr>
+          <a:xfrm>
+            <a:off x="694944" y="5404103"/>
+            <a:ext cx="10853928" cy="850392"/>
           </a:xfrm>
           <a:prstGeom prst="rect">
             <a:avLst/>
@@ -8944,7 +8909,7 @@
                 </a:solidFill>
                 <a:latin typeface="Droid Sans Fallback"/>
               </a:rPr>
-              <a:t>背景  若让编译器再手填一张「谁生产哪一包」的表，容易和切块网格不一致。规定「只能按 C-tile 整块合并」，表就是一个除法，检查对齐即可。</a:t>
+              <a:t>背景  和上一页合起来：扩展的是「数据必须先算完再发」这条边。估时只为离线比较结构，不写进内核当闹钟。</a:t>
             </a:r>
           </a:p>
         </p:txBody>
@@ -9005,7 +8970,7 @@
                 </a:solidFill>
                 <a:latin typeface="Droid Sans Fallback"/>
               </a:rPr>
-              <a:t>合同一页纸</a:t>
+              <a:t>编译器接口</a:t>
             </a:r>
           </a:p>
         </p:txBody>
@@ -9040,7 +9005,7 @@
                 </a:solidFill>
                 <a:latin typeface="Droid Sans Fallback"/>
               </a:rPr>
-              <a:t>求解器看见什么、交出什么</a:t>
+              <a:t>两份输入分别回答什么</a:t>
             </a:r>
           </a:p>
         </p:txBody>
@@ -9134,7 +9099,7 @@
         <p:spPr>
           <a:xfrm>
             <a:off x="548640" y="1170432"/>
-            <a:ext cx="5532120" cy="3063240"/>
+            <a:ext cx="5532120" cy="3246120"/>
           </a:xfrm>
           <a:prstGeom prst="roundRect">
             <a:avLst/>
@@ -9179,7 +9144,7 @@
         <p:spPr>
           <a:xfrm>
             <a:off x="548640" y="1170432"/>
-            <a:ext cx="64008" cy="3063240"/>
+            <a:ext cx="64008" cy="3246120"/>
           </a:xfrm>
           <a:prstGeom prst="rect">
             <a:avLst/>
@@ -9245,7 +9210,7 @@
                 </a:solidFill>
                 <a:latin typeface="Droid Sans Fallback"/>
               </a:rPr>
-              <a:t>吃进去</a:t>
+              <a:t>tiling = 空间怎么切</a:t>
             </a:r>
           </a:p>
         </p:txBody>
@@ -9259,7 +9224,7 @@
         <p:spPr>
           <a:xfrm>
             <a:off x="731520" y="1609344"/>
-            <a:ext cx="5202936" cy="2514600"/>
+            <a:ext cx="5202936" cy="2697479"/>
           </a:xfrm>
           <a:prstGeom prst="rect">
             <a:avLst/>
@@ -9280,10 +9245,11 @@
                 </a:solidFill>
                 <a:latin typeface="Droid Sans Fallback"/>
               </a:rPr>
-              <a:t>原来就有的：网络怎么连、链路多慢、
-AllReduce、Ring/HD 怎么传
-新加上的：tiling、计算流图
-（以及切几块打一包、写出延迟两个数）</a:t>
+              <a:t>Y 切成多少个 C-tile、每块多大
+沿 K 要折几次才写完一块
+循环先走哪一维、一拍并几块
+写到内存后过多久通信才看得见
+没有「第 3 块几点钟出炉」</a:t>
             </a:r>
           </a:p>
         </p:txBody>
@@ -9297,7 +9263,7 @@
         <p:spPr>
           <a:xfrm>
             <a:off x="6309360" y="1170432"/>
-            <a:ext cx="5349240" cy="3063240"/>
+            <a:ext cx="5349240" cy="3246120"/>
           </a:xfrm>
           <a:prstGeom prst="roundRect">
             <a:avLst/>
@@ -9342,7 +9308,7 @@
         <p:spPr>
           <a:xfrm>
             <a:off x="6309360" y="1170432"/>
-            <a:ext cx="64008" cy="3063240"/>
+            <a:ext cx="64008" cy="3246120"/>
           </a:xfrm>
           <a:prstGeom prst="rect">
             <a:avLst/>
@@ -9408,7 +9374,7 @@
                 </a:solidFill>
                 <a:latin typeface="Droid Sans Fallback"/>
               </a:rPr>
-              <a:t>交出来</a:t>
+              <a:t>计算流图 = 这些块何时算完</a:t>
             </a:r>
           </a:p>
         </p:txBody>
@@ -9422,7 +9388,7 @@
         <p:spPr>
           <a:xfrm>
             <a:off x="6492240" y="1609344"/>
-            <a:ext cx="5020055" cy="2514600"/>
+            <a:ext cx="5020055" cy="2697479"/>
           </a:xfrm>
           <a:prstGeom prst="rect">
             <a:avLst/>
@@ -9443,9 +9409,11 @@
                 </a:solidFill>
                 <a:latin typeface="Droid Sans Fallback"/>
               </a:rPr>
-              <a:t>通信时刻表：哪一包、何时、走哪条路
-保证：没有任何一包早于它的 ready
-不交：新的切块方案、新的计算顺序</a:t>
+              <a:t>节点 = 上面那些 C-tile（同一套编号）
+边 = 已排好的计算顺序
+每节点做多久
+没有「几块拼成一次 AllReduce 的一包」
+那是切块网格上的简单合并规则</a:t>
             </a:r>
           </a:p>
         </p:txBody>
@@ -9458,8 +9426,8 @@
         </p:nvSpPr>
         <p:spPr>
           <a:xfrm>
-            <a:off x="548640" y="4480560"/>
-            <a:ext cx="11109960" cy="1417320"/>
+            <a:off x="548640" y="4617720"/>
+            <a:ext cx="11109960" cy="1280160"/>
           </a:xfrm>
           <a:prstGeom prst="roundRect">
             <a:avLst/>
@@ -9503,8 +9471,8 @@
         </p:nvSpPr>
         <p:spPr>
           <a:xfrm>
-            <a:off x="694944" y="4535424"/>
-            <a:ext cx="10853928" cy="1307592"/>
+            <a:off x="694944" y="4672583"/>
+            <a:ext cx="10853928" cy="1170431"/>
           </a:xfrm>
           <a:prstGeom prst="rect">
             <a:avLst/>
@@ -9525,7 +9493,7 @@
                 </a:solidFill>
                 <a:latin typeface="Droid Sans Fallback"/>
               </a:rPr>
-              <a:t>背景  目标函数从「通信越早结束越好」改成「整个融合算子越早结束越好」。因为计算收工时间已经由流图钉死，求解器真正能抠的是：通信怎样咬着计算的尾巴往前叠。</a:t>
+              <a:t>背景  只有 tiling：知道切成哪些块，不知道何时有货。只有流图：知道何时算完哪块，不知道通信按几块打一包。所以两份都要，但各自只答一件事。</a:t>
             </a:r>
           </a:p>
         </p:txBody>
@@ -9586,7 +9554,7 @@
                 </a:solidFill>
                 <a:latin typeface="Droid Sans Fallback"/>
               </a:rPr>
-              <a:t>直觉</a:t>
+              <a:t>推导  /  避免重复输入</a:t>
             </a:r>
           </a:p>
         </p:txBody>
@@ -9621,7 +9589,7 @@
                 </a:solidFill>
                 <a:latin typeface="Droid Sans Fallback"/>
               </a:rPr>
-              <a:t>一张图看完数据怎么走</a:t>
+              <a:t>不必再要第三份：有货时间和资源占用都能推出来</a:t>
             </a:r>
           </a:p>
         </p:txBody>
@@ -9708,14 +9676,49 @@
       </p:sp>
       <p:sp>
         <p:nvSpPr>
-          <p:cNvPr id="6" name="Rounded Rectangle 5"/>
+          <p:cNvPr id="6" name="TextBox 5"/>
+          <p:cNvSpPr txBox="1"/>
+          <p:nvPr/>
+        </p:nvSpPr>
+        <p:spPr>
+          <a:xfrm>
+            <a:off x="640080" y="1115568"/>
+            <a:ext cx="10972800" cy="365760"/>
+          </a:xfrm>
+          <a:prstGeom prst="rect">
+            <a:avLst/>
+          </a:prstGeom>
+          <a:noFill/>
+        </p:spPr>
+        <p:txBody>
+          <a:bodyPr wrap="square" anchor="ctr">
+            <a:spAutoFit/>
+          </a:bodyPr>
+          <a:lstStyle/>
+          <a:p>
+            <a:pPr algn="l"/>
+            <a:r>
+              <a:rPr sz="1400" b="0">
+                <a:solidFill>
+                  <a:srgbClr val="E5ECF5"/>
+                </a:solidFill>
+                <a:latin typeface="Droid Sans Fallback"/>
+              </a:rPr>
+              <a:t>上一轮讨论里出现过 produce、占用时间轴。它们不是编译器另交的图，而是下面两个函数。</a:t>
+            </a:r>
+          </a:p>
+        </p:txBody>
+      </p:sp>
+      <p:sp>
+        <p:nvSpPr>
+          <p:cNvPr id="7" name="Rounded Rectangle 6"/>
           <p:cNvSpPr/>
           <p:nvPr/>
         </p:nvSpPr>
         <p:spPr>
           <a:xfrm>
-            <a:off x="640080" y="1280160"/>
-            <a:ext cx="2606040" cy="2148840"/>
+            <a:off x="548640" y="1554480"/>
+            <a:ext cx="5532120" cy="2606040"/>
           </a:xfrm>
           <a:prstGeom prst="roundRect">
             <a:avLst/>
@@ -9725,7 +9728,7 @@
           </a:solidFill>
           <a:ln>
             <a:solidFill>
-              <a:srgbClr val="266CFF"/>
+              <a:srgbClr val="334560"/>
             </a:solidFill>
           </a:ln>
         </p:spPr>
@@ -9753,24 +9756,24 @@
       </p:sp>
       <p:sp>
         <p:nvSpPr>
-          <p:cNvPr id="7" name="Rounded Rectangle 6"/>
+          <p:cNvPr id="8" name="Rectangle 7"/>
           <p:cNvSpPr/>
           <p:nvPr/>
         </p:nvSpPr>
         <p:spPr>
           <a:xfrm>
-            <a:off x="1417319" y="1463040"/>
-            <a:ext cx="1051560" cy="310896"/>
-          </a:xfrm>
-          <a:prstGeom prst="roundRect">
+            <a:off x="548640" y="1554480"/>
+            <a:ext cx="64008" cy="2606040"/>
+          </a:xfrm>
+          <a:prstGeom prst="rect">
             <a:avLst/>
           </a:prstGeom>
           <a:solidFill>
-            <a:srgbClr val="266CFF"/>
+            <a:srgbClr val="FF9933"/>
           </a:solidFill>
           <a:ln>
             <a:solidFill>
-              <a:srgbClr val="266CFF"/>
+              <a:srgbClr val="FF9933"/>
             </a:solidFill>
           </a:ln>
         </p:spPr>
@@ -9798,14 +9801,14 @@
       </p:sp>
       <p:sp>
         <p:nvSpPr>
-          <p:cNvPr id="8" name="TextBox 7"/>
-          <p:cNvSpPr txBox="1"/>
-          <p:nvPr/>
-        </p:nvSpPr>
-        <p:spPr>
-          <a:xfrm>
-            <a:off x="1417319" y="1463040"/>
-            <a:ext cx="1051560" cy="310896"/>
+          <p:cNvPr id="9" name="TextBox 8"/>
+          <p:cNvSpPr txBox="1"/>
+          <p:nvPr/>
+        </p:nvSpPr>
+        <p:spPr>
+          <a:xfrm>
+            <a:off x="731520" y="1645920"/>
+            <a:ext cx="5239512" cy="310896"/>
           </a:xfrm>
           <a:prstGeom prst="rect">
             <a:avLst/>
@@ -9818,7 +9821,7 @@
           </a:bodyPr>
           <a:lstStyle/>
           <a:p>
-            <a:pPr algn="ctr"/>
+            <a:pPr algn="l"/>
             <a:r>
               <a:rPr sz="1600" b="1">
                 <a:solidFill>
@@ -9826,78 +9829,45 @@
                 </a:solidFill>
                 <a:latin typeface="Droid Sans Fallback"/>
               </a:rPr>
-              <a:t>切</a:t>
-            </a:r>
-          </a:p>
-        </p:txBody>
-      </p:sp>
-      <p:sp>
-        <p:nvSpPr>
-          <p:cNvPr id="9" name="TextBox 8"/>
-          <p:cNvSpPr txBox="1"/>
-          <p:nvPr/>
-        </p:nvSpPr>
-        <p:spPr>
-          <a:xfrm>
-            <a:off x="777240" y="1965960"/>
-            <a:ext cx="2331720" cy="1234440"/>
-          </a:xfrm>
-          <a:prstGeom prst="rect">
-            <a:avLst/>
-          </a:prstGeom>
-          <a:noFill/>
-        </p:spPr>
-        <p:txBody>
-          <a:bodyPr wrap="square" anchor="ctr">
-            <a:spAutoFit/>
-          </a:bodyPr>
-          <a:lstStyle/>
-          <a:p>
-            <a:pPr algn="ctr"/>
-            <a:r>
-              <a:rPr sz="1500" b="0">
+              <a:t>何时有货 ready</a:t>
+            </a:r>
+          </a:p>
+        </p:txBody>
+      </p:sp>
+      <p:sp>
+        <p:nvSpPr>
+          <p:cNvPr id="10" name="TextBox 9"/>
+          <p:cNvSpPr txBox="1"/>
+          <p:nvPr/>
+        </p:nvSpPr>
+        <p:spPr>
+          <a:xfrm>
+            <a:off x="731520" y="1993391"/>
+            <a:ext cx="5202936" cy="2057400"/>
+          </a:xfrm>
+          <a:prstGeom prst="rect">
+            <a:avLst/>
+          </a:prstGeom>
+          <a:noFill/>
+        </p:spPr>
+        <p:txBody>
+          <a:bodyPr wrap="square" anchor="t">
+            <a:spAutoFit/>
+          </a:bodyPr>
+          <a:lstStyle/>
+          <a:p>
+            <a:pPr algn="l"/>
+            <a:r>
+              <a:rPr sz="1400" b="0">
                 <a:solidFill>
                   <a:srgbClr val="E5ECF5"/>
                 </a:solidFill>
                 <a:latin typeface="Droid Sans Fallback"/>
               </a:rPr>
-              <a:t>编译器把 Y
-切成 C-tile</a:t>
-            </a:r>
-          </a:p>
-        </p:txBody>
-      </p:sp>
-      <p:sp>
-        <p:nvSpPr>
-          <p:cNvPr id="10" name="TextBox 9"/>
-          <p:cNvSpPr txBox="1"/>
-          <p:nvPr/>
-        </p:nvSpPr>
-        <p:spPr>
-          <a:xfrm>
-            <a:off x="3154680" y="2057400"/>
-            <a:ext cx="411480" cy="411480"/>
-          </a:xfrm>
-          <a:prstGeom prst="rect">
-            <a:avLst/>
-          </a:prstGeom>
-          <a:noFill/>
-        </p:spPr>
-        <p:txBody>
-          <a:bodyPr wrap="square" anchor="ctr">
-            <a:spAutoFit/>
-          </a:bodyPr>
-          <a:lstStyle/>
-          <a:p>
-            <a:pPr algn="l"/>
-            <a:r>
-              <a:rPr sz="2200" b="1">
-                <a:solidFill>
-                  <a:srgbClr val="8294AE"/>
-                </a:solidFill>
-                <a:latin typeface="Droid Sans Fallback"/>
-              </a:rPr>
-              <a:t>→</a:t>
+              <a:t>约定：连续若干个 C-tile 合成通信的一包
+（默认同一块 C-tile 就是一包，最简单）
+这一包的 ready = 其中最晚写完的那块
+再加一个固定的写出延迟</a:t>
             </a:r>
           </a:p>
         </p:txBody>
@@ -9910,8 +9880,8 @@
         </p:nvSpPr>
         <p:spPr>
           <a:xfrm>
-            <a:off x="3520439" y="1280160"/>
-            <a:ext cx="2606040" cy="2148840"/>
+            <a:off x="6309360" y="1554480"/>
+            <a:ext cx="5349240" cy="2606040"/>
           </a:xfrm>
           <a:prstGeom prst="roundRect">
             <a:avLst/>
@@ -9921,7 +9891,7 @@
           </a:solidFill>
           <a:ln>
             <a:solidFill>
-              <a:srgbClr val="25C8DD"/>
+              <a:srgbClr val="334560"/>
             </a:solidFill>
           </a:ln>
         </p:spPr>
@@ -9949,16 +9919,16 @@
       </p:sp>
       <p:sp>
         <p:nvSpPr>
-          <p:cNvPr id="12" name="Rounded Rectangle 11"/>
+          <p:cNvPr id="12" name="Rectangle 11"/>
           <p:cNvSpPr/>
           <p:nvPr/>
         </p:nvSpPr>
         <p:spPr>
           <a:xfrm>
-            <a:off x="4297679" y="1463040"/>
-            <a:ext cx="1051560" cy="310896"/>
-          </a:xfrm>
-          <a:prstGeom prst="roundRect">
+            <a:off x="6309360" y="1554480"/>
+            <a:ext cx="64008" cy="2606040"/>
+          </a:xfrm>
+          <a:prstGeom prst="rect">
             <a:avLst/>
           </a:prstGeom>
           <a:solidFill>
@@ -10000,8 +9970,8 @@
         </p:nvSpPr>
         <p:spPr>
           <a:xfrm>
-            <a:off x="4297679" y="1463040"/>
-            <a:ext cx="1051560" cy="310896"/>
+            <a:off x="6492240" y="1645920"/>
+            <a:ext cx="5056631" cy="310896"/>
           </a:xfrm>
           <a:prstGeom prst="rect">
             <a:avLst/>
@@ -10014,7 +9984,7 @@
           </a:bodyPr>
           <a:lstStyle/>
           <a:p>
-            <a:pPr algn="ctr"/>
+            <a:pPr algn="l"/>
             <a:r>
               <a:rPr sz="1600" b="1">
                 <a:solidFill>
@@ -10022,7 +9992,7 @@
                 </a:solidFill>
                 <a:latin typeface="Droid Sans Fallback"/>
               </a:rPr>
-              <a:t>算</a:t>
+              <a:t>计算占了哪些资源</a:t>
             </a:r>
           </a:p>
         </p:txBody>
@@ -10035,507 +10005,46 @@
         </p:nvSpPr>
         <p:spPr>
           <a:xfrm>
-            <a:off x="3657599" y="1965960"/>
-            <a:ext cx="2331720" cy="1234440"/>
-          </a:xfrm>
-          <a:prstGeom prst="rect">
-            <a:avLst/>
-          </a:prstGeom>
-          <a:noFill/>
-        </p:spPr>
-        <p:txBody>
-          <a:bodyPr wrap="square" anchor="ctr">
-            <a:spAutoFit/>
-          </a:bodyPr>
-          <a:lstStyle/>
-          <a:p>
-            <a:pPr algn="ctr"/>
-            <a:r>
-              <a:rPr sz="1500" b="0">
+            <a:off x="6492240" y="1993391"/>
+            <a:ext cx="5020055" cy="2057400"/>
+          </a:xfrm>
+          <a:prstGeom prst="rect">
+            <a:avLst/>
+          </a:prstGeom>
+          <a:noFill/>
+        </p:spPr>
+        <p:txBody>
+          <a:bodyPr wrap="square" anchor="t">
+            <a:spAutoFit/>
+          </a:bodyPr>
+          <a:lstStyle/>
+          <a:p>
+            <a:pPr algn="l"/>
+            <a:r>
+              <a:rPr sz="1400" b="0">
                 <a:solidFill>
                   <a:srgbClr val="E5ECF5"/>
                 </a:solidFill>
                 <a:latin typeface="Droid Sans Fallback"/>
               </a:rPr>
-              <a:t>按流图一块块算
-写完才算有货</a:t>
-            </a:r>
-          </a:p>
-        </p:txBody>
-      </p:sp>
-      <p:sp>
-        <p:nvSpPr>
-          <p:cNvPr id="15" name="TextBox 14"/>
-          <p:cNvSpPr txBox="1"/>
-          <p:nvPr/>
-        </p:nvSpPr>
-        <p:spPr>
-          <a:xfrm>
-            <a:off x="6035040" y="2057400"/>
-            <a:ext cx="411480" cy="411480"/>
-          </a:xfrm>
-          <a:prstGeom prst="rect">
-            <a:avLst/>
-          </a:prstGeom>
-          <a:noFill/>
-        </p:spPr>
-        <p:txBody>
-          <a:bodyPr wrap="square" anchor="ctr">
-            <a:spAutoFit/>
-          </a:bodyPr>
-          <a:lstStyle/>
-          <a:p>
-            <a:pPr algn="l"/>
-            <a:r>
-              <a:rPr sz="2200" b="1">
-                <a:solidFill>
-                  <a:srgbClr val="8294AE"/>
-                </a:solidFill>
-                <a:latin typeface="Droid Sans Fallback"/>
-              </a:rPr>
-              <a:t>→</a:t>
-            </a:r>
-          </a:p>
-        </p:txBody>
-      </p:sp>
-      <p:sp>
-        <p:nvSpPr>
-          <p:cNvPr id="16" name="Rounded Rectangle 15"/>
+              <a:t>每个 C-tile 带一份固定配额
+（占几条计算单元、吃多少内存带宽）
+按流图的起止时间扫一遍
+就得到每个时刻还剩多少给通信</a:t>
+            </a:r>
+          </a:p>
+        </p:txBody>
+      </p:sp>
+      <p:sp>
+        <p:nvSpPr>
+          <p:cNvPr id="15" name="Rounded Rectangle 14"/>
           <p:cNvSpPr/>
           <p:nvPr/>
         </p:nvSpPr>
         <p:spPr>
           <a:xfrm>
-            <a:off x="6400800" y="1280160"/>
-            <a:ext cx="2606040" cy="2148840"/>
-          </a:xfrm>
-          <a:prstGeom prst="roundRect">
-            <a:avLst/>
-          </a:prstGeom>
-          <a:solidFill>
-            <a:srgbClr val="1C2739"/>
-          </a:solidFill>
-          <a:ln>
-            <a:solidFill>
-              <a:srgbClr val="FF9933"/>
-            </a:solidFill>
-          </a:ln>
-        </p:spPr>
-        <p:style>
-          <a:lnRef idx="1">
-            <a:schemeClr val="accent1"/>
-          </a:lnRef>
-          <a:fillRef idx="3">
-            <a:schemeClr val="accent1"/>
-          </a:fillRef>
-          <a:effectRef idx="2">
-            <a:schemeClr val="accent1"/>
-          </a:effectRef>
-          <a:fontRef idx="minor">
-            <a:schemeClr val="lt1"/>
-          </a:fontRef>
-        </p:style>
-        <p:txBody>
-          <a:bodyPr rtlCol="0" anchor="ctr"/>
-          <a:lstStyle/>
-          <a:p>
-            <a:pPr algn="ctr"/>
-          </a:p>
-        </p:txBody>
-      </p:sp>
-      <p:sp>
-        <p:nvSpPr>
-          <p:cNvPr id="17" name="Rounded Rectangle 16"/>
-          <p:cNvSpPr/>
-          <p:nvPr/>
-        </p:nvSpPr>
-        <p:spPr>
-          <a:xfrm>
-            <a:off x="7178040" y="1463040"/>
-            <a:ext cx="1051560" cy="310896"/>
-          </a:xfrm>
-          <a:prstGeom prst="roundRect">
-            <a:avLst/>
-          </a:prstGeom>
-          <a:solidFill>
-            <a:srgbClr val="FF9933"/>
-          </a:solidFill>
-          <a:ln>
-            <a:solidFill>
-              <a:srgbClr val="FF9933"/>
-            </a:solidFill>
-          </a:ln>
-        </p:spPr>
-        <p:style>
-          <a:lnRef idx="1">
-            <a:schemeClr val="accent1"/>
-          </a:lnRef>
-          <a:fillRef idx="3">
-            <a:schemeClr val="accent1"/>
-          </a:fillRef>
-          <a:effectRef idx="2">
-            <a:schemeClr val="accent1"/>
-          </a:effectRef>
-          <a:fontRef idx="minor">
-            <a:schemeClr val="lt1"/>
-          </a:fontRef>
-        </p:style>
-        <p:txBody>
-          <a:bodyPr rtlCol="0" anchor="ctr"/>
-          <a:lstStyle/>
-          <a:p>
-            <a:pPr algn="ctr"/>
-          </a:p>
-        </p:txBody>
-      </p:sp>
-      <p:sp>
-        <p:nvSpPr>
-          <p:cNvPr id="18" name="TextBox 17"/>
-          <p:cNvSpPr txBox="1"/>
-          <p:nvPr/>
-        </p:nvSpPr>
-        <p:spPr>
-          <a:xfrm>
-            <a:off x="7178040" y="1463040"/>
-            <a:ext cx="1051560" cy="310896"/>
-          </a:xfrm>
-          <a:prstGeom prst="rect">
-            <a:avLst/>
-          </a:prstGeom>
-          <a:noFill/>
-        </p:spPr>
-        <p:txBody>
-          <a:bodyPr wrap="square" anchor="ctr">
-            <a:spAutoFit/>
-          </a:bodyPr>
-          <a:lstStyle/>
-          <a:p>
-            <a:pPr algn="ctr"/>
-            <a:r>
-              <a:rPr sz="1600" b="1">
-                <a:solidFill>
-                  <a:srgbClr val="F8FAFD"/>
-                </a:solidFill>
-                <a:latin typeface="Droid Sans Fallback"/>
-              </a:rPr>
-              <a:t>叠</a:t>
-            </a:r>
-          </a:p>
-        </p:txBody>
-      </p:sp>
-      <p:sp>
-        <p:nvSpPr>
-          <p:cNvPr id="19" name="TextBox 18"/>
-          <p:cNvSpPr txBox="1"/>
-          <p:nvPr/>
-        </p:nvSpPr>
-        <p:spPr>
-          <a:xfrm>
-            <a:off x="6537960" y="1965960"/>
-            <a:ext cx="2331720" cy="1234440"/>
-          </a:xfrm>
-          <a:prstGeom prst="rect">
-            <a:avLst/>
-          </a:prstGeom>
-          <a:noFill/>
-        </p:spPr>
-        <p:txBody>
-          <a:bodyPr wrap="square" anchor="ctr">
-            <a:spAutoFit/>
-          </a:bodyPr>
-          <a:lstStyle/>
-          <a:p>
-            <a:pPr algn="ctr"/>
-            <a:r>
-              <a:rPr sz="1500" b="0">
-                <a:solidFill>
-                  <a:srgbClr val="E5ECF5"/>
-                </a:solidFill>
-                <a:latin typeface="Droid Sans Fallback"/>
-              </a:rPr>
-              <a:t>有货的包立刻进
-AllReduce 时刻表</a:t>
-            </a:r>
-          </a:p>
-        </p:txBody>
-      </p:sp>
-      <p:sp>
-        <p:nvSpPr>
-          <p:cNvPr id="20" name="TextBox 19"/>
-          <p:cNvSpPr txBox="1"/>
-          <p:nvPr/>
-        </p:nvSpPr>
-        <p:spPr>
-          <a:xfrm>
-            <a:off x="8915400" y="2057400"/>
-            <a:ext cx="411480" cy="411480"/>
-          </a:xfrm>
-          <a:prstGeom prst="rect">
-            <a:avLst/>
-          </a:prstGeom>
-          <a:noFill/>
-        </p:spPr>
-        <p:txBody>
-          <a:bodyPr wrap="square" anchor="ctr">
-            <a:spAutoFit/>
-          </a:bodyPr>
-          <a:lstStyle/>
-          <a:p>
-            <a:pPr algn="l"/>
-            <a:r>
-              <a:rPr sz="2200" b="1">
-                <a:solidFill>
-                  <a:srgbClr val="8294AE"/>
-                </a:solidFill>
-                <a:latin typeface="Droid Sans Fallback"/>
-              </a:rPr>
-              <a:t>→</a:t>
-            </a:r>
-          </a:p>
-        </p:txBody>
-      </p:sp>
-      <p:sp>
-        <p:nvSpPr>
-          <p:cNvPr id="21" name="Rounded Rectangle 20"/>
-          <p:cNvSpPr/>
-          <p:nvPr/>
-        </p:nvSpPr>
-        <p:spPr>
-          <a:xfrm>
-            <a:off x="9281159" y="1280160"/>
-            <a:ext cx="2606040" cy="2148840"/>
-          </a:xfrm>
-          <a:prstGeom prst="roundRect">
-            <a:avLst/>
-          </a:prstGeom>
-          <a:solidFill>
-            <a:srgbClr val="1C2739"/>
-          </a:solidFill>
-          <a:ln>
-            <a:solidFill>
-              <a:srgbClr val="21B573"/>
-            </a:solidFill>
-          </a:ln>
-        </p:spPr>
-        <p:style>
-          <a:lnRef idx="1">
-            <a:schemeClr val="accent1"/>
-          </a:lnRef>
-          <a:fillRef idx="3">
-            <a:schemeClr val="accent1"/>
-          </a:fillRef>
-          <a:effectRef idx="2">
-            <a:schemeClr val="accent1"/>
-          </a:effectRef>
-          <a:fontRef idx="minor">
-            <a:schemeClr val="lt1"/>
-          </a:fontRef>
-        </p:style>
-        <p:txBody>
-          <a:bodyPr rtlCol="0" anchor="ctr"/>
-          <a:lstStyle/>
-          <a:p>
-            <a:pPr algn="ctr"/>
-          </a:p>
-        </p:txBody>
-      </p:sp>
-      <p:sp>
-        <p:nvSpPr>
-          <p:cNvPr id="22" name="Rounded Rectangle 21"/>
-          <p:cNvSpPr/>
-          <p:nvPr/>
-        </p:nvSpPr>
-        <p:spPr>
-          <a:xfrm>
-            <a:off x="10058399" y="1463040"/>
-            <a:ext cx="1051560" cy="310896"/>
-          </a:xfrm>
-          <a:prstGeom prst="roundRect">
-            <a:avLst/>
-          </a:prstGeom>
-          <a:solidFill>
-            <a:srgbClr val="21B573"/>
-          </a:solidFill>
-          <a:ln>
-            <a:solidFill>
-              <a:srgbClr val="21B573"/>
-            </a:solidFill>
-          </a:ln>
-        </p:spPr>
-        <p:style>
-          <a:lnRef idx="1">
-            <a:schemeClr val="accent1"/>
-          </a:lnRef>
-          <a:fillRef idx="3">
-            <a:schemeClr val="accent1"/>
-          </a:fillRef>
-          <a:effectRef idx="2">
-            <a:schemeClr val="accent1"/>
-          </a:effectRef>
-          <a:fontRef idx="minor">
-            <a:schemeClr val="lt1"/>
-          </a:fontRef>
-        </p:style>
-        <p:txBody>
-          <a:bodyPr rtlCol="0" anchor="ctr"/>
-          <a:lstStyle/>
-          <a:p>
-            <a:pPr algn="ctr"/>
-          </a:p>
-        </p:txBody>
-      </p:sp>
-      <p:sp>
-        <p:nvSpPr>
-          <p:cNvPr id="23" name="TextBox 22"/>
-          <p:cNvSpPr txBox="1"/>
-          <p:nvPr/>
-        </p:nvSpPr>
-        <p:spPr>
-          <a:xfrm>
-            <a:off x="10058399" y="1463040"/>
-            <a:ext cx="1051560" cy="310896"/>
-          </a:xfrm>
-          <a:prstGeom prst="rect">
-            <a:avLst/>
-          </a:prstGeom>
-          <a:noFill/>
-        </p:spPr>
-        <p:txBody>
-          <a:bodyPr wrap="square" anchor="ctr">
-            <a:spAutoFit/>
-          </a:bodyPr>
-          <a:lstStyle/>
-          <a:p>
-            <a:pPr algn="ctr"/>
-            <a:r>
-              <a:rPr sz="1600" b="1">
-                <a:solidFill>
-                  <a:srgbClr val="F8FAFD"/>
-                </a:solidFill>
-                <a:latin typeface="Droid Sans Fallback"/>
-              </a:rPr>
-              <a:t>齐</a:t>
-            </a:r>
-          </a:p>
-        </p:txBody>
-      </p:sp>
-      <p:sp>
-        <p:nvSpPr>
-          <p:cNvPr id="24" name="TextBox 23"/>
-          <p:cNvSpPr txBox="1"/>
-          <p:nvPr/>
-        </p:nvSpPr>
-        <p:spPr>
-          <a:xfrm>
-            <a:off x="9418319" y="1965960"/>
-            <a:ext cx="2331720" cy="1234440"/>
-          </a:xfrm>
-          <a:prstGeom prst="rect">
-            <a:avLst/>
-          </a:prstGeom>
-          <a:noFill/>
-        </p:spPr>
-        <p:txBody>
-          <a:bodyPr wrap="square" anchor="ctr">
-            <a:spAutoFit/>
-          </a:bodyPr>
-          <a:lstStyle/>
-          <a:p>
-            <a:pPr algn="ctr"/>
-            <a:r>
-              <a:rPr sz="1500" b="0">
-                <a:solidFill>
-                  <a:srgbClr val="E5ECF5"/>
-                </a:solidFill>
-                <a:latin typeface="Droid Sans Fallback"/>
-              </a:rPr>
-              <a:t>所有包加总完成
-每张卡都有完整 Y</a:t>
-            </a:r>
-          </a:p>
-        </p:txBody>
-      </p:sp>
-      <p:sp>
-        <p:nvSpPr>
-          <p:cNvPr id="25" name="TextBox 24"/>
-          <p:cNvSpPr txBox="1"/>
-          <p:nvPr/>
-        </p:nvSpPr>
-        <p:spPr>
-          <a:xfrm>
-            <a:off x="640080" y="3703320"/>
-            <a:ext cx="10972800" cy="1325880"/>
-          </a:xfrm>
-          <a:prstGeom prst="rect">
-            <a:avLst/>
-          </a:prstGeom>
-          <a:noFill/>
-        </p:spPr>
-        <p:txBody>
-          <a:bodyPr wrap="square">
-            <a:spAutoFit/>
-          </a:bodyPr>
-          <a:lstStyle/>
-          <a:p>
-            <a:pPr>
-              <a:spcAft>
-                <a:spcPts val="800"/>
-              </a:spcAft>
-              <a:defRPr sz="1600">
-                <a:solidFill>
-                  <a:srgbClr val="E5ECF5"/>
-                </a:solidFill>
-                <a:latin typeface="Droid Sans Fallback"/>
-              </a:defRPr>
-            </a:pPr>
-            <a:r>
-              <a:t>•  「切」和「算」的规则来自计算编译器，开会前就定死</a:t>
-            </a:r>
-          </a:p>
-          <a:p>
-            <a:pPr>
-              <a:spcAft>
-                <a:spcPts val="800"/>
-              </a:spcAft>
-              <a:defRPr sz="1600">
-                <a:solidFill>
-                  <a:srgbClr val="E5ECF5"/>
-                </a:solidFill>
-                <a:latin typeface="Droid Sans Fallback"/>
-              </a:defRPr>
-            </a:pPr>
-            <a:r>
-              <a:t>•  「叠」才是本次要扩展的求解器：只在有货之后插通信</a:t>
-            </a:r>
-          </a:p>
-          <a:p>
-            <a:pPr>
-              <a:spcAft>
-                <a:spcPts val="800"/>
-              </a:spcAft>
-              <a:defRPr sz="1600">
-                <a:solidFill>
-                  <a:srgbClr val="E5ECF5"/>
-                </a:solidFill>
-                <a:latin typeface="Droid Sans Fallback"/>
-              </a:defRPr>
-            </a:pPr>
-            <a:r>
-              <a:t>•  任何试图在「叠」里改「切」的方案，都退回上一页的不建议</a:t>
-            </a:r>
-          </a:p>
-        </p:txBody>
-      </p:sp>
-      <p:sp>
-        <p:nvSpPr>
-          <p:cNvPr id="26" name="Rounded Rectangle 25"/>
-          <p:cNvSpPr/>
-          <p:nvPr/>
-        </p:nvSpPr>
-        <p:spPr>
-          <a:xfrm>
-            <a:off x="548640" y="5120640"/>
-            <a:ext cx="11109960" cy="1188720"/>
+            <a:off x="548640" y="4389120"/>
+            <a:ext cx="11109960" cy="1508760"/>
           </a:xfrm>
           <a:prstGeom prst="roundRect">
             <a:avLst/>
@@ -10573,14 +10082,14 @@
       </p:sp>
       <p:sp>
         <p:nvSpPr>
-          <p:cNvPr id="27" name="TextBox 26"/>
-          <p:cNvSpPr txBox="1"/>
-          <p:nvPr/>
-        </p:nvSpPr>
-        <p:spPr>
-          <a:xfrm>
-            <a:off x="694944" y="5175503"/>
-            <a:ext cx="10853928" cy="1078992"/>
+          <p:cNvPr id="16" name="TextBox 15"/>
+          <p:cNvSpPr txBox="1"/>
+          <p:nvPr/>
+        </p:nvSpPr>
+        <p:spPr>
+          <a:xfrm>
+            <a:off x="694944" y="4443983"/>
+            <a:ext cx="10853928" cy="1399031"/>
           </a:xfrm>
           <a:prstGeom prst="rect">
             <a:avLst/>
@@ -10601,7 +10110,7 @@
                 </a:solidFill>
                 <a:latin typeface="Droid Sans Fallback"/>
               </a:rPr>
-              <a:t>背景  验收很好懂：融合后的总时间，应明显短于「先算完再 AllReduce」；且数值与两阶段结果一致（加法顺序若要求确定，邻居关系必须冻住）。</a:t>
+              <a:t>背景  若让编译器再手填一张「谁生产哪一包」的表，容易和切块网格不一致。规定「只能按 C-tile 整块合并」，表就是一个除法，检查对齐即可。</a:t>
             </a:r>
           </a:p>
         </p:txBody>
@@ -10662,7 +10171,7 @@
                 </a:solidFill>
                 <a:latin typeface="Droid Sans Fallback"/>
               </a:rPr>
-              <a:t>边界</a:t>
+              <a:t>合同一页纸</a:t>
             </a:r>
           </a:p>
         </p:txBody>
@@ -10697,7 +10206,7 @@
                 </a:solidFill>
                 <a:latin typeface="Droid Sans Fallback"/>
               </a:rPr>
-              <a:t>明确不做，避免范围膨胀</a:t>
+              <a:t>求解器看见什么、交出什么</a:t>
             </a:r>
           </a:p>
         </p:txBody>
@@ -10790,18 +10299,18 @@
         </p:nvSpPr>
         <p:spPr>
           <a:xfrm>
-            <a:off x="594360" y="1170432"/>
-            <a:ext cx="3063240" cy="310896"/>
+            <a:off x="548640" y="1170432"/>
+            <a:ext cx="5532120" cy="3063240"/>
           </a:xfrm>
           <a:prstGeom prst="roundRect">
             <a:avLst/>
           </a:prstGeom>
           <a:solidFill>
-            <a:srgbClr val="E14848"/>
+            <a:srgbClr val="1C2739"/>
           </a:solidFill>
           <a:ln>
             <a:solidFill>
-              <a:srgbClr val="E14848"/>
+              <a:srgbClr val="334560"/>
             </a:solidFill>
           </a:ln>
         </p:spPr>
@@ -10829,94 +10338,24 @@
       </p:sp>
       <p:sp>
         <p:nvSpPr>
-          <p:cNvPr id="7" name="TextBox 6"/>
-          <p:cNvSpPr txBox="1"/>
-          <p:nvPr/>
-        </p:nvSpPr>
-        <p:spPr>
-          <a:xfrm>
-            <a:off x="594360" y="1170432"/>
-            <a:ext cx="3063240" cy="310896"/>
-          </a:xfrm>
-          <a:prstGeom prst="rect">
-            <a:avLst/>
-          </a:prstGeom>
-          <a:noFill/>
-        </p:spPr>
-        <p:txBody>
-          <a:bodyPr wrap="square" anchor="ctr">
-            <a:spAutoFit/>
-          </a:bodyPr>
-          <a:lstStyle/>
-          <a:p>
-            <a:pPr algn="ctr"/>
-            <a:r>
-              <a:rPr sz="1300" b="1">
-                <a:solidFill>
-                  <a:srgbClr val="F8FAFD"/>
-                </a:solidFill>
-                <a:latin typeface="Droid Sans Fallback"/>
-              </a:rPr>
-              <a:t>不搜切块长宽</a:t>
-            </a:r>
-          </a:p>
-        </p:txBody>
-      </p:sp>
-      <p:sp>
-        <p:nvSpPr>
-          <p:cNvPr id="8" name="TextBox 7"/>
-          <p:cNvSpPr txBox="1"/>
-          <p:nvPr/>
-        </p:nvSpPr>
-        <p:spPr>
-          <a:xfrm>
-            <a:off x="3840480" y="1170432"/>
-            <a:ext cx="7680960" cy="365760"/>
-          </a:xfrm>
-          <a:prstGeom prst="rect">
-            <a:avLst/>
-          </a:prstGeom>
-          <a:noFill/>
-        </p:spPr>
-        <p:txBody>
-          <a:bodyPr wrap="square" anchor="ctr">
-            <a:spAutoFit/>
-          </a:bodyPr>
-          <a:lstStyle/>
-          <a:p>
-            <a:pPr algn="l"/>
-            <a:r>
-              <a:rPr sz="1600" b="0">
-                <a:solidFill>
-                  <a:srgbClr val="E5ECF5"/>
-                </a:solidFill>
-                <a:latin typeface="Droid Sans Fallback"/>
-              </a:rPr>
-              <a:t>交给 Triton / AscendC / 手工 kernel</a:t>
-            </a:r>
-          </a:p>
-        </p:txBody>
-      </p:sp>
-      <p:sp>
-        <p:nvSpPr>
-          <p:cNvPr id="9" name="Rounded Rectangle 8"/>
+          <p:cNvPr id="7" name="Rectangle 6"/>
           <p:cNvSpPr/>
           <p:nvPr/>
         </p:nvSpPr>
         <p:spPr>
           <a:xfrm>
-            <a:off x="594360" y="1947672"/>
-            <a:ext cx="3063240" cy="310896"/>
-          </a:xfrm>
-          <a:prstGeom prst="roundRect">
+            <a:off x="548640" y="1170432"/>
+            <a:ext cx="64008" cy="3063240"/>
+          </a:xfrm>
+          <a:prstGeom prst="rect">
             <a:avLst/>
           </a:prstGeom>
           <a:solidFill>
-            <a:srgbClr val="E14848"/>
+            <a:srgbClr val="266CFF"/>
           </a:solidFill>
           <a:ln>
             <a:solidFill>
-              <a:srgbClr val="E14848"/>
+              <a:srgbClr val="266CFF"/>
             </a:solidFill>
           </a:ln>
         </p:spPr>
@@ -10944,14 +10383,14 @@
       </p:sp>
       <p:sp>
         <p:nvSpPr>
-          <p:cNvPr id="10" name="TextBox 9"/>
-          <p:cNvSpPr txBox="1"/>
-          <p:nvPr/>
-        </p:nvSpPr>
-        <p:spPr>
-          <a:xfrm>
-            <a:off x="594360" y="1947672"/>
-            <a:ext cx="3063240" cy="310896"/>
+          <p:cNvPr id="8" name="TextBox 7"/>
+          <p:cNvSpPr txBox="1"/>
+          <p:nvPr/>
+        </p:nvSpPr>
+        <p:spPr>
+          <a:xfrm>
+            <a:off x="731520" y="1261872"/>
+            <a:ext cx="5239512" cy="310896"/>
           </a:xfrm>
           <a:prstGeom prst="rect">
             <a:avLst/>
@@ -10964,70 +10403,235 @@
           </a:bodyPr>
           <a:lstStyle/>
           <a:p>
+            <a:pPr algn="l"/>
+            <a:r>
+              <a:rPr sz="1600" b="1">
+                <a:solidFill>
+                  <a:srgbClr val="F8FAFD"/>
+                </a:solidFill>
+                <a:latin typeface="Droid Sans Fallback"/>
+              </a:rPr>
+              <a:t>吃进去</a:t>
+            </a:r>
+          </a:p>
+        </p:txBody>
+      </p:sp>
+      <p:sp>
+        <p:nvSpPr>
+          <p:cNvPr id="9" name="TextBox 8"/>
+          <p:cNvSpPr txBox="1"/>
+          <p:nvPr/>
+        </p:nvSpPr>
+        <p:spPr>
+          <a:xfrm>
+            <a:off x="731520" y="1609344"/>
+            <a:ext cx="5202936" cy="2514600"/>
+          </a:xfrm>
+          <a:prstGeom prst="rect">
+            <a:avLst/>
+          </a:prstGeom>
+          <a:noFill/>
+        </p:spPr>
+        <p:txBody>
+          <a:bodyPr wrap="square" anchor="t">
+            <a:spAutoFit/>
+          </a:bodyPr>
+          <a:lstStyle/>
+          <a:p>
+            <a:pPr algn="l"/>
+            <a:r>
+              <a:rPr sz="1400" b="0">
+                <a:solidFill>
+                  <a:srgbClr val="E5ECF5"/>
+                </a:solidFill>
+                <a:latin typeface="Droid Sans Fallback"/>
+              </a:rPr>
+              <a:t>原来就有的：网络怎么连、链路多慢、
+AllReduce、Ring/HD 怎么传
+新加上的：tiling、计算流图
+（以及切几块打一包、写出延迟两个数）</a:t>
+            </a:r>
+          </a:p>
+        </p:txBody>
+      </p:sp>
+      <p:sp>
+        <p:nvSpPr>
+          <p:cNvPr id="10" name="Rounded Rectangle 9"/>
+          <p:cNvSpPr/>
+          <p:nvPr/>
+        </p:nvSpPr>
+        <p:spPr>
+          <a:xfrm>
+            <a:off x="6309360" y="1170432"/>
+            <a:ext cx="5349240" cy="3063240"/>
+          </a:xfrm>
+          <a:prstGeom prst="roundRect">
+            <a:avLst/>
+          </a:prstGeom>
+          <a:solidFill>
+            <a:srgbClr val="1C2739"/>
+          </a:solidFill>
+          <a:ln>
+            <a:solidFill>
+              <a:srgbClr val="334560"/>
+            </a:solidFill>
+          </a:ln>
+        </p:spPr>
+        <p:style>
+          <a:lnRef idx="1">
+            <a:schemeClr val="accent1"/>
+          </a:lnRef>
+          <a:fillRef idx="3">
+            <a:schemeClr val="accent1"/>
+          </a:fillRef>
+          <a:effectRef idx="2">
+            <a:schemeClr val="accent1"/>
+          </a:effectRef>
+          <a:fontRef idx="minor">
+            <a:schemeClr val="lt1"/>
+          </a:fontRef>
+        </p:style>
+        <p:txBody>
+          <a:bodyPr rtlCol="0" anchor="ctr"/>
+          <a:lstStyle/>
+          <a:p>
             <a:pPr algn="ctr"/>
-            <a:r>
-              <a:rPr sz="1300" b="1">
+          </a:p>
+        </p:txBody>
+      </p:sp>
+      <p:sp>
+        <p:nvSpPr>
+          <p:cNvPr id="11" name="Rectangle 10"/>
+          <p:cNvSpPr/>
+          <p:nvPr/>
+        </p:nvSpPr>
+        <p:spPr>
+          <a:xfrm>
+            <a:off x="6309360" y="1170432"/>
+            <a:ext cx="64008" cy="3063240"/>
+          </a:xfrm>
+          <a:prstGeom prst="rect">
+            <a:avLst/>
+          </a:prstGeom>
+          <a:solidFill>
+            <a:srgbClr val="21B573"/>
+          </a:solidFill>
+          <a:ln>
+            <a:solidFill>
+              <a:srgbClr val="21B573"/>
+            </a:solidFill>
+          </a:ln>
+        </p:spPr>
+        <p:style>
+          <a:lnRef idx="1">
+            <a:schemeClr val="accent1"/>
+          </a:lnRef>
+          <a:fillRef idx="3">
+            <a:schemeClr val="accent1"/>
+          </a:fillRef>
+          <a:effectRef idx="2">
+            <a:schemeClr val="accent1"/>
+          </a:effectRef>
+          <a:fontRef idx="minor">
+            <a:schemeClr val="lt1"/>
+          </a:fontRef>
+        </p:style>
+        <p:txBody>
+          <a:bodyPr rtlCol="0" anchor="ctr"/>
+          <a:lstStyle/>
+          <a:p>
+            <a:pPr algn="ctr"/>
+          </a:p>
+        </p:txBody>
+      </p:sp>
+      <p:sp>
+        <p:nvSpPr>
+          <p:cNvPr id="12" name="TextBox 11"/>
+          <p:cNvSpPr txBox="1"/>
+          <p:nvPr/>
+        </p:nvSpPr>
+        <p:spPr>
+          <a:xfrm>
+            <a:off x="6492240" y="1261872"/>
+            <a:ext cx="5056631" cy="310896"/>
+          </a:xfrm>
+          <a:prstGeom prst="rect">
+            <a:avLst/>
+          </a:prstGeom>
+          <a:noFill/>
+        </p:spPr>
+        <p:txBody>
+          <a:bodyPr wrap="square" anchor="ctr">
+            <a:spAutoFit/>
+          </a:bodyPr>
+          <a:lstStyle/>
+          <a:p>
+            <a:pPr algn="l"/>
+            <a:r>
+              <a:rPr sz="1600" b="1">
                 <a:solidFill>
                   <a:srgbClr val="F8FAFD"/>
                 </a:solidFill>
                 <a:latin typeface="Droid Sans Fallback"/>
               </a:rPr>
-              <a:t>不重排计算顺序</a:t>
-            </a:r>
-          </a:p>
-        </p:txBody>
-      </p:sp>
-      <p:sp>
-        <p:nvSpPr>
-          <p:cNvPr id="11" name="TextBox 10"/>
-          <p:cNvSpPr txBox="1"/>
-          <p:nvPr/>
-        </p:nvSpPr>
-        <p:spPr>
-          <a:xfrm>
-            <a:off x="3840480" y="1947672"/>
-            <a:ext cx="7680960" cy="365760"/>
-          </a:xfrm>
-          <a:prstGeom prst="rect">
-            <a:avLst/>
-          </a:prstGeom>
-          <a:noFill/>
-        </p:spPr>
-        <p:txBody>
-          <a:bodyPr wrap="square" anchor="ctr">
+              <a:t>交出来</a:t>
+            </a:r>
+          </a:p>
+        </p:txBody>
+      </p:sp>
+      <p:sp>
+        <p:nvSpPr>
+          <p:cNvPr id="13" name="TextBox 12"/>
+          <p:cNvSpPr txBox="1"/>
+          <p:nvPr/>
+        </p:nvSpPr>
+        <p:spPr>
+          <a:xfrm>
+            <a:off x="6492240" y="1609344"/>
+            <a:ext cx="5020055" cy="2514600"/>
+          </a:xfrm>
+          <a:prstGeom prst="rect">
+            <a:avLst/>
+          </a:prstGeom>
+          <a:noFill/>
+        </p:spPr>
+        <p:txBody>
+          <a:bodyPr wrap="square" anchor="t">
             <a:spAutoFit/>
           </a:bodyPr>
           <a:lstStyle/>
           <a:p>
             <a:pPr algn="l"/>
             <a:r>
-              <a:rPr sz="1600" b="0">
+              <a:rPr sz="1400" b="0">
                 <a:solidFill>
                   <a:srgbClr val="E5ECF5"/>
                 </a:solidFill>
                 <a:latin typeface="Droid Sans Fallback"/>
               </a:rPr>
-              <a:t>改顺序就是改矩阵乘实现</a:t>
-            </a:r>
-          </a:p>
-        </p:txBody>
-      </p:sp>
-      <p:sp>
-        <p:nvSpPr>
-          <p:cNvPr id="12" name="Rounded Rectangle 11"/>
+              <a:t>结构：哪一包、走哪条路、挂在哪个写完事件上
+保证：没有事件就绝不发
+不交：墙上时钟启动点、新的切块、新的计算顺序</a:t>
+            </a:r>
+          </a:p>
+        </p:txBody>
+      </p:sp>
+      <p:sp>
+        <p:nvSpPr>
+          <p:cNvPr id="14" name="Rounded Rectangle 13"/>
           <p:cNvSpPr/>
           <p:nvPr/>
         </p:nvSpPr>
         <p:spPr>
           <a:xfrm>
-            <a:off x="594360" y="2724912"/>
-            <a:ext cx="3063240" cy="310896"/>
+            <a:off x="548640" y="4480560"/>
+            <a:ext cx="11109960" cy="1417320"/>
           </a:xfrm>
           <a:prstGeom prst="roundRect">
             <a:avLst/>
           </a:prstGeom>
           <a:solidFill>
-            <a:srgbClr val="FF9933"/>
+            <a:srgbClr val="3A3016"/>
           </a:solidFill>
           <a:ln>
             <a:solidFill>
@@ -11059,300 +10663,35 @@
       </p:sp>
       <p:sp>
         <p:nvSpPr>
-          <p:cNvPr id="13" name="TextBox 12"/>
-          <p:cNvSpPr txBox="1"/>
-          <p:nvPr/>
-        </p:nvSpPr>
-        <p:spPr>
-          <a:xfrm>
-            <a:off x="594360" y="2724912"/>
-            <a:ext cx="3063240" cy="310896"/>
-          </a:xfrm>
-          <a:prstGeom prst="rect">
-            <a:avLst/>
-          </a:prstGeom>
-          <a:noFill/>
-        </p:spPr>
-        <p:txBody>
-          <a:bodyPr wrap="square" anchor="ctr">
-            <a:spAutoFit/>
-          </a:bodyPr>
-          <a:lstStyle/>
-          <a:p>
-            <a:pPr algn="ctr"/>
-            <a:r>
-              <a:rPr sz="1300" b="1">
-                <a:solidFill>
-                  <a:srgbClr val="F8FAFD"/>
-                </a:solidFill>
-                <a:latin typeface="Droid Sans Fallback"/>
-              </a:rPr>
-              <a:t>不把激活挪过 AllReduce</a:t>
-            </a:r>
-          </a:p>
-        </p:txBody>
-      </p:sp>
-      <p:sp>
-        <p:nvSpPr>
-          <p:cNvPr id="14" name="TextBox 13"/>
-          <p:cNvSpPr txBox="1"/>
-          <p:nvPr/>
-        </p:nvSpPr>
-        <p:spPr>
-          <a:xfrm>
-            <a:off x="3840480" y="2724912"/>
-            <a:ext cx="7680960" cy="365760"/>
-          </a:xfrm>
-          <a:prstGeom prst="rect">
-            <a:avLst/>
-          </a:prstGeom>
-          <a:noFill/>
-        </p:spPr>
-        <p:txBody>
-          <a:bodyPr wrap="square" anchor="ctr">
+          <p:cNvPr id="15" name="TextBox 14"/>
+          <p:cNvSpPr txBox="1"/>
+          <p:nvPr/>
+        </p:nvSpPr>
+        <p:spPr>
+          <a:xfrm>
+            <a:off x="694944" y="4535424"/>
+            <a:ext cx="10853928" cy="1307592"/>
+          </a:xfrm>
+          <a:prstGeom prst="rect">
+            <a:avLst/>
+          </a:prstGeom>
+          <a:noFill/>
+        </p:spPr>
+        <p:txBody>
+          <a:bodyPr wrap="square" anchor="t">
             <a:spAutoFit/>
           </a:bodyPr>
           <a:lstStyle/>
           <a:p>
             <a:pPr algn="l"/>
             <a:r>
-              <a:rPr sz="1600" b="0">
+              <a:rPr sz="1200" b="0">
                 <a:solidFill>
                   <a:srgbClr val="E5ECF5"/>
                 </a:solidFill>
                 <a:latin typeface="Droid Sans Fallback"/>
               </a:rPr>
-              <a:t>会改数值，必须事先钉死在前或在后</a:t>
-            </a:r>
-          </a:p>
-        </p:txBody>
-      </p:sp>
-      <p:sp>
-        <p:nvSpPr>
-          <p:cNvPr id="15" name="Rounded Rectangle 14"/>
-          <p:cNvSpPr/>
-          <p:nvPr/>
-        </p:nvSpPr>
-        <p:spPr>
-          <a:xfrm>
-            <a:off x="594360" y="3502152"/>
-            <a:ext cx="3063240" cy="310896"/>
-          </a:xfrm>
-          <a:prstGeom prst="roundRect">
-            <a:avLst/>
-          </a:prstGeom>
-          <a:solidFill>
-            <a:srgbClr val="FF9933"/>
-          </a:solidFill>
-          <a:ln>
-            <a:solidFill>
-              <a:srgbClr val="FF9933"/>
-            </a:solidFill>
-          </a:ln>
-        </p:spPr>
-        <p:style>
-          <a:lnRef idx="1">
-            <a:schemeClr val="accent1"/>
-          </a:lnRef>
-          <a:fillRef idx="3">
-            <a:schemeClr val="accent1"/>
-          </a:fillRef>
-          <a:effectRef idx="2">
-            <a:schemeClr val="accent1"/>
-          </a:effectRef>
-          <a:fontRef idx="minor">
-            <a:schemeClr val="lt1"/>
-          </a:fontRef>
-        </p:style>
-        <p:txBody>
-          <a:bodyPr rtlCol="0" anchor="ctr"/>
-          <a:lstStyle/>
-          <a:p>
-            <a:pPr algn="ctr"/>
-          </a:p>
-        </p:txBody>
-      </p:sp>
-      <p:sp>
-        <p:nvSpPr>
-          <p:cNvPr id="16" name="TextBox 15"/>
-          <p:cNvSpPr txBox="1"/>
-          <p:nvPr/>
-        </p:nvSpPr>
-        <p:spPr>
-          <a:xfrm>
-            <a:off x="594360" y="3502152"/>
-            <a:ext cx="3063240" cy="310896"/>
-          </a:xfrm>
-          <a:prstGeom prst="rect">
-            <a:avLst/>
-          </a:prstGeom>
-          <a:noFill/>
-        </p:spPr>
-        <p:txBody>
-          <a:bodyPr wrap="square" anchor="ctr">
-            <a:spAutoFit/>
-          </a:bodyPr>
-          <a:lstStyle/>
-          <a:p>
-            <a:pPr algn="ctr"/>
-            <a:r>
-              <a:rPr sz="1300" b="1">
-                <a:solidFill>
-                  <a:srgbClr val="F8FAFD"/>
-                </a:solidFill>
-                <a:latin typeface="Droid Sans Fallback"/>
-              </a:rPr>
-              <a:t>不在求解器里枚举网卡队列绑法</a:t>
-            </a:r>
-          </a:p>
-        </p:txBody>
-      </p:sp>
-      <p:sp>
-        <p:nvSpPr>
-          <p:cNvPr id="17" name="TextBox 16"/>
-          <p:cNvSpPr txBox="1"/>
-          <p:nvPr/>
-        </p:nvSpPr>
-        <p:spPr>
-          <a:xfrm>
-            <a:off x="3840480" y="3502152"/>
-            <a:ext cx="7680960" cy="365760"/>
-          </a:xfrm>
-          <a:prstGeom prst="rect">
-            <a:avLst/>
-          </a:prstGeom>
-          <a:noFill/>
-        </p:spPr>
-        <p:txBody>
-          <a:bodyPr wrap="square" anchor="ctr">
-            <a:spAutoFit/>
-          </a:bodyPr>
-          <a:lstStyle/>
-          <a:p>
-            <a:pPr algn="l"/>
-            <a:r>
-              <a:rPr sz="1600" b="0">
-                <a:solidFill>
-                  <a:srgbClr val="E5ECF5"/>
-                </a:solidFill>
-                <a:latin typeface="Droid Sans Fallback"/>
-              </a:rPr>
-              <a:t>通信并发路数当已知数</a:t>
-            </a:r>
-          </a:p>
-        </p:txBody>
-      </p:sp>
-      <p:sp>
-        <p:nvSpPr>
-          <p:cNvPr id="18" name="Rounded Rectangle 17"/>
-          <p:cNvSpPr/>
-          <p:nvPr/>
-        </p:nvSpPr>
-        <p:spPr>
-          <a:xfrm>
-            <a:off x="594360" y="4279392"/>
-            <a:ext cx="3063240" cy="310896"/>
-          </a:xfrm>
-          <a:prstGeom prst="roundRect">
-            <a:avLst/>
-          </a:prstGeom>
-          <a:solidFill>
-            <a:srgbClr val="FF9933"/>
-          </a:solidFill>
-          <a:ln>
-            <a:solidFill>
-              <a:srgbClr val="FF9933"/>
-            </a:solidFill>
-          </a:ln>
-        </p:spPr>
-        <p:style>
-          <a:lnRef idx="1">
-            <a:schemeClr val="accent1"/>
-          </a:lnRef>
-          <a:fillRef idx="3">
-            <a:schemeClr val="accent1"/>
-          </a:fillRef>
-          <a:effectRef idx="2">
-            <a:schemeClr val="accent1"/>
-          </a:effectRef>
-          <a:fontRef idx="minor">
-            <a:schemeClr val="lt1"/>
-          </a:fontRef>
-        </p:style>
-        <p:txBody>
-          <a:bodyPr rtlCol="0" anchor="ctr"/>
-          <a:lstStyle/>
-          <a:p>
-            <a:pPr algn="ctr"/>
-          </a:p>
-        </p:txBody>
-      </p:sp>
-      <p:sp>
-        <p:nvSpPr>
-          <p:cNvPr id="19" name="TextBox 18"/>
-          <p:cNvSpPr txBox="1"/>
-          <p:nvPr/>
-        </p:nvSpPr>
-        <p:spPr>
-          <a:xfrm>
-            <a:off x="594360" y="4279392"/>
-            <a:ext cx="3063240" cy="310896"/>
-          </a:xfrm>
-          <a:prstGeom prst="rect">
-            <a:avLst/>
-          </a:prstGeom>
-          <a:noFill/>
-        </p:spPr>
-        <p:txBody>
-          <a:bodyPr wrap="square" anchor="ctr">
-            <a:spAutoFit/>
-          </a:bodyPr>
-          <a:lstStyle/>
-          <a:p>
-            <a:pPr algn="ctr"/>
-            <a:r>
-              <a:rPr sz="1300" b="1">
-                <a:solidFill>
-                  <a:srgbClr val="F8FAFD"/>
-                </a:solidFill>
-                <a:latin typeface="Droid Sans Fallback"/>
-              </a:rPr>
-              <a:t>不把「试几套切块」塞进同一个方程</a:t>
-            </a:r>
-          </a:p>
-        </p:txBody>
-      </p:sp>
-      <p:sp>
-        <p:nvSpPr>
-          <p:cNvPr id="20" name="TextBox 19"/>
-          <p:cNvSpPr txBox="1"/>
-          <p:nvPr/>
-        </p:nvSpPr>
-        <p:spPr>
-          <a:xfrm>
-            <a:off x="3840480" y="4279392"/>
-            <a:ext cx="7680960" cy="365760"/>
-          </a:xfrm>
-          <a:prstGeom prst="rect">
-            <a:avLst/>
-          </a:prstGeom>
-          <a:noFill/>
-        </p:spPr>
-        <p:txBody>
-          <a:bodyPr wrap="square" anchor="ctr">
-            <a:spAutoFit/>
-          </a:bodyPr>
-          <a:lstStyle/>
-          <a:p>
-            <a:pPr algn="l"/>
-            <a:r>
-              <a:rPr sz="1600" b="0">
-                <a:solidFill>
-                  <a:srgbClr val="E5ECF5"/>
-                </a:solidFill>
-                <a:latin typeface="Droid Sans Fallback"/>
-              </a:rPr>
-              <a:t>外层试 3～5 套，每套单独求一次通信</a:t>
+              <a:t>背景  离线目标函数可以用估时的总完成时间来比方案。比完之后微秒数丢掉，只把事件边和映射写进算子。</a:t>
             </a:r>
           </a:p>
         </p:txBody>
@@ -11448,7 +10787,7 @@
                 </a:solidFill>
                 <a:latin typeface="Droid Sans Fallback"/>
               </a:rPr>
-              <a:t>今天要拍的板：求解器不搜计算，只排通信</a:t>
+              <a:t>今天要拍的板：运行时认依赖，不认启动时刻</a:t>
             </a:r>
           </a:p>
         </p:txBody>
@@ -11688,11 +11027,11 @@
                 </a:solidFill>
                 <a:latin typeface="Droid Sans Fallback"/>
               </a:rPr>
-              <a:t>计算编译器给两样：
-  tiling（空间怎么切）
-  计算流图（这些块何时算完）
-通信 MILP 只决定：
-  算完的数据何时发给谁</a:t>
+              <a:t>计算编译器给：tiling + 谁生产哪一包
+运行时：这块写完才允许发这一包
+重叠靠事件自然发生
+估时只在离线比较「几种打包/VT」时用
+用完扔掉微秒数，不写进内核</a:t>
             </a:r>
           </a:p>
         </p:txBody>
@@ -11846,15 +11185,16 @@
           <a:p>
             <a:pPr algn="l"/>
             <a:r>
-              <a:rPr sz="1500" b="0">
+              <a:rPr sz="1400" b="0">
                 <a:solidFill>
                   <a:srgbClr val="E5ECF5"/>
                 </a:solidFill>
                 <a:latin typeface="Droid Sans Fallback"/>
               </a:rPr>
-              <a:t>不要让通信求解器去选矩阵乘的切块大小
-不要让它重排计算顺序
-那是另一类编译器，塞进同一个方程会又慢又不准</a:t>
+              <a:t>不要让通信求解器去选矩阵乘切块
+不要把「第 12 微秒启动」写进算子
+访存争抢会让闹钟又偏又可能早发
+写完就发且 Ring 已定时，连 MILP 都可以不做</a:t>
             </a:r>
           </a:p>
         </p:txBody>
@@ -11934,7 +11274,7 @@
                 </a:solidFill>
                 <a:latin typeface="Droid Sans Fallback"/>
               </a:rPr>
-              <a:t>背景  MILP = 混合整数线性规划。工业界用它自动生成集合通信的「谁在何时发给谁」。代表工作：TACCL、TE-CCL、SyCCL。它们从来只搜通信，不搜矩阵乘怎么切。</a:t>
+              <a:t>背景  MILP = 混合整数线性规划，工业界用来离线搜「谁发给谁、走哪条路」。代表：TACCL、TE-CCL、SyCCL。它们输出的日程下降到库里也是等 CQE，不是墙上时钟。融合只多挂一条本地写完事件。</a:t>
             </a:r>
           </a:p>
         </p:txBody>
@@ -11995,7 +11335,7 @@
                 </a:solidFill>
                 <a:latin typeface="Droid Sans Fallback"/>
               </a:rPr>
-              <a:t>决策</a:t>
+              <a:t>直觉</a:t>
             </a:r>
           </a:p>
         </p:txBody>
@@ -12030,7 +11370,7 @@
                 </a:solidFill>
                 <a:latin typeface="Droid Sans Fallback"/>
               </a:rPr>
-              <a:t>建议与下一步</a:t>
+              <a:t>一张图看完数据怎么走</a:t>
             </a:r>
           </a:p>
         </p:txBody>
@@ -12117,49 +11457,14 @@
       </p:sp>
       <p:sp>
         <p:nvSpPr>
-          <p:cNvPr id="6" name="TextBox 5"/>
-          <p:cNvSpPr txBox="1"/>
-          <p:nvPr/>
-        </p:nvSpPr>
-        <p:spPr>
-          <a:xfrm>
-            <a:off x="640080" y="1143000"/>
-            <a:ext cx="10972800" cy="640080"/>
-          </a:xfrm>
-          <a:prstGeom prst="rect">
-            <a:avLst/>
-          </a:prstGeom>
-          <a:noFill/>
-        </p:spPr>
-        <p:txBody>
-          <a:bodyPr wrap="square" anchor="ctr">
-            <a:spAutoFit/>
-          </a:bodyPr>
-          <a:lstStyle/>
-          <a:p>
-            <a:pPr algn="l"/>
-            <a:r>
-              <a:rPr sz="1700" b="1">
-                <a:solidFill>
-                  <a:srgbClr val="F8FAFD"/>
-                </a:solidFill>
-                <a:latin typeface="Droid Sans Fallback"/>
-              </a:rPr>
-              <a:t>立项口径：扩展现有集合通信求解器，支持「带就绪时间的 AllReduce」；计算切块仍由计算编译器给定。</a:t>
-            </a:r>
-          </a:p>
-        </p:txBody>
-      </p:sp>
-      <p:sp>
-        <p:nvSpPr>
-          <p:cNvPr id="7" name="Rounded Rectangle 6"/>
+          <p:cNvPr id="6" name="Rounded Rectangle 5"/>
           <p:cNvSpPr/>
           <p:nvPr/>
         </p:nvSpPr>
         <p:spPr>
           <a:xfrm>
-            <a:off x="548640" y="2011680"/>
-            <a:ext cx="2697480" cy="2331720"/>
+            <a:off x="640080" y="1280160"/>
+            <a:ext cx="2606040" cy="2148840"/>
           </a:xfrm>
           <a:prstGeom prst="roundRect">
             <a:avLst/>
@@ -12197,14 +11502,14 @@
       </p:sp>
       <p:sp>
         <p:nvSpPr>
-          <p:cNvPr id="8" name="Rounded Rectangle 7"/>
+          <p:cNvPr id="7" name="Rounded Rectangle 6"/>
           <p:cNvSpPr/>
           <p:nvPr/>
         </p:nvSpPr>
         <p:spPr>
           <a:xfrm>
-            <a:off x="713232" y="2176272"/>
-            <a:ext cx="502920" cy="310896"/>
+            <a:off x="1417319" y="1463040"/>
+            <a:ext cx="1051560" cy="310896"/>
           </a:xfrm>
           <a:prstGeom prst="roundRect">
             <a:avLst/>
@@ -12242,14 +11547,49 @@
       </p:sp>
       <p:sp>
         <p:nvSpPr>
+          <p:cNvPr id="8" name="TextBox 7"/>
+          <p:cNvSpPr txBox="1"/>
+          <p:nvPr/>
+        </p:nvSpPr>
+        <p:spPr>
+          <a:xfrm>
+            <a:off x="1417319" y="1463040"/>
+            <a:ext cx="1051560" cy="310896"/>
+          </a:xfrm>
+          <a:prstGeom prst="rect">
+            <a:avLst/>
+          </a:prstGeom>
+          <a:noFill/>
+        </p:spPr>
+        <p:txBody>
+          <a:bodyPr wrap="square" anchor="ctr">
+            <a:spAutoFit/>
+          </a:bodyPr>
+          <a:lstStyle/>
+          <a:p>
+            <a:pPr algn="ctr"/>
+            <a:r>
+              <a:rPr sz="1600" b="1">
+                <a:solidFill>
+                  <a:srgbClr val="F8FAFD"/>
+                </a:solidFill>
+                <a:latin typeface="Droid Sans Fallback"/>
+              </a:rPr>
+              <a:t>切</a:t>
+            </a:r>
+          </a:p>
+        </p:txBody>
+      </p:sp>
+      <p:sp>
+        <p:nvSpPr>
           <p:cNvPr id="9" name="TextBox 8"/>
           <p:cNvSpPr txBox="1"/>
           <p:nvPr/>
         </p:nvSpPr>
         <p:spPr>
           <a:xfrm>
-            <a:off x="713232" y="2176272"/>
-            <a:ext cx="502920" cy="310896"/>
+            <a:off x="777240" y="1965960"/>
+            <a:ext cx="2331720" cy="1234440"/>
           </a:xfrm>
           <a:prstGeom prst="rect">
             <a:avLst/>
@@ -12264,13 +11604,14 @@
           <a:p>
             <a:pPr algn="ctr"/>
             <a:r>
-              <a:rPr sz="1200" b="1">
-                <a:solidFill>
-                  <a:srgbClr val="F8FAFD"/>
-                </a:solidFill>
-                <a:latin typeface="Droid Sans Fallback"/>
-              </a:rPr>
-              <a:t>01</a:t>
+              <a:rPr sz="1500" b="0">
+                <a:solidFill>
+                  <a:srgbClr val="E5ECF5"/>
+                </a:solidFill>
+                <a:latin typeface="Droid Sans Fallback"/>
+              </a:rPr>
+              <a:t>编译器把 Y
+切成 C-tile</a:t>
             </a:r>
           </a:p>
         </p:txBody>
@@ -12283,8 +11624,8 @@
         </p:nvSpPr>
         <p:spPr>
           <a:xfrm>
-            <a:off x="731520" y="2697480"/>
-            <a:ext cx="2331720" cy="365760"/>
+            <a:off x="3154680" y="2057400"/>
+            <a:ext cx="411480" cy="411480"/>
           </a:xfrm>
           <a:prstGeom prst="rect">
             <a:avLst/>
@@ -12299,63 +11640,27 @@
           <a:p>
             <a:pPr algn="l"/>
             <a:r>
-              <a:rPr sz="1600" b="1">
-                <a:solidFill>
-                  <a:srgbClr val="F8FAFD"/>
-                </a:solidFill>
-                <a:latin typeface="Droid Sans Fallback"/>
-              </a:rPr>
-              <a:t>冻结接口</a:t>
-            </a:r>
-          </a:p>
-        </p:txBody>
-      </p:sp>
-      <p:sp>
-        <p:nvSpPr>
-          <p:cNvPr id="11" name="TextBox 10"/>
-          <p:cNvSpPr txBox="1"/>
-          <p:nvPr/>
-        </p:nvSpPr>
-        <p:spPr>
-          <a:xfrm>
-            <a:off x="731520" y="3154680"/>
-            <a:ext cx="2331720" cy="960120"/>
-          </a:xfrm>
-          <a:prstGeom prst="rect">
-            <a:avLst/>
-          </a:prstGeom>
-          <a:noFill/>
-        </p:spPr>
-        <p:txBody>
-          <a:bodyPr wrap="square" anchor="ctr">
-            <a:spAutoFit/>
-          </a:bodyPr>
-          <a:lstStyle/>
-          <a:p>
-            <a:pPr algn="l"/>
-            <a:r>
-              <a:rPr sz="1300" b="0">
-                <a:solidFill>
-                  <a:srgbClr val="E5ECF5"/>
-                </a:solidFill>
-                <a:latin typeface="Droid Sans Fallback"/>
-              </a:rPr>
-              <a:t>tiling + 计算流图
-两份输入写进合同</a:t>
-            </a:r>
-          </a:p>
-        </p:txBody>
-      </p:sp>
-      <p:sp>
-        <p:nvSpPr>
-          <p:cNvPr id="12" name="Rounded Rectangle 11"/>
+              <a:rPr sz="2200" b="1">
+                <a:solidFill>
+                  <a:srgbClr val="8294AE"/>
+                </a:solidFill>
+                <a:latin typeface="Droid Sans Fallback"/>
+              </a:rPr>
+              <a:t>→</a:t>
+            </a:r>
+          </a:p>
+        </p:txBody>
+      </p:sp>
+      <p:sp>
+        <p:nvSpPr>
+          <p:cNvPr id="11" name="Rounded Rectangle 10"/>
           <p:cNvSpPr/>
           <p:nvPr/>
         </p:nvSpPr>
         <p:spPr>
           <a:xfrm>
-            <a:off x="3429000" y="2011680"/>
-            <a:ext cx="2697480" cy="2331720"/>
+            <a:off x="3520439" y="1280160"/>
+            <a:ext cx="2606040" cy="2148840"/>
           </a:xfrm>
           <a:prstGeom prst="roundRect">
             <a:avLst/>
@@ -12393,14 +11698,14 @@
       </p:sp>
       <p:sp>
         <p:nvSpPr>
-          <p:cNvPr id="13" name="Rounded Rectangle 12"/>
+          <p:cNvPr id="12" name="Rounded Rectangle 11"/>
           <p:cNvSpPr/>
           <p:nvPr/>
         </p:nvSpPr>
         <p:spPr>
           <a:xfrm>
-            <a:off x="3593592" y="2176272"/>
-            <a:ext cx="502920" cy="310896"/>
+            <a:off x="4297679" y="1463040"/>
+            <a:ext cx="1051560" cy="310896"/>
           </a:xfrm>
           <a:prstGeom prst="roundRect">
             <a:avLst/>
@@ -12438,14 +11743,49 @@
       </p:sp>
       <p:sp>
         <p:nvSpPr>
+          <p:cNvPr id="13" name="TextBox 12"/>
+          <p:cNvSpPr txBox="1"/>
+          <p:nvPr/>
+        </p:nvSpPr>
+        <p:spPr>
+          <a:xfrm>
+            <a:off x="4297679" y="1463040"/>
+            <a:ext cx="1051560" cy="310896"/>
+          </a:xfrm>
+          <a:prstGeom prst="rect">
+            <a:avLst/>
+          </a:prstGeom>
+          <a:noFill/>
+        </p:spPr>
+        <p:txBody>
+          <a:bodyPr wrap="square" anchor="ctr">
+            <a:spAutoFit/>
+          </a:bodyPr>
+          <a:lstStyle/>
+          <a:p>
+            <a:pPr algn="ctr"/>
+            <a:r>
+              <a:rPr sz="1600" b="1">
+                <a:solidFill>
+                  <a:srgbClr val="F8FAFD"/>
+                </a:solidFill>
+                <a:latin typeface="Droid Sans Fallback"/>
+              </a:rPr>
+              <a:t>算</a:t>
+            </a:r>
+          </a:p>
+        </p:txBody>
+      </p:sp>
+      <p:sp>
+        <p:nvSpPr>
           <p:cNvPr id="14" name="TextBox 13"/>
           <p:cNvSpPr txBox="1"/>
           <p:nvPr/>
         </p:nvSpPr>
         <p:spPr>
           <a:xfrm>
-            <a:off x="3593592" y="2176272"/>
-            <a:ext cx="502920" cy="310896"/>
+            <a:off x="3657599" y="1965960"/>
+            <a:ext cx="2331720" cy="1234440"/>
           </a:xfrm>
           <a:prstGeom prst="rect">
             <a:avLst/>
@@ -12460,13 +11800,14 @@
           <a:p>
             <a:pPr algn="ctr"/>
             <a:r>
-              <a:rPr sz="1200" b="1">
-                <a:solidFill>
-                  <a:srgbClr val="F8FAFD"/>
-                </a:solidFill>
-                <a:latin typeface="Droid Sans Fallback"/>
-              </a:rPr>
-              <a:t>02</a:t>
+              <a:rPr sz="1500" b="0">
+                <a:solidFill>
+                  <a:srgbClr val="E5ECF5"/>
+                </a:solidFill>
+                <a:latin typeface="Droid Sans Fallback"/>
+              </a:rPr>
+              <a:t>按流图一块块算
+写完才算有货</a:t>
             </a:r>
           </a:p>
         </p:txBody>
@@ -12479,8 +11820,8 @@
         </p:nvSpPr>
         <p:spPr>
           <a:xfrm>
-            <a:off x="3611880" y="2697480"/>
-            <a:ext cx="2331720" cy="365760"/>
+            <a:off x="6035040" y="2057400"/>
+            <a:ext cx="411480" cy="411480"/>
           </a:xfrm>
           <a:prstGeom prst="rect">
             <a:avLst/>
@@ -12495,50 +11836,59 @@
           <a:p>
             <a:pPr algn="l"/>
             <a:r>
-              <a:rPr sz="1600" b="1">
-                <a:solidFill>
-                  <a:srgbClr val="F8FAFD"/>
-                </a:solidFill>
-                <a:latin typeface="Droid Sans Fallback"/>
-              </a:rPr>
-              <a:t>最小内核改动</a:t>
-            </a:r>
-          </a:p>
-        </p:txBody>
-      </p:sp>
-      <p:sp>
-        <p:nvSpPr>
-          <p:cNvPr id="16" name="TextBox 15"/>
-          <p:cNvSpPr txBox="1"/>
-          <p:nvPr/>
-        </p:nvSpPr>
-        <p:spPr>
-          <a:xfrm>
-            <a:off x="3611880" y="3154680"/>
-            <a:ext cx="2331720" cy="960120"/>
-          </a:xfrm>
-          <a:prstGeom prst="rect">
-            <a:avLst/>
-          </a:prstGeom>
-          <a:noFill/>
-        </p:spPr>
-        <p:txBody>
-          <a:bodyPr wrap="square" anchor="ctr">
-            <a:spAutoFit/>
-          </a:bodyPr>
-          <a:lstStyle/>
-          <a:p>
-            <a:pPr algn="l"/>
-            <a:r>
-              <a:rPr sz="1300" b="0">
-                <a:solidFill>
-                  <a:srgbClr val="E5ECF5"/>
-                </a:solidFill>
-                <a:latin typeface="Droid Sans Fallback"/>
-              </a:rPr>
-              <a:t>原求解器加一条
-「未就绪不准发」</a:t>
-            </a:r>
+              <a:rPr sz="2200" b="1">
+                <a:solidFill>
+                  <a:srgbClr val="8294AE"/>
+                </a:solidFill>
+                <a:latin typeface="Droid Sans Fallback"/>
+              </a:rPr>
+              <a:t>→</a:t>
+            </a:r>
+          </a:p>
+        </p:txBody>
+      </p:sp>
+      <p:sp>
+        <p:nvSpPr>
+          <p:cNvPr id="16" name="Rounded Rectangle 15"/>
+          <p:cNvSpPr/>
+          <p:nvPr/>
+        </p:nvSpPr>
+        <p:spPr>
+          <a:xfrm>
+            <a:off x="6400800" y="1280160"/>
+            <a:ext cx="2606040" cy="2148840"/>
+          </a:xfrm>
+          <a:prstGeom prst="roundRect">
+            <a:avLst/>
+          </a:prstGeom>
+          <a:solidFill>
+            <a:srgbClr val="1C2739"/>
+          </a:solidFill>
+          <a:ln>
+            <a:solidFill>
+              <a:srgbClr val="FF9933"/>
+            </a:solidFill>
+          </a:ln>
+        </p:spPr>
+        <p:style>
+          <a:lnRef idx="1">
+            <a:schemeClr val="accent1"/>
+          </a:lnRef>
+          <a:fillRef idx="3">
+            <a:schemeClr val="accent1"/>
+          </a:fillRef>
+          <a:effectRef idx="2">
+            <a:schemeClr val="accent1"/>
+          </a:effectRef>
+          <a:fontRef idx="minor">
+            <a:schemeClr val="lt1"/>
+          </a:fontRef>
+        </p:style>
+        <p:txBody>
+          <a:bodyPr rtlCol="0" anchor="ctr"/>
+          <a:lstStyle/>
+          <a:p>
+            <a:pPr algn="ctr"/>
           </a:p>
         </p:txBody>
       </p:sp>
@@ -12550,8 +11900,159 @@
         </p:nvSpPr>
         <p:spPr>
           <a:xfrm>
-            <a:off x="6309359" y="2011680"/>
-            <a:ext cx="2697480" cy="2331720"/>
+            <a:off x="7178040" y="1463040"/>
+            <a:ext cx="1051560" cy="310896"/>
+          </a:xfrm>
+          <a:prstGeom prst="roundRect">
+            <a:avLst/>
+          </a:prstGeom>
+          <a:solidFill>
+            <a:srgbClr val="FF9933"/>
+          </a:solidFill>
+          <a:ln>
+            <a:solidFill>
+              <a:srgbClr val="FF9933"/>
+            </a:solidFill>
+          </a:ln>
+        </p:spPr>
+        <p:style>
+          <a:lnRef idx="1">
+            <a:schemeClr val="accent1"/>
+          </a:lnRef>
+          <a:fillRef idx="3">
+            <a:schemeClr val="accent1"/>
+          </a:fillRef>
+          <a:effectRef idx="2">
+            <a:schemeClr val="accent1"/>
+          </a:effectRef>
+          <a:fontRef idx="minor">
+            <a:schemeClr val="lt1"/>
+          </a:fontRef>
+        </p:style>
+        <p:txBody>
+          <a:bodyPr rtlCol="0" anchor="ctr"/>
+          <a:lstStyle/>
+          <a:p>
+            <a:pPr algn="ctr"/>
+          </a:p>
+        </p:txBody>
+      </p:sp>
+      <p:sp>
+        <p:nvSpPr>
+          <p:cNvPr id="18" name="TextBox 17"/>
+          <p:cNvSpPr txBox="1"/>
+          <p:nvPr/>
+        </p:nvSpPr>
+        <p:spPr>
+          <a:xfrm>
+            <a:off x="7178040" y="1463040"/>
+            <a:ext cx="1051560" cy="310896"/>
+          </a:xfrm>
+          <a:prstGeom prst="rect">
+            <a:avLst/>
+          </a:prstGeom>
+          <a:noFill/>
+        </p:spPr>
+        <p:txBody>
+          <a:bodyPr wrap="square" anchor="ctr">
+            <a:spAutoFit/>
+          </a:bodyPr>
+          <a:lstStyle/>
+          <a:p>
+            <a:pPr algn="ctr"/>
+            <a:r>
+              <a:rPr sz="1600" b="1">
+                <a:solidFill>
+                  <a:srgbClr val="F8FAFD"/>
+                </a:solidFill>
+                <a:latin typeface="Droid Sans Fallback"/>
+              </a:rPr>
+              <a:t>叠</a:t>
+            </a:r>
+          </a:p>
+        </p:txBody>
+      </p:sp>
+      <p:sp>
+        <p:nvSpPr>
+          <p:cNvPr id="19" name="TextBox 18"/>
+          <p:cNvSpPr txBox="1"/>
+          <p:nvPr/>
+        </p:nvSpPr>
+        <p:spPr>
+          <a:xfrm>
+            <a:off x="6537960" y="1965960"/>
+            <a:ext cx="2331720" cy="1234440"/>
+          </a:xfrm>
+          <a:prstGeom prst="rect">
+            <a:avLst/>
+          </a:prstGeom>
+          <a:noFill/>
+        </p:spPr>
+        <p:txBody>
+          <a:bodyPr wrap="square" anchor="ctr">
+            <a:spAutoFit/>
+          </a:bodyPr>
+          <a:lstStyle/>
+          <a:p>
+            <a:pPr algn="ctr"/>
+            <a:r>
+              <a:rPr sz="1500" b="0">
+                <a:solidFill>
+                  <a:srgbClr val="E5ECF5"/>
+                </a:solidFill>
+                <a:latin typeface="Droid Sans Fallback"/>
+              </a:rPr>
+              <a:t>写完事件一到
+立刻 post 这一包</a:t>
+            </a:r>
+          </a:p>
+        </p:txBody>
+      </p:sp>
+      <p:sp>
+        <p:nvSpPr>
+          <p:cNvPr id="20" name="TextBox 19"/>
+          <p:cNvSpPr txBox="1"/>
+          <p:nvPr/>
+        </p:nvSpPr>
+        <p:spPr>
+          <a:xfrm>
+            <a:off x="8915400" y="2057400"/>
+            <a:ext cx="411480" cy="411480"/>
+          </a:xfrm>
+          <a:prstGeom prst="rect">
+            <a:avLst/>
+          </a:prstGeom>
+          <a:noFill/>
+        </p:spPr>
+        <p:txBody>
+          <a:bodyPr wrap="square" anchor="ctr">
+            <a:spAutoFit/>
+          </a:bodyPr>
+          <a:lstStyle/>
+          <a:p>
+            <a:pPr algn="l"/>
+            <a:r>
+              <a:rPr sz="2200" b="1">
+                <a:solidFill>
+                  <a:srgbClr val="8294AE"/>
+                </a:solidFill>
+                <a:latin typeface="Droid Sans Fallback"/>
+              </a:rPr>
+              <a:t>→</a:t>
+            </a:r>
+          </a:p>
+        </p:txBody>
+      </p:sp>
+      <p:sp>
+        <p:nvSpPr>
+          <p:cNvPr id="21" name="Rounded Rectangle 20"/>
+          <p:cNvSpPr/>
+          <p:nvPr/>
+        </p:nvSpPr>
+        <p:spPr>
+          <a:xfrm>
+            <a:off x="9281159" y="1280160"/>
+            <a:ext cx="2606040" cy="2148840"/>
           </a:xfrm>
           <a:prstGeom prst="roundRect">
             <a:avLst/>
@@ -12589,14 +12090,14 @@
       </p:sp>
       <p:sp>
         <p:nvSpPr>
-          <p:cNvPr id="18" name="Rounded Rectangle 17"/>
+          <p:cNvPr id="22" name="Rounded Rectangle 21"/>
           <p:cNvSpPr/>
           <p:nvPr/>
         </p:nvSpPr>
         <p:spPr>
           <a:xfrm>
-            <a:off x="6473951" y="2176272"/>
-            <a:ext cx="502920" cy="310896"/>
+            <a:off x="10058399" y="1463040"/>
+            <a:ext cx="1051560" cy="310896"/>
           </a:xfrm>
           <a:prstGeom prst="roundRect">
             <a:avLst/>
@@ -12634,14 +12135,14 @@
       </p:sp>
       <p:sp>
         <p:nvSpPr>
-          <p:cNvPr id="19" name="TextBox 18"/>
-          <p:cNvSpPr txBox="1"/>
-          <p:nvPr/>
-        </p:nvSpPr>
-        <p:spPr>
-          <a:xfrm>
-            <a:off x="6473951" y="2176272"/>
-            <a:ext cx="502920" cy="310896"/>
+          <p:cNvPr id="23" name="TextBox 22"/>
+          <p:cNvSpPr txBox="1"/>
+          <p:nvPr/>
+        </p:nvSpPr>
+        <p:spPr>
+          <a:xfrm>
+            <a:off x="10058399" y="1463040"/>
+            <a:ext cx="1051560" cy="310896"/>
           </a:xfrm>
           <a:prstGeom prst="rect">
             <a:avLst/>
@@ -12656,27 +12157,27 @@
           <a:p>
             <a:pPr algn="ctr"/>
             <a:r>
-              <a:rPr sz="1200" b="1">
+              <a:rPr sz="1600" b="1">
                 <a:solidFill>
                   <a:srgbClr val="F8FAFD"/>
                 </a:solidFill>
                 <a:latin typeface="Droid Sans Fallback"/>
               </a:rPr>
-              <a:t>03</a:t>
-            </a:r>
-          </a:p>
-        </p:txBody>
-      </p:sp>
-      <p:sp>
-        <p:nvSpPr>
-          <p:cNvPr id="20" name="TextBox 19"/>
-          <p:cNvSpPr txBox="1"/>
-          <p:nvPr/>
-        </p:nvSpPr>
-        <p:spPr>
-          <a:xfrm>
-            <a:off x="6492240" y="2697480"/>
-            <a:ext cx="2331720" cy="365760"/>
+              <a:t>齐</a:t>
+            </a:r>
+          </a:p>
+        </p:txBody>
+      </p:sp>
+      <p:sp>
+        <p:nvSpPr>
+          <p:cNvPr id="24" name="TextBox 23"/>
+          <p:cNvSpPr txBox="1"/>
+          <p:nvPr/>
+        </p:nvSpPr>
+        <p:spPr>
+          <a:xfrm>
+            <a:off x="9418319" y="1965960"/>
+            <a:ext cx="2331720" cy="1234440"/>
           </a:xfrm>
           <a:prstGeom prst="rect">
             <a:avLst/>
@@ -12689,261 +12190,101 @@
           </a:bodyPr>
           <a:lstStyle/>
           <a:p>
-            <a:pPr algn="l"/>
-            <a:r>
-              <a:rPr sz="1600" b="1">
-                <a:solidFill>
-                  <a:srgbClr val="F8FAFD"/>
-                </a:solidFill>
-                <a:latin typeface="Droid Sans Fallback"/>
-              </a:rPr>
-              <a:t>先冻通信算法</a:t>
-            </a:r>
-          </a:p>
-        </p:txBody>
-      </p:sp>
-      <p:sp>
-        <p:nvSpPr>
-          <p:cNvPr id="21" name="TextBox 20"/>
-          <p:cNvSpPr txBox="1"/>
-          <p:nvPr/>
-        </p:nvSpPr>
-        <p:spPr>
-          <a:xfrm>
-            <a:off x="6492240" y="3154680"/>
-            <a:ext cx="2331720" cy="960120"/>
-          </a:xfrm>
-          <a:prstGeom prst="rect">
-            <a:avLst/>
-          </a:prstGeom>
-          <a:noFill/>
-        </p:spPr>
-        <p:txBody>
-          <a:bodyPr wrap="square" anchor="ctr">
-            <a:spAutoFit/>
-          </a:bodyPr>
-          <a:lstStyle/>
-          <a:p>
-            <a:pPr algn="l"/>
-            <a:r>
-              <a:rPr sz="1300" b="0">
+            <a:pPr algn="ctr"/>
+            <a:r>
+              <a:rPr sz="1500" b="0">
                 <a:solidFill>
                   <a:srgbClr val="E5ECF5"/>
                 </a:solidFill>
                 <a:latin typeface="Droid Sans Fallback"/>
               </a:rPr>
-              <a:t>Ring/HD 给定
-只排重叠时刻</a:t>
-            </a:r>
-          </a:p>
-        </p:txBody>
-      </p:sp>
-      <p:sp>
-        <p:nvSpPr>
-          <p:cNvPr id="22" name="Rounded Rectangle 21"/>
+              <a:t>所有包加总完成
+每张卡都有完整 Y</a:t>
+            </a:r>
+          </a:p>
+        </p:txBody>
+      </p:sp>
+      <p:sp>
+        <p:nvSpPr>
+          <p:cNvPr id="25" name="TextBox 24"/>
+          <p:cNvSpPr txBox="1"/>
+          <p:nvPr/>
+        </p:nvSpPr>
+        <p:spPr>
+          <a:xfrm>
+            <a:off x="640080" y="3703320"/>
+            <a:ext cx="10972800" cy="1325880"/>
+          </a:xfrm>
+          <a:prstGeom prst="rect">
+            <a:avLst/>
+          </a:prstGeom>
+          <a:noFill/>
+        </p:spPr>
+        <p:txBody>
+          <a:bodyPr wrap="square">
+            <a:spAutoFit/>
+          </a:bodyPr>
+          <a:lstStyle/>
+          <a:p>
+            <a:pPr>
+              <a:spcAft>
+                <a:spcPts val="800"/>
+              </a:spcAft>
+              <a:defRPr sz="1600">
+                <a:solidFill>
+                  <a:srgbClr val="E5ECF5"/>
+                </a:solidFill>
+                <a:latin typeface="Droid Sans Fallback"/>
+              </a:defRPr>
+            </a:pPr>
+            <a:r>
+              <a:t>•  「切」和「算」的规则来自计算编译器，开会前就定死</a:t>
+            </a:r>
+          </a:p>
+          <a:p>
+            <a:pPr>
+              <a:spcAft>
+                <a:spcPts val="800"/>
+              </a:spcAft>
+              <a:defRPr sz="1600">
+                <a:solidFill>
+                  <a:srgbClr val="E5ECF5"/>
+                </a:solidFill>
+                <a:latin typeface="Droid Sans Fallback"/>
+              </a:defRPr>
+            </a:pPr>
+            <a:r>
+              <a:t>•  「叠」是挂事件：写完才发。不要下降成启动时刻表</a:t>
+            </a:r>
+          </a:p>
+          <a:p>
+            <a:pPr>
+              <a:spcAft>
+                <a:spcPts val="800"/>
+              </a:spcAft>
+              <a:defRPr sz="1600">
+                <a:solidFill>
+                  <a:srgbClr val="E5ECF5"/>
+                </a:solidFill>
+                <a:latin typeface="Droid Sans Fallback"/>
+              </a:defRPr>
+            </a:pPr>
+            <a:r>
+              <a:t>•  任何试图在「叠」里改「切」的方案，都退回上一页的不建议</a:t>
+            </a:r>
+          </a:p>
+        </p:txBody>
+      </p:sp>
+      <p:sp>
+        <p:nvSpPr>
+          <p:cNvPr id="26" name="Rounded Rectangle 25"/>
           <p:cNvSpPr/>
           <p:nvPr/>
         </p:nvSpPr>
         <p:spPr>
           <a:xfrm>
-            <a:off x="9189719" y="2011680"/>
-            <a:ext cx="2697480" cy="2331720"/>
-          </a:xfrm>
-          <a:prstGeom prst="roundRect">
-            <a:avLst/>
-          </a:prstGeom>
-          <a:solidFill>
-            <a:srgbClr val="1C2739"/>
-          </a:solidFill>
-          <a:ln>
-            <a:solidFill>
-              <a:srgbClr val="FF9933"/>
-            </a:solidFill>
-          </a:ln>
-        </p:spPr>
-        <p:style>
-          <a:lnRef idx="1">
-            <a:schemeClr val="accent1"/>
-          </a:lnRef>
-          <a:fillRef idx="3">
-            <a:schemeClr val="accent1"/>
-          </a:fillRef>
-          <a:effectRef idx="2">
-            <a:schemeClr val="accent1"/>
-          </a:effectRef>
-          <a:fontRef idx="minor">
-            <a:schemeClr val="lt1"/>
-          </a:fontRef>
-        </p:style>
-        <p:txBody>
-          <a:bodyPr rtlCol="0" anchor="ctr"/>
-          <a:lstStyle/>
-          <a:p>
-            <a:pPr algn="ctr"/>
-          </a:p>
-        </p:txBody>
-      </p:sp>
-      <p:sp>
-        <p:nvSpPr>
-          <p:cNvPr id="23" name="Rounded Rectangle 22"/>
-          <p:cNvSpPr/>
-          <p:nvPr/>
-        </p:nvSpPr>
-        <p:spPr>
-          <a:xfrm>
-            <a:off x="9354311" y="2176272"/>
-            <a:ext cx="502920" cy="310896"/>
-          </a:xfrm>
-          <a:prstGeom prst="roundRect">
-            <a:avLst/>
-          </a:prstGeom>
-          <a:solidFill>
-            <a:srgbClr val="FF9933"/>
-          </a:solidFill>
-          <a:ln>
-            <a:solidFill>
-              <a:srgbClr val="FF9933"/>
-            </a:solidFill>
-          </a:ln>
-        </p:spPr>
-        <p:style>
-          <a:lnRef idx="1">
-            <a:schemeClr val="accent1"/>
-          </a:lnRef>
-          <a:fillRef idx="3">
-            <a:schemeClr val="accent1"/>
-          </a:fillRef>
-          <a:effectRef idx="2">
-            <a:schemeClr val="accent1"/>
-          </a:effectRef>
-          <a:fontRef idx="minor">
-            <a:schemeClr val="lt1"/>
-          </a:fontRef>
-        </p:style>
-        <p:txBody>
-          <a:bodyPr rtlCol="0" anchor="ctr"/>
-          <a:lstStyle/>
-          <a:p>
-            <a:pPr algn="ctr"/>
-          </a:p>
-        </p:txBody>
-      </p:sp>
-      <p:sp>
-        <p:nvSpPr>
-          <p:cNvPr id="24" name="TextBox 23"/>
-          <p:cNvSpPr txBox="1"/>
-          <p:nvPr/>
-        </p:nvSpPr>
-        <p:spPr>
-          <a:xfrm>
-            <a:off x="9354311" y="2176272"/>
-            <a:ext cx="502920" cy="310896"/>
-          </a:xfrm>
-          <a:prstGeom prst="rect">
-            <a:avLst/>
-          </a:prstGeom>
-          <a:noFill/>
-        </p:spPr>
-        <p:txBody>
-          <a:bodyPr wrap="square" anchor="ctr">
-            <a:spAutoFit/>
-          </a:bodyPr>
-          <a:lstStyle/>
-          <a:p>
-            <a:pPr algn="ctr"/>
-            <a:r>
-              <a:rPr sz="1200" b="1">
-                <a:solidFill>
-                  <a:srgbClr val="F8FAFD"/>
-                </a:solidFill>
-                <a:latin typeface="Droid Sans Fallback"/>
-              </a:rPr>
-              <a:t>04</a:t>
-            </a:r>
-          </a:p>
-        </p:txBody>
-      </p:sp>
-      <p:sp>
-        <p:nvSpPr>
-          <p:cNvPr id="25" name="TextBox 24"/>
-          <p:cNvSpPr txBox="1"/>
-          <p:nvPr/>
-        </p:nvSpPr>
-        <p:spPr>
-          <a:xfrm>
-            <a:off x="9372599" y="2697480"/>
-            <a:ext cx="2331720" cy="365760"/>
-          </a:xfrm>
-          <a:prstGeom prst="rect">
-            <a:avLst/>
-          </a:prstGeom>
-          <a:noFill/>
-        </p:spPr>
-        <p:txBody>
-          <a:bodyPr wrap="square" anchor="ctr">
-            <a:spAutoFit/>
-          </a:bodyPr>
-          <a:lstStyle/>
-          <a:p>
-            <a:pPr algn="l"/>
-            <a:r>
-              <a:rPr sz="1600" b="1">
-                <a:solidFill>
-                  <a:srgbClr val="F8FAFD"/>
-                </a:solidFill>
-                <a:latin typeface="Droid Sans Fallback"/>
-              </a:rPr>
-              <a:t>用总时间验收</a:t>
-            </a:r>
-          </a:p>
-        </p:txBody>
-      </p:sp>
-      <p:sp>
-        <p:nvSpPr>
-          <p:cNvPr id="26" name="TextBox 25"/>
-          <p:cNvSpPr txBox="1"/>
-          <p:nvPr/>
-        </p:nvSpPr>
-        <p:spPr>
-          <a:xfrm>
-            <a:off x="9372599" y="3154680"/>
-            <a:ext cx="2331720" cy="960120"/>
-          </a:xfrm>
-          <a:prstGeom prst="rect">
-            <a:avLst/>
-          </a:prstGeom>
-          <a:noFill/>
-        </p:spPr>
-        <p:txBody>
-          <a:bodyPr wrap="square" anchor="ctr">
-            <a:spAutoFit/>
-          </a:bodyPr>
-          <a:lstStyle/>
-          <a:p>
-            <a:pPr algn="l"/>
-            <a:r>
-              <a:rPr sz="1300" b="0">
-                <a:solidFill>
-                  <a:srgbClr val="E5ECF5"/>
-                </a:solidFill>
-                <a:latin typeface="Droid Sans Fallback"/>
-              </a:rPr>
-              <a:t>对比两阶段基线
-数值必须一致</a:t>
-            </a:r>
-          </a:p>
-        </p:txBody>
-      </p:sp>
-      <p:sp>
-        <p:nvSpPr>
-          <p:cNvPr id="27" name="Rounded Rectangle 26"/>
-          <p:cNvSpPr/>
-          <p:nvPr/>
-        </p:nvSpPr>
-        <p:spPr>
-          <a:xfrm>
-            <a:off x="548640" y="4617720"/>
-            <a:ext cx="11109960" cy="1280160"/>
+            <a:off x="548640" y="5120640"/>
+            <a:ext cx="11109960" cy="1188720"/>
           </a:xfrm>
           <a:prstGeom prst="roundRect">
             <a:avLst/>
@@ -12981,14 +12322,14 @@
       </p:sp>
       <p:sp>
         <p:nvSpPr>
-          <p:cNvPr id="28" name="TextBox 27"/>
-          <p:cNvSpPr txBox="1"/>
-          <p:nvPr/>
-        </p:nvSpPr>
-        <p:spPr>
-          <a:xfrm>
-            <a:off x="694944" y="4672583"/>
-            <a:ext cx="10853928" cy="1170431"/>
+          <p:cNvPr id="27" name="TextBox 26"/>
+          <p:cNvSpPr txBox="1"/>
+          <p:nvPr/>
+        </p:nvSpPr>
+        <p:spPr>
+          <a:xfrm>
+            <a:off x="694944" y="5175503"/>
+            <a:ext cx="10853928" cy="1078992"/>
           </a:xfrm>
           <a:prstGeom prst="rect">
             <a:avLst/>
@@ -13009,7 +12350,7 @@
                 </a:solidFill>
                 <a:latin typeface="Droid Sans Fallback"/>
               </a:rPr>
-              <a:t>背景  详细输入合同见 docs/fusion_milp_input.md。本页是给决策用的边界：谁负责切块，谁负责发数据，互不越权。</a:t>
+              <a:t>背景  验收很好懂：融合后的总时间，应明显短于「先算完再 AllReduce」；且数值与两阶段结果一致（加法顺序若要求确定，邻居关系必须冻住）。</a:t>
             </a:r>
           </a:p>
         </p:txBody>
@@ -13070,7 +12411,7 @@
                 </a:solidFill>
                 <a:latin typeface="Droid Sans Fallback"/>
               </a:rPr>
-              <a:t>备忘  /  可留在材料最后</a:t>
+              <a:t>边界</a:t>
             </a:r>
           </a:p>
         </p:txBody>
@@ -13105,7 +12446,7 @@
                 </a:solidFill>
                 <a:latin typeface="Droid Sans Fallback"/>
               </a:rPr>
-              <a:t>附录：一分钟对照表</a:t>
+              <a:t>明确不做，避免范围膨胀</a:t>
             </a:r>
           </a:p>
         </p:txBody>
@@ -13192,14 +12533,765 @@
       </p:sp>
       <p:sp>
         <p:nvSpPr>
+          <p:cNvPr id="6" name="Rounded Rectangle 5"/>
+          <p:cNvSpPr/>
+          <p:nvPr/>
+        </p:nvSpPr>
+        <p:spPr>
+          <a:xfrm>
+            <a:off x="594360" y="1170432"/>
+            <a:ext cx="3063240" cy="310896"/>
+          </a:xfrm>
+          <a:prstGeom prst="roundRect">
+            <a:avLst/>
+          </a:prstGeom>
+          <a:solidFill>
+            <a:srgbClr val="E14848"/>
+          </a:solidFill>
+          <a:ln>
+            <a:solidFill>
+              <a:srgbClr val="E14848"/>
+            </a:solidFill>
+          </a:ln>
+        </p:spPr>
+        <p:style>
+          <a:lnRef idx="1">
+            <a:schemeClr val="accent1"/>
+          </a:lnRef>
+          <a:fillRef idx="3">
+            <a:schemeClr val="accent1"/>
+          </a:fillRef>
+          <a:effectRef idx="2">
+            <a:schemeClr val="accent1"/>
+          </a:effectRef>
+          <a:fontRef idx="minor">
+            <a:schemeClr val="lt1"/>
+          </a:fontRef>
+        </p:style>
+        <p:txBody>
+          <a:bodyPr rtlCol="0" anchor="ctr"/>
+          <a:lstStyle/>
+          <a:p>
+            <a:pPr algn="ctr"/>
+          </a:p>
+        </p:txBody>
+      </p:sp>
+      <p:sp>
+        <p:nvSpPr>
+          <p:cNvPr id="7" name="TextBox 6"/>
+          <p:cNvSpPr txBox="1"/>
+          <p:nvPr/>
+        </p:nvSpPr>
+        <p:spPr>
+          <a:xfrm>
+            <a:off x="594360" y="1170432"/>
+            <a:ext cx="3063240" cy="310896"/>
+          </a:xfrm>
+          <a:prstGeom prst="rect">
+            <a:avLst/>
+          </a:prstGeom>
+          <a:noFill/>
+        </p:spPr>
+        <p:txBody>
+          <a:bodyPr wrap="square" anchor="ctr">
+            <a:spAutoFit/>
+          </a:bodyPr>
+          <a:lstStyle/>
+          <a:p>
+            <a:pPr algn="ctr"/>
+            <a:r>
+              <a:rPr sz="1300" b="1">
+                <a:solidFill>
+                  <a:srgbClr val="F8FAFD"/>
+                </a:solidFill>
+                <a:latin typeface="Droid Sans Fallback"/>
+              </a:rPr>
+              <a:t>不搜切块长宽</a:t>
+            </a:r>
+          </a:p>
+        </p:txBody>
+      </p:sp>
+      <p:sp>
+        <p:nvSpPr>
+          <p:cNvPr id="8" name="TextBox 7"/>
+          <p:cNvSpPr txBox="1"/>
+          <p:nvPr/>
+        </p:nvSpPr>
+        <p:spPr>
+          <a:xfrm>
+            <a:off x="3840480" y="1170432"/>
+            <a:ext cx="7680960" cy="365760"/>
+          </a:xfrm>
+          <a:prstGeom prst="rect">
+            <a:avLst/>
+          </a:prstGeom>
+          <a:noFill/>
+        </p:spPr>
+        <p:txBody>
+          <a:bodyPr wrap="square" anchor="ctr">
+            <a:spAutoFit/>
+          </a:bodyPr>
+          <a:lstStyle/>
+          <a:p>
+            <a:pPr algn="l"/>
+            <a:r>
+              <a:rPr sz="1600" b="0">
+                <a:solidFill>
+                  <a:srgbClr val="E5ECF5"/>
+                </a:solidFill>
+                <a:latin typeface="Droid Sans Fallback"/>
+              </a:rPr>
+              <a:t>交给 Triton / AscendC / 手工 kernel</a:t>
+            </a:r>
+          </a:p>
+        </p:txBody>
+      </p:sp>
+      <p:sp>
+        <p:nvSpPr>
+          <p:cNvPr id="9" name="Rounded Rectangle 8"/>
+          <p:cNvSpPr/>
+          <p:nvPr/>
+        </p:nvSpPr>
+        <p:spPr>
+          <a:xfrm>
+            <a:off x="594360" y="1947672"/>
+            <a:ext cx="3063240" cy="310896"/>
+          </a:xfrm>
+          <a:prstGeom prst="roundRect">
+            <a:avLst/>
+          </a:prstGeom>
+          <a:solidFill>
+            <a:srgbClr val="E14848"/>
+          </a:solidFill>
+          <a:ln>
+            <a:solidFill>
+              <a:srgbClr val="E14848"/>
+            </a:solidFill>
+          </a:ln>
+        </p:spPr>
+        <p:style>
+          <a:lnRef idx="1">
+            <a:schemeClr val="accent1"/>
+          </a:lnRef>
+          <a:fillRef idx="3">
+            <a:schemeClr val="accent1"/>
+          </a:fillRef>
+          <a:effectRef idx="2">
+            <a:schemeClr val="accent1"/>
+          </a:effectRef>
+          <a:fontRef idx="minor">
+            <a:schemeClr val="lt1"/>
+          </a:fontRef>
+        </p:style>
+        <p:txBody>
+          <a:bodyPr rtlCol="0" anchor="ctr"/>
+          <a:lstStyle/>
+          <a:p>
+            <a:pPr algn="ctr"/>
+          </a:p>
+        </p:txBody>
+      </p:sp>
+      <p:sp>
+        <p:nvSpPr>
+          <p:cNvPr id="10" name="TextBox 9"/>
+          <p:cNvSpPr txBox="1"/>
+          <p:nvPr/>
+        </p:nvSpPr>
+        <p:spPr>
+          <a:xfrm>
+            <a:off x="594360" y="1947672"/>
+            <a:ext cx="3063240" cy="310896"/>
+          </a:xfrm>
+          <a:prstGeom prst="rect">
+            <a:avLst/>
+          </a:prstGeom>
+          <a:noFill/>
+        </p:spPr>
+        <p:txBody>
+          <a:bodyPr wrap="square" anchor="ctr">
+            <a:spAutoFit/>
+          </a:bodyPr>
+          <a:lstStyle/>
+          <a:p>
+            <a:pPr algn="ctr"/>
+            <a:r>
+              <a:rPr sz="1300" b="1">
+                <a:solidFill>
+                  <a:srgbClr val="F8FAFD"/>
+                </a:solidFill>
+                <a:latin typeface="Droid Sans Fallback"/>
+              </a:rPr>
+              <a:t>不重排计算顺序</a:t>
+            </a:r>
+          </a:p>
+        </p:txBody>
+      </p:sp>
+      <p:sp>
+        <p:nvSpPr>
+          <p:cNvPr id="11" name="TextBox 10"/>
+          <p:cNvSpPr txBox="1"/>
+          <p:nvPr/>
+        </p:nvSpPr>
+        <p:spPr>
+          <a:xfrm>
+            <a:off x="3840480" y="1947672"/>
+            <a:ext cx="7680960" cy="365760"/>
+          </a:xfrm>
+          <a:prstGeom prst="rect">
+            <a:avLst/>
+          </a:prstGeom>
+          <a:noFill/>
+        </p:spPr>
+        <p:txBody>
+          <a:bodyPr wrap="square" anchor="ctr">
+            <a:spAutoFit/>
+          </a:bodyPr>
+          <a:lstStyle/>
+          <a:p>
+            <a:pPr algn="l"/>
+            <a:r>
+              <a:rPr sz="1600" b="0">
+                <a:solidFill>
+                  <a:srgbClr val="E5ECF5"/>
+                </a:solidFill>
+                <a:latin typeface="Droid Sans Fallback"/>
+              </a:rPr>
+              <a:t>改顺序就是改矩阵乘实现</a:t>
+            </a:r>
+          </a:p>
+        </p:txBody>
+      </p:sp>
+      <p:sp>
+        <p:nvSpPr>
+          <p:cNvPr id="12" name="Rounded Rectangle 11"/>
+          <p:cNvSpPr/>
+          <p:nvPr/>
+        </p:nvSpPr>
+        <p:spPr>
+          <a:xfrm>
+            <a:off x="594360" y="2724912"/>
+            <a:ext cx="3063240" cy="310896"/>
+          </a:xfrm>
+          <a:prstGeom prst="roundRect">
+            <a:avLst/>
+          </a:prstGeom>
+          <a:solidFill>
+            <a:srgbClr val="FF9933"/>
+          </a:solidFill>
+          <a:ln>
+            <a:solidFill>
+              <a:srgbClr val="FF9933"/>
+            </a:solidFill>
+          </a:ln>
+        </p:spPr>
+        <p:style>
+          <a:lnRef idx="1">
+            <a:schemeClr val="accent1"/>
+          </a:lnRef>
+          <a:fillRef idx="3">
+            <a:schemeClr val="accent1"/>
+          </a:fillRef>
+          <a:effectRef idx="2">
+            <a:schemeClr val="accent1"/>
+          </a:effectRef>
+          <a:fontRef idx="minor">
+            <a:schemeClr val="lt1"/>
+          </a:fontRef>
+        </p:style>
+        <p:txBody>
+          <a:bodyPr rtlCol="0" anchor="ctr"/>
+          <a:lstStyle/>
+          <a:p>
+            <a:pPr algn="ctr"/>
+          </a:p>
+        </p:txBody>
+      </p:sp>
+      <p:sp>
+        <p:nvSpPr>
+          <p:cNvPr id="13" name="TextBox 12"/>
+          <p:cNvSpPr txBox="1"/>
+          <p:nvPr/>
+        </p:nvSpPr>
+        <p:spPr>
+          <a:xfrm>
+            <a:off x="594360" y="2724912"/>
+            <a:ext cx="3063240" cy="310896"/>
+          </a:xfrm>
+          <a:prstGeom prst="rect">
+            <a:avLst/>
+          </a:prstGeom>
+          <a:noFill/>
+        </p:spPr>
+        <p:txBody>
+          <a:bodyPr wrap="square" anchor="ctr">
+            <a:spAutoFit/>
+          </a:bodyPr>
+          <a:lstStyle/>
+          <a:p>
+            <a:pPr algn="ctr"/>
+            <a:r>
+              <a:rPr sz="1300" b="1">
+                <a:solidFill>
+                  <a:srgbClr val="F8FAFD"/>
+                </a:solidFill>
+                <a:latin typeface="Droid Sans Fallback"/>
+              </a:rPr>
+              <a:t>不把激活挪过 AllReduce</a:t>
+            </a:r>
+          </a:p>
+        </p:txBody>
+      </p:sp>
+      <p:sp>
+        <p:nvSpPr>
+          <p:cNvPr id="14" name="TextBox 13"/>
+          <p:cNvSpPr txBox="1"/>
+          <p:nvPr/>
+        </p:nvSpPr>
+        <p:spPr>
+          <a:xfrm>
+            <a:off x="3840480" y="2724912"/>
+            <a:ext cx="7680960" cy="365760"/>
+          </a:xfrm>
+          <a:prstGeom prst="rect">
+            <a:avLst/>
+          </a:prstGeom>
+          <a:noFill/>
+        </p:spPr>
+        <p:txBody>
+          <a:bodyPr wrap="square" anchor="ctr">
+            <a:spAutoFit/>
+          </a:bodyPr>
+          <a:lstStyle/>
+          <a:p>
+            <a:pPr algn="l"/>
+            <a:r>
+              <a:rPr sz="1600" b="0">
+                <a:solidFill>
+                  <a:srgbClr val="E5ECF5"/>
+                </a:solidFill>
+                <a:latin typeface="Droid Sans Fallback"/>
+              </a:rPr>
+              <a:t>会改数值，必须事先钉死在前或在后</a:t>
+            </a:r>
+          </a:p>
+        </p:txBody>
+      </p:sp>
+      <p:sp>
+        <p:nvSpPr>
+          <p:cNvPr id="15" name="Rounded Rectangle 14"/>
+          <p:cNvSpPr/>
+          <p:nvPr/>
+        </p:nvSpPr>
+        <p:spPr>
+          <a:xfrm>
+            <a:off x="594360" y="3502152"/>
+            <a:ext cx="3063240" cy="310896"/>
+          </a:xfrm>
+          <a:prstGeom prst="roundRect">
+            <a:avLst/>
+          </a:prstGeom>
+          <a:solidFill>
+            <a:srgbClr val="FF9933"/>
+          </a:solidFill>
+          <a:ln>
+            <a:solidFill>
+              <a:srgbClr val="FF9933"/>
+            </a:solidFill>
+          </a:ln>
+        </p:spPr>
+        <p:style>
+          <a:lnRef idx="1">
+            <a:schemeClr val="accent1"/>
+          </a:lnRef>
+          <a:fillRef idx="3">
+            <a:schemeClr val="accent1"/>
+          </a:fillRef>
+          <a:effectRef idx="2">
+            <a:schemeClr val="accent1"/>
+          </a:effectRef>
+          <a:fontRef idx="minor">
+            <a:schemeClr val="lt1"/>
+          </a:fontRef>
+        </p:style>
+        <p:txBody>
+          <a:bodyPr rtlCol="0" anchor="ctr"/>
+          <a:lstStyle/>
+          <a:p>
+            <a:pPr algn="ctr"/>
+          </a:p>
+        </p:txBody>
+      </p:sp>
+      <p:sp>
+        <p:nvSpPr>
+          <p:cNvPr id="16" name="TextBox 15"/>
+          <p:cNvSpPr txBox="1"/>
+          <p:nvPr/>
+        </p:nvSpPr>
+        <p:spPr>
+          <a:xfrm>
+            <a:off x="594360" y="3502152"/>
+            <a:ext cx="3063240" cy="310896"/>
+          </a:xfrm>
+          <a:prstGeom prst="rect">
+            <a:avLst/>
+          </a:prstGeom>
+          <a:noFill/>
+        </p:spPr>
+        <p:txBody>
+          <a:bodyPr wrap="square" anchor="ctr">
+            <a:spAutoFit/>
+          </a:bodyPr>
+          <a:lstStyle/>
+          <a:p>
+            <a:pPr algn="ctr"/>
+            <a:r>
+              <a:rPr sz="1300" b="1">
+                <a:solidFill>
+                  <a:srgbClr val="F8FAFD"/>
+                </a:solidFill>
+                <a:latin typeface="Droid Sans Fallback"/>
+              </a:rPr>
+              <a:t>不把启动时刻写进内核</a:t>
+            </a:r>
+          </a:p>
+        </p:txBody>
+      </p:sp>
+      <p:sp>
+        <p:nvSpPr>
+          <p:cNvPr id="17" name="TextBox 16"/>
+          <p:cNvSpPr txBox="1"/>
+          <p:nvPr/>
+        </p:nvSpPr>
+        <p:spPr>
+          <a:xfrm>
+            <a:off x="3840480" y="3502152"/>
+            <a:ext cx="7680960" cy="365760"/>
+          </a:xfrm>
+          <a:prstGeom prst="rect">
+            <a:avLst/>
+          </a:prstGeom>
+          <a:noFill/>
+        </p:spPr>
+        <p:txBody>
+          <a:bodyPr wrap="square" anchor="ctr">
+            <a:spAutoFit/>
+          </a:bodyPr>
+          <a:lstStyle/>
+          <a:p>
+            <a:pPr algn="l"/>
+            <a:r>
+              <a:rPr sz="1600" b="0">
+                <a:solidFill>
+                  <a:srgbClr val="E5ECF5"/>
+                </a:solidFill>
+                <a:latin typeface="Droid Sans Fallback"/>
+              </a:rPr>
+              <a:t>运行时只认写完事件；估时不准是必然</a:t>
+            </a:r>
+          </a:p>
+        </p:txBody>
+      </p:sp>
+      <p:sp>
+        <p:nvSpPr>
+          <p:cNvPr id="18" name="Rounded Rectangle 17"/>
+          <p:cNvSpPr/>
+          <p:nvPr/>
+        </p:nvSpPr>
+        <p:spPr>
+          <a:xfrm>
+            <a:off x="594360" y="4279392"/>
+            <a:ext cx="3063240" cy="310896"/>
+          </a:xfrm>
+          <a:prstGeom prst="roundRect">
+            <a:avLst/>
+          </a:prstGeom>
+          <a:solidFill>
+            <a:srgbClr val="FF9933"/>
+          </a:solidFill>
+          <a:ln>
+            <a:solidFill>
+              <a:srgbClr val="FF9933"/>
+            </a:solidFill>
+          </a:ln>
+        </p:spPr>
+        <p:style>
+          <a:lnRef idx="1">
+            <a:schemeClr val="accent1"/>
+          </a:lnRef>
+          <a:fillRef idx="3">
+            <a:schemeClr val="accent1"/>
+          </a:fillRef>
+          <a:effectRef idx="2">
+            <a:schemeClr val="accent1"/>
+          </a:effectRef>
+          <a:fontRef idx="minor">
+            <a:schemeClr val="lt1"/>
+          </a:fontRef>
+        </p:style>
+        <p:txBody>
+          <a:bodyPr rtlCol="0" anchor="ctr"/>
+          <a:lstStyle/>
+          <a:p>
+            <a:pPr algn="ctr"/>
+          </a:p>
+        </p:txBody>
+      </p:sp>
+      <p:sp>
+        <p:nvSpPr>
+          <p:cNvPr id="19" name="TextBox 18"/>
+          <p:cNvSpPr txBox="1"/>
+          <p:nvPr/>
+        </p:nvSpPr>
+        <p:spPr>
+          <a:xfrm>
+            <a:off x="594360" y="4279392"/>
+            <a:ext cx="3063240" cy="310896"/>
+          </a:xfrm>
+          <a:prstGeom prst="rect">
+            <a:avLst/>
+          </a:prstGeom>
+          <a:noFill/>
+        </p:spPr>
+        <p:txBody>
+          <a:bodyPr wrap="square" anchor="ctr">
+            <a:spAutoFit/>
+          </a:bodyPr>
+          <a:lstStyle/>
+          <a:p>
+            <a:pPr algn="ctr"/>
+            <a:r>
+              <a:rPr sz="1300" b="1">
+                <a:solidFill>
+                  <a:srgbClr val="F8FAFD"/>
+                </a:solidFill>
+                <a:latin typeface="Droid Sans Fallback"/>
+              </a:rPr>
+              <a:t>不把「试几套切块」塞进同一个方程</a:t>
+            </a:r>
+          </a:p>
+        </p:txBody>
+      </p:sp>
+      <p:sp>
+        <p:nvSpPr>
+          <p:cNvPr id="20" name="TextBox 19"/>
+          <p:cNvSpPr txBox="1"/>
+          <p:nvPr/>
+        </p:nvSpPr>
+        <p:spPr>
+          <a:xfrm>
+            <a:off x="3840480" y="4279392"/>
+            <a:ext cx="7680960" cy="365760"/>
+          </a:xfrm>
+          <a:prstGeom prst="rect">
+            <a:avLst/>
+          </a:prstGeom>
+          <a:noFill/>
+        </p:spPr>
+        <p:txBody>
+          <a:bodyPr wrap="square" anchor="ctr">
+            <a:spAutoFit/>
+          </a:bodyPr>
+          <a:lstStyle/>
+          <a:p>
+            <a:pPr algn="l"/>
+            <a:r>
+              <a:rPr sz="1600" b="0">
+                <a:solidFill>
+                  <a:srgbClr val="E5ECF5"/>
+                </a:solidFill>
+                <a:latin typeface="Droid Sans Fallback"/>
+              </a:rPr>
+              <a:t>外层试 3～5 套，每套单独求一次通信</a:t>
+            </a:r>
+          </a:p>
+        </p:txBody>
+      </p:sp>
+    </p:spTree>
+  </p:cSld>
+  <p:clrMapOvr>
+    <a:masterClrMapping/>
+  </p:clrMapOvr>
+</p:sld>
+</file>
+
+<file path=ppt/slides/slide22.xml><?xml version="1.0" encoding="utf-8"?>
+<p:sld xmlns:a="http://schemas.openxmlformats.org/drawingml/2006/main" xmlns:p="http://schemas.openxmlformats.org/presentationml/2006/main" xmlns:r="http://schemas.openxmlformats.org/officeDocument/2006/relationships">
+  <p:cSld>
+    <p:bg>
+      <p:bgPr>
+        <a:solidFill>
+          <a:srgbClr val="0A1830"/>
+        </a:solidFill>
+        <a:effectLst/>
+      </p:bgPr>
+    </p:bg>
+    <p:spTree>
+      <p:nvGrpSpPr>
+        <p:cNvPr id="1" name=""/>
+        <p:cNvGrpSpPr/>
+        <p:nvPr/>
+      </p:nvGrpSpPr>
+      <p:grpSpPr/>
+      <p:sp>
+        <p:nvSpPr>
+          <p:cNvPr id="2" name="TextBox 1"/>
+          <p:cNvSpPr txBox="1"/>
+          <p:nvPr/>
+        </p:nvSpPr>
+        <p:spPr>
+          <a:xfrm>
+            <a:off x="548640" y="219456"/>
+            <a:ext cx="9144000" cy="219456"/>
+          </a:xfrm>
+          <a:prstGeom prst="rect">
+            <a:avLst/>
+          </a:prstGeom>
+          <a:noFill/>
+        </p:spPr>
+        <p:txBody>
+          <a:bodyPr wrap="square" anchor="ctr">
+            <a:spAutoFit/>
+          </a:bodyPr>
+          <a:lstStyle/>
+          <a:p>
+            <a:pPr algn="l"/>
+            <a:r>
+              <a:rPr sz="1000" b="1">
+                <a:solidFill>
+                  <a:srgbClr val="25C8DD"/>
+                </a:solidFill>
+                <a:latin typeface="Droid Sans Fallback"/>
+              </a:rPr>
+              <a:t>决策</a:t>
+            </a:r>
+          </a:p>
+        </p:txBody>
+      </p:sp>
+      <p:sp>
+        <p:nvSpPr>
+          <p:cNvPr id="3" name="TextBox 2"/>
+          <p:cNvSpPr txBox="1"/>
+          <p:nvPr/>
+        </p:nvSpPr>
+        <p:spPr>
+          <a:xfrm>
+            <a:off x="548640" y="438912"/>
+            <a:ext cx="11064240" cy="457200"/>
+          </a:xfrm>
+          <a:prstGeom prst="rect">
+            <a:avLst/>
+          </a:prstGeom>
+          <a:noFill/>
+        </p:spPr>
+        <p:txBody>
+          <a:bodyPr wrap="square" anchor="ctr">
+            <a:spAutoFit/>
+          </a:bodyPr>
+          <a:lstStyle/>
+          <a:p>
+            <a:pPr algn="l"/>
+            <a:r>
+              <a:rPr sz="2400" b="1">
+                <a:solidFill>
+                  <a:srgbClr val="F8FAFD"/>
+                </a:solidFill>
+                <a:latin typeface="Droid Sans Fallback"/>
+              </a:rPr>
+              <a:t>建议与下一步</a:t>
+            </a:r>
+          </a:p>
+        </p:txBody>
+      </p:sp>
+      <p:sp>
+        <p:nvSpPr>
+          <p:cNvPr id="4" name="Rectangle 3"/>
+          <p:cNvSpPr/>
+          <p:nvPr/>
+        </p:nvSpPr>
+        <p:spPr>
+          <a:xfrm>
+            <a:off x="548640" y="950976"/>
+            <a:ext cx="914400" cy="41148"/>
+          </a:xfrm>
+          <a:prstGeom prst="rect">
+            <a:avLst/>
+          </a:prstGeom>
+          <a:solidFill>
+            <a:srgbClr val="266CFF"/>
+          </a:solidFill>
+          <a:ln>
+            <a:solidFill>
+              <a:srgbClr val="266CFF"/>
+            </a:solidFill>
+          </a:ln>
+        </p:spPr>
+        <p:style>
+          <a:lnRef idx="1">
+            <a:schemeClr val="accent1"/>
+          </a:lnRef>
+          <a:fillRef idx="3">
+            <a:schemeClr val="accent1"/>
+          </a:fillRef>
+          <a:effectRef idx="2">
+            <a:schemeClr val="accent1"/>
+          </a:effectRef>
+          <a:fontRef idx="minor">
+            <a:schemeClr val="lt1"/>
+          </a:fontRef>
+        </p:style>
+        <p:txBody>
+          <a:bodyPr rtlCol="0" anchor="ctr"/>
+          <a:lstStyle/>
+          <a:p>
+            <a:pPr algn="ctr"/>
+          </a:p>
+        </p:txBody>
+      </p:sp>
+      <p:sp>
+        <p:nvSpPr>
+          <p:cNvPr id="5" name="TextBox 4"/>
+          <p:cNvSpPr txBox="1"/>
+          <p:nvPr/>
+        </p:nvSpPr>
+        <p:spPr>
+          <a:xfrm>
+            <a:off x="11247120" y="6492240"/>
+            <a:ext cx="411480" cy="182880"/>
+          </a:xfrm>
+          <a:prstGeom prst="rect">
+            <a:avLst/>
+          </a:prstGeom>
+          <a:noFill/>
+        </p:spPr>
+        <p:txBody>
+          <a:bodyPr wrap="square" anchor="ctr">
+            <a:spAutoFit/>
+          </a:bodyPr>
+          <a:lstStyle/>
+          <a:p>
+            <a:pPr algn="r"/>
+            <a:r>
+              <a:rPr sz="800" b="0">
+                <a:solidFill>
+                  <a:srgbClr val="8294AE"/>
+                </a:solidFill>
+                <a:latin typeface="Droid Sans Fallback"/>
+              </a:rPr>
+              <a:t>22</a:t>
+            </a:r>
+          </a:p>
+        </p:txBody>
+      </p:sp>
+      <p:sp>
+        <p:nvSpPr>
           <p:cNvPr id="6" name="TextBox 5"/>
           <p:cNvSpPr txBox="1"/>
           <p:nvPr/>
         </p:nvSpPr>
         <p:spPr>
           <a:xfrm>
-            <a:off x="640080" y="1115568"/>
-            <a:ext cx="3017520" cy="457200"/>
+            <a:off x="640080" y="1143000"/>
+            <a:ext cx="10972800" cy="640080"/>
           </a:xfrm>
           <a:prstGeom prst="rect">
             <a:avLst/>
@@ -13214,12 +13306,1087 @@
           <a:p>
             <a:pPr algn="l"/>
             <a:r>
-              <a:rPr sz="1400" b="1">
+              <a:rPr sz="1700" b="1">
+                <a:solidFill>
+                  <a:srgbClr val="F8FAFD"/>
+                </a:solidFill>
+                <a:latin typeface="Droid Sans Fallback"/>
+              </a:rPr>
+              <a:t>立项口径：运行时只加「写完才发」的依赖；估时仅离线选打包/VT。切块仍由计算编译器给定，启动时刻不进内核。</a:t>
+            </a:r>
+          </a:p>
+        </p:txBody>
+      </p:sp>
+      <p:sp>
+        <p:nvSpPr>
+          <p:cNvPr id="7" name="Rounded Rectangle 6"/>
+          <p:cNvSpPr/>
+          <p:nvPr/>
+        </p:nvSpPr>
+        <p:spPr>
+          <a:xfrm>
+            <a:off x="548640" y="2011680"/>
+            <a:ext cx="2697480" cy="2331720"/>
+          </a:xfrm>
+          <a:prstGeom prst="roundRect">
+            <a:avLst/>
+          </a:prstGeom>
+          <a:solidFill>
+            <a:srgbClr val="1C2739"/>
+          </a:solidFill>
+          <a:ln>
+            <a:solidFill>
+              <a:srgbClr val="266CFF"/>
+            </a:solidFill>
+          </a:ln>
+        </p:spPr>
+        <p:style>
+          <a:lnRef idx="1">
+            <a:schemeClr val="accent1"/>
+          </a:lnRef>
+          <a:fillRef idx="3">
+            <a:schemeClr val="accent1"/>
+          </a:fillRef>
+          <a:effectRef idx="2">
+            <a:schemeClr val="accent1"/>
+          </a:effectRef>
+          <a:fontRef idx="minor">
+            <a:schemeClr val="lt1"/>
+          </a:fontRef>
+        </p:style>
+        <p:txBody>
+          <a:bodyPr rtlCol="0" anchor="ctr"/>
+          <a:lstStyle/>
+          <a:p>
+            <a:pPr algn="ctr"/>
+          </a:p>
+        </p:txBody>
+      </p:sp>
+      <p:sp>
+        <p:nvSpPr>
+          <p:cNvPr id="8" name="Rounded Rectangle 7"/>
+          <p:cNvSpPr/>
+          <p:nvPr/>
+        </p:nvSpPr>
+        <p:spPr>
+          <a:xfrm>
+            <a:off x="713232" y="2176272"/>
+            <a:ext cx="502920" cy="310896"/>
+          </a:xfrm>
+          <a:prstGeom prst="roundRect">
+            <a:avLst/>
+          </a:prstGeom>
+          <a:solidFill>
+            <a:srgbClr val="266CFF"/>
+          </a:solidFill>
+          <a:ln>
+            <a:solidFill>
+              <a:srgbClr val="266CFF"/>
+            </a:solidFill>
+          </a:ln>
+        </p:spPr>
+        <p:style>
+          <a:lnRef idx="1">
+            <a:schemeClr val="accent1"/>
+          </a:lnRef>
+          <a:fillRef idx="3">
+            <a:schemeClr val="accent1"/>
+          </a:fillRef>
+          <a:effectRef idx="2">
+            <a:schemeClr val="accent1"/>
+          </a:effectRef>
+          <a:fontRef idx="minor">
+            <a:schemeClr val="lt1"/>
+          </a:fontRef>
+        </p:style>
+        <p:txBody>
+          <a:bodyPr rtlCol="0" anchor="ctr"/>
+          <a:lstStyle/>
+          <a:p>
+            <a:pPr algn="ctr"/>
+          </a:p>
+        </p:txBody>
+      </p:sp>
+      <p:sp>
+        <p:nvSpPr>
+          <p:cNvPr id="9" name="TextBox 8"/>
+          <p:cNvSpPr txBox="1"/>
+          <p:nvPr/>
+        </p:nvSpPr>
+        <p:spPr>
+          <a:xfrm>
+            <a:off x="713232" y="2176272"/>
+            <a:ext cx="502920" cy="310896"/>
+          </a:xfrm>
+          <a:prstGeom prst="rect">
+            <a:avLst/>
+          </a:prstGeom>
+          <a:noFill/>
+        </p:spPr>
+        <p:txBody>
+          <a:bodyPr wrap="square" anchor="ctr">
+            <a:spAutoFit/>
+          </a:bodyPr>
+          <a:lstStyle/>
+          <a:p>
+            <a:pPr algn="ctr"/>
+            <a:r>
+              <a:rPr sz="1200" b="1">
+                <a:solidFill>
+                  <a:srgbClr val="F8FAFD"/>
+                </a:solidFill>
+                <a:latin typeface="Droid Sans Fallback"/>
+              </a:rPr>
+              <a:t>01</a:t>
+            </a:r>
+          </a:p>
+        </p:txBody>
+      </p:sp>
+      <p:sp>
+        <p:nvSpPr>
+          <p:cNvPr id="10" name="TextBox 9"/>
+          <p:cNvSpPr txBox="1"/>
+          <p:nvPr/>
+        </p:nvSpPr>
+        <p:spPr>
+          <a:xfrm>
+            <a:off x="731520" y="2697480"/>
+            <a:ext cx="2331720" cy="365760"/>
+          </a:xfrm>
+          <a:prstGeom prst="rect">
+            <a:avLst/>
+          </a:prstGeom>
+          <a:noFill/>
+        </p:spPr>
+        <p:txBody>
+          <a:bodyPr wrap="square" anchor="ctr">
+            <a:spAutoFit/>
+          </a:bodyPr>
+          <a:lstStyle/>
+          <a:p>
+            <a:pPr algn="l"/>
+            <a:r>
+              <a:rPr sz="1600" b="1">
+                <a:solidFill>
+                  <a:srgbClr val="F8FAFD"/>
+                </a:solidFill>
+                <a:latin typeface="Droid Sans Fallback"/>
+              </a:rPr>
+              <a:t>冻结接口</a:t>
+            </a:r>
+          </a:p>
+        </p:txBody>
+      </p:sp>
+      <p:sp>
+        <p:nvSpPr>
+          <p:cNvPr id="11" name="TextBox 10"/>
+          <p:cNvSpPr txBox="1"/>
+          <p:nvPr/>
+        </p:nvSpPr>
+        <p:spPr>
+          <a:xfrm>
+            <a:off x="731520" y="3154680"/>
+            <a:ext cx="2331720" cy="960120"/>
+          </a:xfrm>
+          <a:prstGeom prst="rect">
+            <a:avLst/>
+          </a:prstGeom>
+          <a:noFill/>
+        </p:spPr>
+        <p:txBody>
+          <a:bodyPr wrap="square" anchor="ctr">
+            <a:spAutoFit/>
+          </a:bodyPr>
+          <a:lstStyle/>
+          <a:p>
+            <a:pPr algn="l"/>
+            <a:r>
+              <a:rPr sz="1300" b="0">
+                <a:solidFill>
+                  <a:srgbClr val="E5ECF5"/>
+                </a:solidFill>
+                <a:latin typeface="Droid Sans Fallback"/>
+              </a:rPr>
+              <a:t>tiling + produce 边
+必给；dur 仅离线可选</a:t>
+            </a:r>
+          </a:p>
+        </p:txBody>
+      </p:sp>
+      <p:sp>
+        <p:nvSpPr>
+          <p:cNvPr id="12" name="Rounded Rectangle 11"/>
+          <p:cNvSpPr/>
+          <p:nvPr/>
+        </p:nvSpPr>
+        <p:spPr>
+          <a:xfrm>
+            <a:off x="3429000" y="2011680"/>
+            <a:ext cx="2697480" cy="2331720"/>
+          </a:xfrm>
+          <a:prstGeom prst="roundRect">
+            <a:avLst/>
+          </a:prstGeom>
+          <a:solidFill>
+            <a:srgbClr val="1C2739"/>
+          </a:solidFill>
+          <a:ln>
+            <a:solidFill>
+              <a:srgbClr val="25C8DD"/>
+            </a:solidFill>
+          </a:ln>
+        </p:spPr>
+        <p:style>
+          <a:lnRef idx="1">
+            <a:schemeClr val="accent1"/>
+          </a:lnRef>
+          <a:fillRef idx="3">
+            <a:schemeClr val="accent1"/>
+          </a:fillRef>
+          <a:effectRef idx="2">
+            <a:schemeClr val="accent1"/>
+          </a:effectRef>
+          <a:fontRef idx="minor">
+            <a:schemeClr val="lt1"/>
+          </a:fontRef>
+        </p:style>
+        <p:txBody>
+          <a:bodyPr rtlCol="0" anchor="ctr"/>
+          <a:lstStyle/>
+          <a:p>
+            <a:pPr algn="ctr"/>
+          </a:p>
+        </p:txBody>
+      </p:sp>
+      <p:sp>
+        <p:nvSpPr>
+          <p:cNvPr id="13" name="Rounded Rectangle 12"/>
+          <p:cNvSpPr/>
+          <p:nvPr/>
+        </p:nvSpPr>
+        <p:spPr>
+          <a:xfrm>
+            <a:off x="3593592" y="2176272"/>
+            <a:ext cx="502920" cy="310896"/>
+          </a:xfrm>
+          <a:prstGeom prst="roundRect">
+            <a:avLst/>
+          </a:prstGeom>
+          <a:solidFill>
+            <a:srgbClr val="25C8DD"/>
+          </a:solidFill>
+          <a:ln>
+            <a:solidFill>
+              <a:srgbClr val="25C8DD"/>
+            </a:solidFill>
+          </a:ln>
+        </p:spPr>
+        <p:style>
+          <a:lnRef idx="1">
+            <a:schemeClr val="accent1"/>
+          </a:lnRef>
+          <a:fillRef idx="3">
+            <a:schemeClr val="accent1"/>
+          </a:fillRef>
+          <a:effectRef idx="2">
+            <a:schemeClr val="accent1"/>
+          </a:effectRef>
+          <a:fontRef idx="minor">
+            <a:schemeClr val="lt1"/>
+          </a:fontRef>
+        </p:style>
+        <p:txBody>
+          <a:bodyPr rtlCol="0" anchor="ctr"/>
+          <a:lstStyle/>
+          <a:p>
+            <a:pPr algn="ctr"/>
+          </a:p>
+        </p:txBody>
+      </p:sp>
+      <p:sp>
+        <p:nvSpPr>
+          <p:cNvPr id="14" name="TextBox 13"/>
+          <p:cNvSpPr txBox="1"/>
+          <p:nvPr/>
+        </p:nvSpPr>
+        <p:spPr>
+          <a:xfrm>
+            <a:off x="3593592" y="2176272"/>
+            <a:ext cx="502920" cy="310896"/>
+          </a:xfrm>
+          <a:prstGeom prst="rect">
+            <a:avLst/>
+          </a:prstGeom>
+          <a:noFill/>
+        </p:spPr>
+        <p:txBody>
+          <a:bodyPr wrap="square" anchor="ctr">
+            <a:spAutoFit/>
+          </a:bodyPr>
+          <a:lstStyle/>
+          <a:p>
+            <a:pPr algn="ctr"/>
+            <a:r>
+              <a:rPr sz="1200" b="1">
+                <a:solidFill>
+                  <a:srgbClr val="F8FAFD"/>
+                </a:solidFill>
+                <a:latin typeface="Droid Sans Fallback"/>
+              </a:rPr>
+              <a:t>02</a:t>
+            </a:r>
+          </a:p>
+        </p:txBody>
+      </p:sp>
+      <p:sp>
+        <p:nvSpPr>
+          <p:cNvPr id="15" name="TextBox 14"/>
+          <p:cNvSpPr txBox="1"/>
+          <p:nvPr/>
+        </p:nvSpPr>
+        <p:spPr>
+          <a:xfrm>
+            <a:off x="3611880" y="2697480"/>
+            <a:ext cx="2331720" cy="365760"/>
+          </a:xfrm>
+          <a:prstGeom prst="rect">
+            <a:avLst/>
+          </a:prstGeom>
+          <a:noFill/>
+        </p:spPr>
+        <p:txBody>
+          <a:bodyPr wrap="square" anchor="ctr">
+            <a:spAutoFit/>
+          </a:bodyPr>
+          <a:lstStyle/>
+          <a:p>
+            <a:pPr algn="l"/>
+            <a:r>
+              <a:rPr sz="1600" b="1">
+                <a:solidFill>
+                  <a:srgbClr val="F8FAFD"/>
+                </a:solidFill>
+                <a:latin typeface="Droid Sans Fallback"/>
+              </a:rPr>
+              <a:t>最小内核改动</a:t>
+            </a:r>
+          </a:p>
+        </p:txBody>
+      </p:sp>
+      <p:sp>
+        <p:nvSpPr>
+          <p:cNvPr id="16" name="TextBox 15"/>
+          <p:cNvSpPr txBox="1"/>
+          <p:nvPr/>
+        </p:nvSpPr>
+        <p:spPr>
+          <a:xfrm>
+            <a:off x="3611880" y="3154680"/>
+            <a:ext cx="2331720" cy="960120"/>
+          </a:xfrm>
+          <a:prstGeom prst="rect">
+            <a:avLst/>
+          </a:prstGeom>
+          <a:noFill/>
+        </p:spPr>
+        <p:txBody>
+          <a:bodyPr wrap="square" anchor="ctr">
+            <a:spAutoFit/>
+          </a:bodyPr>
+          <a:lstStyle/>
+          <a:p>
+            <a:pPr algn="l"/>
+            <a:r>
+              <a:rPr sz="1300" b="0">
+                <a:solidFill>
+                  <a:srgbClr val="E5ECF5"/>
+                </a:solidFill>
+                <a:latin typeface="Droid Sans Fallback"/>
+              </a:rPr>
+              <a:t>挂写完事件再 post
+禁止定时器启动</a:t>
+            </a:r>
+          </a:p>
+        </p:txBody>
+      </p:sp>
+      <p:sp>
+        <p:nvSpPr>
+          <p:cNvPr id="17" name="Rounded Rectangle 16"/>
+          <p:cNvSpPr/>
+          <p:nvPr/>
+        </p:nvSpPr>
+        <p:spPr>
+          <a:xfrm>
+            <a:off x="6309359" y="2011680"/>
+            <a:ext cx="2697480" cy="2331720"/>
+          </a:xfrm>
+          <a:prstGeom prst="roundRect">
+            <a:avLst/>
+          </a:prstGeom>
+          <a:solidFill>
+            <a:srgbClr val="1C2739"/>
+          </a:solidFill>
+          <a:ln>
+            <a:solidFill>
+              <a:srgbClr val="21B573"/>
+            </a:solidFill>
+          </a:ln>
+        </p:spPr>
+        <p:style>
+          <a:lnRef idx="1">
+            <a:schemeClr val="accent1"/>
+          </a:lnRef>
+          <a:fillRef idx="3">
+            <a:schemeClr val="accent1"/>
+          </a:fillRef>
+          <a:effectRef idx="2">
+            <a:schemeClr val="accent1"/>
+          </a:effectRef>
+          <a:fontRef idx="minor">
+            <a:schemeClr val="lt1"/>
+          </a:fontRef>
+        </p:style>
+        <p:txBody>
+          <a:bodyPr rtlCol="0" anchor="ctr"/>
+          <a:lstStyle/>
+          <a:p>
+            <a:pPr algn="ctr"/>
+          </a:p>
+        </p:txBody>
+      </p:sp>
+      <p:sp>
+        <p:nvSpPr>
+          <p:cNvPr id="18" name="Rounded Rectangle 17"/>
+          <p:cNvSpPr/>
+          <p:nvPr/>
+        </p:nvSpPr>
+        <p:spPr>
+          <a:xfrm>
+            <a:off x="6473951" y="2176272"/>
+            <a:ext cx="502920" cy="310896"/>
+          </a:xfrm>
+          <a:prstGeom prst="roundRect">
+            <a:avLst/>
+          </a:prstGeom>
+          <a:solidFill>
+            <a:srgbClr val="21B573"/>
+          </a:solidFill>
+          <a:ln>
+            <a:solidFill>
+              <a:srgbClr val="21B573"/>
+            </a:solidFill>
+          </a:ln>
+        </p:spPr>
+        <p:style>
+          <a:lnRef idx="1">
+            <a:schemeClr val="accent1"/>
+          </a:lnRef>
+          <a:fillRef idx="3">
+            <a:schemeClr val="accent1"/>
+          </a:fillRef>
+          <a:effectRef idx="2">
+            <a:schemeClr val="accent1"/>
+          </a:effectRef>
+          <a:fontRef idx="minor">
+            <a:schemeClr val="lt1"/>
+          </a:fontRef>
+        </p:style>
+        <p:txBody>
+          <a:bodyPr rtlCol="0" anchor="ctr"/>
+          <a:lstStyle/>
+          <a:p>
+            <a:pPr algn="ctr"/>
+          </a:p>
+        </p:txBody>
+      </p:sp>
+      <p:sp>
+        <p:nvSpPr>
+          <p:cNvPr id="19" name="TextBox 18"/>
+          <p:cNvSpPr txBox="1"/>
+          <p:nvPr/>
+        </p:nvSpPr>
+        <p:spPr>
+          <a:xfrm>
+            <a:off x="6473951" y="2176272"/>
+            <a:ext cx="502920" cy="310896"/>
+          </a:xfrm>
+          <a:prstGeom prst="rect">
+            <a:avLst/>
+          </a:prstGeom>
+          <a:noFill/>
+        </p:spPr>
+        <p:txBody>
+          <a:bodyPr wrap="square" anchor="ctr">
+            <a:spAutoFit/>
+          </a:bodyPr>
+          <a:lstStyle/>
+          <a:p>
+            <a:pPr algn="ctr"/>
+            <a:r>
+              <a:rPr sz="1200" b="1">
+                <a:solidFill>
+                  <a:srgbClr val="F8FAFD"/>
+                </a:solidFill>
+                <a:latin typeface="Droid Sans Fallback"/>
+              </a:rPr>
+              <a:t>03</a:t>
+            </a:r>
+          </a:p>
+        </p:txBody>
+      </p:sp>
+      <p:sp>
+        <p:nvSpPr>
+          <p:cNvPr id="20" name="TextBox 19"/>
+          <p:cNvSpPr txBox="1"/>
+          <p:nvPr/>
+        </p:nvSpPr>
+        <p:spPr>
+          <a:xfrm>
+            <a:off x="6492240" y="2697480"/>
+            <a:ext cx="2331720" cy="365760"/>
+          </a:xfrm>
+          <a:prstGeom prst="rect">
+            <a:avLst/>
+          </a:prstGeom>
+          <a:noFill/>
+        </p:spPr>
+        <p:txBody>
+          <a:bodyPr wrap="square" anchor="ctr">
+            <a:spAutoFit/>
+          </a:bodyPr>
+          <a:lstStyle/>
+          <a:p>
+            <a:pPr algn="l"/>
+            <a:r>
+              <a:rPr sz="1600" b="1">
+                <a:solidFill>
+                  <a:srgbClr val="F8FAFD"/>
+                </a:solidFill>
+                <a:latin typeface="Droid Sans Fallback"/>
+              </a:rPr>
+              <a:t>先冻通信算法</a:t>
+            </a:r>
+          </a:p>
+        </p:txBody>
+      </p:sp>
+      <p:sp>
+        <p:nvSpPr>
+          <p:cNvPr id="21" name="TextBox 20"/>
+          <p:cNvSpPr txBox="1"/>
+          <p:nvPr/>
+        </p:nvSpPr>
+        <p:spPr>
+          <a:xfrm>
+            <a:off x="6492240" y="3154680"/>
+            <a:ext cx="2331720" cy="960120"/>
+          </a:xfrm>
+          <a:prstGeom prst="rect">
+            <a:avLst/>
+          </a:prstGeom>
+          <a:noFill/>
+        </p:spPr>
+        <p:txBody>
+          <a:bodyPr wrap="square" anchor="ctr">
+            <a:spAutoFit/>
+          </a:bodyPr>
+          <a:lstStyle/>
+          <a:p>
+            <a:pPr algn="l"/>
+            <a:r>
+              <a:rPr sz="1300" b="0">
+                <a:solidFill>
+                  <a:srgbClr val="E5ECF5"/>
+                </a:solidFill>
+                <a:latin typeface="Droid Sans Fallback"/>
+              </a:rPr>
+              <a:t>Ring/HD、写完就发
+无选择时不做 MILP</a:t>
+            </a:r>
+          </a:p>
+        </p:txBody>
+      </p:sp>
+      <p:sp>
+        <p:nvSpPr>
+          <p:cNvPr id="22" name="Rounded Rectangle 21"/>
+          <p:cNvSpPr/>
+          <p:nvPr/>
+        </p:nvSpPr>
+        <p:spPr>
+          <a:xfrm>
+            <a:off x="9189719" y="2011680"/>
+            <a:ext cx="2697480" cy="2331720"/>
+          </a:xfrm>
+          <a:prstGeom prst="roundRect">
+            <a:avLst/>
+          </a:prstGeom>
+          <a:solidFill>
+            <a:srgbClr val="1C2739"/>
+          </a:solidFill>
+          <a:ln>
+            <a:solidFill>
+              <a:srgbClr val="FF9933"/>
+            </a:solidFill>
+          </a:ln>
+        </p:spPr>
+        <p:style>
+          <a:lnRef idx="1">
+            <a:schemeClr val="accent1"/>
+          </a:lnRef>
+          <a:fillRef idx="3">
+            <a:schemeClr val="accent1"/>
+          </a:fillRef>
+          <a:effectRef idx="2">
+            <a:schemeClr val="accent1"/>
+          </a:effectRef>
+          <a:fontRef idx="minor">
+            <a:schemeClr val="lt1"/>
+          </a:fontRef>
+        </p:style>
+        <p:txBody>
+          <a:bodyPr rtlCol="0" anchor="ctr"/>
+          <a:lstStyle/>
+          <a:p>
+            <a:pPr algn="ctr"/>
+          </a:p>
+        </p:txBody>
+      </p:sp>
+      <p:sp>
+        <p:nvSpPr>
+          <p:cNvPr id="23" name="Rounded Rectangle 22"/>
+          <p:cNvSpPr/>
+          <p:nvPr/>
+        </p:nvSpPr>
+        <p:spPr>
+          <a:xfrm>
+            <a:off x="9354311" y="2176272"/>
+            <a:ext cx="502920" cy="310896"/>
+          </a:xfrm>
+          <a:prstGeom prst="roundRect">
+            <a:avLst/>
+          </a:prstGeom>
+          <a:solidFill>
+            <a:srgbClr val="FF9933"/>
+          </a:solidFill>
+          <a:ln>
+            <a:solidFill>
+              <a:srgbClr val="FF9933"/>
+            </a:solidFill>
+          </a:ln>
+        </p:spPr>
+        <p:style>
+          <a:lnRef idx="1">
+            <a:schemeClr val="accent1"/>
+          </a:lnRef>
+          <a:fillRef idx="3">
+            <a:schemeClr val="accent1"/>
+          </a:fillRef>
+          <a:effectRef idx="2">
+            <a:schemeClr val="accent1"/>
+          </a:effectRef>
+          <a:fontRef idx="minor">
+            <a:schemeClr val="lt1"/>
+          </a:fontRef>
+        </p:style>
+        <p:txBody>
+          <a:bodyPr rtlCol="0" anchor="ctr"/>
+          <a:lstStyle/>
+          <a:p>
+            <a:pPr algn="ctr"/>
+          </a:p>
+        </p:txBody>
+      </p:sp>
+      <p:sp>
+        <p:nvSpPr>
+          <p:cNvPr id="24" name="TextBox 23"/>
+          <p:cNvSpPr txBox="1"/>
+          <p:nvPr/>
+        </p:nvSpPr>
+        <p:spPr>
+          <a:xfrm>
+            <a:off x="9354311" y="2176272"/>
+            <a:ext cx="502920" cy="310896"/>
+          </a:xfrm>
+          <a:prstGeom prst="rect">
+            <a:avLst/>
+          </a:prstGeom>
+          <a:noFill/>
+        </p:spPr>
+        <p:txBody>
+          <a:bodyPr wrap="square" anchor="ctr">
+            <a:spAutoFit/>
+          </a:bodyPr>
+          <a:lstStyle/>
+          <a:p>
+            <a:pPr algn="ctr"/>
+            <a:r>
+              <a:rPr sz="1200" b="1">
+                <a:solidFill>
+                  <a:srgbClr val="F8FAFD"/>
+                </a:solidFill>
+                <a:latin typeface="Droid Sans Fallback"/>
+              </a:rPr>
+              <a:t>04</a:t>
+            </a:r>
+          </a:p>
+        </p:txBody>
+      </p:sp>
+      <p:sp>
+        <p:nvSpPr>
+          <p:cNvPr id="25" name="TextBox 24"/>
+          <p:cNvSpPr txBox="1"/>
+          <p:nvPr/>
+        </p:nvSpPr>
+        <p:spPr>
+          <a:xfrm>
+            <a:off x="9372599" y="2697480"/>
+            <a:ext cx="2331720" cy="365760"/>
+          </a:xfrm>
+          <a:prstGeom prst="rect">
+            <a:avLst/>
+          </a:prstGeom>
+          <a:noFill/>
+        </p:spPr>
+        <p:txBody>
+          <a:bodyPr wrap="square" anchor="ctr">
+            <a:spAutoFit/>
+          </a:bodyPr>
+          <a:lstStyle/>
+          <a:p>
+            <a:pPr algn="l"/>
+            <a:r>
+              <a:rPr sz="1600" b="1">
+                <a:solidFill>
+                  <a:srgbClr val="F8FAFD"/>
+                </a:solidFill>
+                <a:latin typeface="Droid Sans Fallback"/>
+              </a:rPr>
+              <a:t>用总时间验收</a:t>
+            </a:r>
+          </a:p>
+        </p:txBody>
+      </p:sp>
+      <p:sp>
+        <p:nvSpPr>
+          <p:cNvPr id="26" name="TextBox 25"/>
+          <p:cNvSpPr txBox="1"/>
+          <p:nvPr/>
+        </p:nvSpPr>
+        <p:spPr>
+          <a:xfrm>
+            <a:off x="9372599" y="3154680"/>
+            <a:ext cx="2331720" cy="960120"/>
+          </a:xfrm>
+          <a:prstGeom prst="rect">
+            <a:avLst/>
+          </a:prstGeom>
+          <a:noFill/>
+        </p:spPr>
+        <p:txBody>
+          <a:bodyPr wrap="square" anchor="ctr">
+            <a:spAutoFit/>
+          </a:bodyPr>
+          <a:lstStyle/>
+          <a:p>
+            <a:pPr algn="l"/>
+            <a:r>
+              <a:rPr sz="1300" b="0">
+                <a:solidFill>
+                  <a:srgbClr val="E5ECF5"/>
+                </a:solidFill>
+                <a:latin typeface="Droid Sans Fallback"/>
+              </a:rPr>
+              <a:t>对比两阶段基线
+数值必须一致</a:t>
+            </a:r>
+          </a:p>
+        </p:txBody>
+      </p:sp>
+      <p:sp>
+        <p:nvSpPr>
+          <p:cNvPr id="27" name="Rounded Rectangle 26"/>
+          <p:cNvSpPr/>
+          <p:nvPr/>
+        </p:nvSpPr>
+        <p:spPr>
+          <a:xfrm>
+            <a:off x="548640" y="4617720"/>
+            <a:ext cx="11109960" cy="1280160"/>
+          </a:xfrm>
+          <a:prstGeom prst="roundRect">
+            <a:avLst/>
+          </a:prstGeom>
+          <a:solidFill>
+            <a:srgbClr val="3A3016"/>
+          </a:solidFill>
+          <a:ln>
+            <a:solidFill>
+              <a:srgbClr val="FF9933"/>
+            </a:solidFill>
+          </a:ln>
+        </p:spPr>
+        <p:style>
+          <a:lnRef idx="1">
+            <a:schemeClr val="accent1"/>
+          </a:lnRef>
+          <a:fillRef idx="3">
+            <a:schemeClr val="accent1"/>
+          </a:fillRef>
+          <a:effectRef idx="2">
+            <a:schemeClr val="accent1"/>
+          </a:effectRef>
+          <a:fontRef idx="minor">
+            <a:schemeClr val="lt1"/>
+          </a:fontRef>
+        </p:style>
+        <p:txBody>
+          <a:bodyPr rtlCol="0" anchor="ctr"/>
+          <a:lstStyle/>
+          <a:p>
+            <a:pPr algn="ctr"/>
+          </a:p>
+        </p:txBody>
+      </p:sp>
+      <p:sp>
+        <p:nvSpPr>
+          <p:cNvPr id="28" name="TextBox 27"/>
+          <p:cNvSpPr txBox="1"/>
+          <p:nvPr/>
+        </p:nvSpPr>
+        <p:spPr>
+          <a:xfrm>
+            <a:off x="694944" y="4672583"/>
+            <a:ext cx="10853928" cy="1170431"/>
+          </a:xfrm>
+          <a:prstGeom prst="rect">
+            <a:avLst/>
+          </a:prstGeom>
+          <a:noFill/>
+        </p:spPr>
+        <p:txBody>
+          <a:bodyPr wrap="square" anchor="t">
+            <a:spAutoFit/>
+          </a:bodyPr>
+          <a:lstStyle/>
+          <a:p>
+            <a:pPr algn="l"/>
+            <a:r>
+              <a:rPr sz="1200" b="0">
+                <a:solidFill>
+                  <a:srgbClr val="E5ECF5"/>
+                </a:solidFill>
+                <a:latin typeface="Droid Sans Fallback"/>
+              </a:rPr>
+              <a:t>背景  详细合同见 docs/fusion_milp_input.md 第 11 节。切块归计算编译器；运行时只认写完事件；时钟不进内核。</a:t>
+            </a:r>
+          </a:p>
+        </p:txBody>
+      </p:sp>
+    </p:spTree>
+  </p:cSld>
+  <p:clrMapOvr>
+    <a:masterClrMapping/>
+  </p:clrMapOvr>
+</p:sld>
+</file>
+
+<file path=ppt/slides/slide23.xml><?xml version="1.0" encoding="utf-8"?>
+<p:sld xmlns:a="http://schemas.openxmlformats.org/drawingml/2006/main" xmlns:p="http://schemas.openxmlformats.org/presentationml/2006/main" xmlns:r="http://schemas.openxmlformats.org/officeDocument/2006/relationships">
+  <p:cSld>
+    <p:bg>
+      <p:bgPr>
+        <a:solidFill>
+          <a:srgbClr val="0A1830"/>
+        </a:solidFill>
+        <a:effectLst/>
+      </p:bgPr>
+    </p:bg>
+    <p:spTree>
+      <p:nvGrpSpPr>
+        <p:cNvPr id="1" name=""/>
+        <p:cNvGrpSpPr/>
+        <p:nvPr/>
+      </p:nvGrpSpPr>
+      <p:grpSpPr/>
+      <p:sp>
+        <p:nvSpPr>
+          <p:cNvPr id="2" name="TextBox 1"/>
+          <p:cNvSpPr txBox="1"/>
+          <p:nvPr/>
+        </p:nvSpPr>
+        <p:spPr>
+          <a:xfrm>
+            <a:off x="548640" y="219456"/>
+            <a:ext cx="9144000" cy="219456"/>
+          </a:xfrm>
+          <a:prstGeom prst="rect">
+            <a:avLst/>
+          </a:prstGeom>
+          <a:noFill/>
+        </p:spPr>
+        <p:txBody>
+          <a:bodyPr wrap="square" anchor="ctr">
+            <a:spAutoFit/>
+          </a:bodyPr>
+          <a:lstStyle/>
+          <a:p>
+            <a:pPr algn="l"/>
+            <a:r>
+              <a:rPr sz="1000" b="1">
                 <a:solidFill>
                   <a:srgbClr val="25C8DD"/>
                 </a:solidFill>
                 <a:latin typeface="Droid Sans Fallback"/>
               </a:rPr>
+              <a:t>备忘  /  可留在材料最后</a:t>
+            </a:r>
+          </a:p>
+        </p:txBody>
+      </p:sp>
+      <p:sp>
+        <p:nvSpPr>
+          <p:cNvPr id="3" name="TextBox 2"/>
+          <p:cNvSpPr txBox="1"/>
+          <p:nvPr/>
+        </p:nvSpPr>
+        <p:spPr>
+          <a:xfrm>
+            <a:off x="548640" y="438912"/>
+            <a:ext cx="11064240" cy="457200"/>
+          </a:xfrm>
+          <a:prstGeom prst="rect">
+            <a:avLst/>
+          </a:prstGeom>
+          <a:noFill/>
+        </p:spPr>
+        <p:txBody>
+          <a:bodyPr wrap="square" anchor="ctr">
+            <a:spAutoFit/>
+          </a:bodyPr>
+          <a:lstStyle/>
+          <a:p>
+            <a:pPr algn="l"/>
+            <a:r>
+              <a:rPr sz="2400" b="1">
+                <a:solidFill>
+                  <a:srgbClr val="F8FAFD"/>
+                </a:solidFill>
+                <a:latin typeface="Droid Sans Fallback"/>
+              </a:rPr>
+              <a:t>附录：一分钟对照表</a:t>
+            </a:r>
+          </a:p>
+        </p:txBody>
+      </p:sp>
+      <p:sp>
+        <p:nvSpPr>
+          <p:cNvPr id="4" name="Rectangle 3"/>
+          <p:cNvSpPr/>
+          <p:nvPr/>
+        </p:nvSpPr>
+        <p:spPr>
+          <a:xfrm>
+            <a:off x="548640" y="950976"/>
+            <a:ext cx="914400" cy="41148"/>
+          </a:xfrm>
+          <a:prstGeom prst="rect">
+            <a:avLst/>
+          </a:prstGeom>
+          <a:solidFill>
+            <a:srgbClr val="266CFF"/>
+          </a:solidFill>
+          <a:ln>
+            <a:solidFill>
+              <a:srgbClr val="266CFF"/>
+            </a:solidFill>
+          </a:ln>
+        </p:spPr>
+        <p:style>
+          <a:lnRef idx="1">
+            <a:schemeClr val="accent1"/>
+          </a:lnRef>
+          <a:fillRef idx="3">
+            <a:schemeClr val="accent1"/>
+          </a:fillRef>
+          <a:effectRef idx="2">
+            <a:schemeClr val="accent1"/>
+          </a:effectRef>
+          <a:fontRef idx="minor">
+            <a:schemeClr val="lt1"/>
+          </a:fontRef>
+        </p:style>
+        <p:txBody>
+          <a:bodyPr rtlCol="0" anchor="ctr"/>
+          <a:lstStyle/>
+          <a:p>
+            <a:pPr algn="ctr"/>
+          </a:p>
+        </p:txBody>
+      </p:sp>
+      <p:sp>
+        <p:nvSpPr>
+          <p:cNvPr id="5" name="TextBox 4"/>
+          <p:cNvSpPr txBox="1"/>
+          <p:nvPr/>
+        </p:nvSpPr>
+        <p:spPr>
+          <a:xfrm>
+            <a:off x="11247120" y="6492240"/>
+            <a:ext cx="411480" cy="182880"/>
+          </a:xfrm>
+          <a:prstGeom prst="rect">
+            <a:avLst/>
+          </a:prstGeom>
+          <a:noFill/>
+        </p:spPr>
+        <p:txBody>
+          <a:bodyPr wrap="square" anchor="ctr">
+            <a:spAutoFit/>
+          </a:bodyPr>
+          <a:lstStyle/>
+          <a:p>
+            <a:pPr algn="r"/>
+            <a:r>
+              <a:rPr sz="800" b="0">
+                <a:solidFill>
+                  <a:srgbClr val="8294AE"/>
+                </a:solidFill>
+                <a:latin typeface="Droid Sans Fallback"/>
+              </a:rPr>
+              <a:t>23</a:t>
+            </a:r>
+          </a:p>
+        </p:txBody>
+      </p:sp>
+      <p:sp>
+        <p:nvSpPr>
+          <p:cNvPr id="6" name="TextBox 5"/>
+          <p:cNvSpPr txBox="1"/>
+          <p:nvPr/>
+        </p:nvSpPr>
+        <p:spPr>
+          <a:xfrm>
+            <a:off x="640080" y="1060704"/>
+            <a:ext cx="3017520" cy="420624"/>
+          </a:xfrm>
+          <a:prstGeom prst="rect">
+            <a:avLst/>
+          </a:prstGeom>
+          <a:noFill/>
+        </p:spPr>
+        <p:txBody>
+          <a:bodyPr wrap="square" anchor="ctr">
+            <a:spAutoFit/>
+          </a:bodyPr>
+          <a:lstStyle/>
+          <a:p>
+            <a:pPr algn="l"/>
+            <a:r>
+              <a:rPr sz="1200" b="1">
+                <a:solidFill>
+                  <a:srgbClr val="25C8DD"/>
+                </a:solidFill>
+                <a:latin typeface="Droid Sans Fallback"/>
+              </a:rPr>
               <a:t>GEMM / MM / Linear</a:t>
             </a:r>
           </a:p>
@@ -13233,8 +14400,8 @@
         </p:nvSpPr>
         <p:spPr>
           <a:xfrm>
-            <a:off x="3749039" y="1115568"/>
-            <a:ext cx="7772400" cy="457200"/>
+            <a:off x="3749039" y="1060704"/>
+            <a:ext cx="7772400" cy="420624"/>
           </a:xfrm>
           <a:prstGeom prst="rect">
             <a:avLst/>
@@ -13249,7 +14416,7 @@
           <a:p>
             <a:pPr algn="l"/>
             <a:r>
-              <a:rPr sz="1500" b="0">
+              <a:rPr sz="1300" b="0">
                 <a:solidFill>
                   <a:srgbClr val="E5ECF5"/>
                 </a:solidFill>
@@ -13268,8 +14435,8 @@
         </p:nvSpPr>
         <p:spPr>
           <a:xfrm>
-            <a:off x="640080" y="1737360"/>
-            <a:ext cx="3017520" cy="457200"/>
+            <a:off x="640080" y="1554480"/>
+            <a:ext cx="3017520" cy="420624"/>
           </a:xfrm>
           <a:prstGeom prst="rect">
             <a:avLst/>
@@ -13284,7 +14451,7 @@
           <a:p>
             <a:pPr algn="l"/>
             <a:r>
-              <a:rPr sz="1400" b="1">
+              <a:rPr sz="1200" b="1">
                 <a:solidFill>
                   <a:srgbClr val="25C8DD"/>
                 </a:solidFill>
@@ -13303,8 +14470,8 @@
         </p:nvSpPr>
         <p:spPr>
           <a:xfrm>
-            <a:off x="3749039" y="1737360"/>
-            <a:ext cx="7772400" cy="457200"/>
+            <a:off x="3749039" y="1554480"/>
+            <a:ext cx="7772400" cy="420624"/>
           </a:xfrm>
           <a:prstGeom prst="rect">
             <a:avLst/>
@@ -13319,7 +14486,7 @@
           <a:p>
             <a:pPr algn="l"/>
             <a:r>
-              <a:rPr sz="1500" b="0">
+              <a:rPr sz="1300" b="0">
                 <a:solidFill>
                   <a:srgbClr val="E5ECF5"/>
                 </a:solidFill>
@@ -13338,8 +14505,8 @@
         </p:nvSpPr>
         <p:spPr>
           <a:xfrm>
-            <a:off x="640080" y="2359152"/>
-            <a:ext cx="3017520" cy="457200"/>
+            <a:off x="640080" y="2048256"/>
+            <a:ext cx="3017520" cy="420624"/>
           </a:xfrm>
           <a:prstGeom prst="rect">
             <a:avLst/>
@@ -13354,7 +14521,7 @@
           <a:p>
             <a:pPr algn="l"/>
             <a:r>
-              <a:rPr sz="1400" b="1">
+              <a:rPr sz="1200" b="1">
                 <a:solidFill>
                   <a:srgbClr val="25C8DD"/>
                 </a:solidFill>
@@ -13373,8 +14540,8 @@
         </p:nvSpPr>
         <p:spPr>
           <a:xfrm>
-            <a:off x="3749039" y="2359152"/>
-            <a:ext cx="7772400" cy="457200"/>
+            <a:off x="3749039" y="2048256"/>
+            <a:ext cx="7772400" cy="420624"/>
           </a:xfrm>
           <a:prstGeom prst="rect">
             <a:avLst/>
@@ -13389,7 +14556,7 @@
           <a:p>
             <a:pPr algn="l"/>
             <a:r>
-              <a:rPr sz="1500" b="0">
+              <a:rPr sz="1300" b="0">
                 <a:solidFill>
                   <a:srgbClr val="E5ECF5"/>
                 </a:solidFill>
@@ -13408,8 +14575,8 @@
         </p:nvSpPr>
         <p:spPr>
           <a:xfrm>
-            <a:off x="640080" y="2980944"/>
-            <a:ext cx="3017520" cy="457200"/>
+            <a:off x="640080" y="2542032"/>
+            <a:ext cx="3017520" cy="420624"/>
           </a:xfrm>
           <a:prstGeom prst="rect">
             <a:avLst/>
@@ -13424,7 +14591,7 @@
           <a:p>
             <a:pPr algn="l"/>
             <a:r>
-              <a:rPr sz="1400" b="1">
+              <a:rPr sz="1200" b="1">
                 <a:solidFill>
                   <a:srgbClr val="25C8DD"/>
                 </a:solidFill>
@@ -13443,8 +14610,8 @@
         </p:nvSpPr>
         <p:spPr>
           <a:xfrm>
-            <a:off x="3749039" y="2980944"/>
-            <a:ext cx="7772400" cy="457200"/>
+            <a:off x="3749039" y="2542032"/>
+            <a:ext cx="7772400" cy="420624"/>
           </a:xfrm>
           <a:prstGeom prst="rect">
             <a:avLst/>
@@ -13459,7 +14626,7 @@
           <a:p>
             <a:pPr algn="l"/>
             <a:r>
-              <a:rPr sz="1500" b="0">
+              <a:rPr sz="1300" b="0">
                 <a:solidFill>
                   <a:srgbClr val="E5ECF5"/>
                 </a:solidFill>
@@ -13478,8 +14645,8 @@
         </p:nvSpPr>
         <p:spPr>
           <a:xfrm>
-            <a:off x="640080" y="3602736"/>
-            <a:ext cx="3017520" cy="457200"/>
+            <a:off x="640080" y="3035808"/>
+            <a:ext cx="3017520" cy="420624"/>
           </a:xfrm>
           <a:prstGeom prst="rect">
             <a:avLst/>
@@ -13494,7 +14661,7 @@
           <a:p>
             <a:pPr algn="l"/>
             <a:r>
-              <a:rPr sz="1400" b="1">
+              <a:rPr sz="1200" b="1">
                 <a:solidFill>
                   <a:srgbClr val="25C8DD"/>
                 </a:solidFill>
@@ -13513,8 +14680,8 @@
         </p:nvSpPr>
         <p:spPr>
           <a:xfrm>
-            <a:off x="3749039" y="3602736"/>
-            <a:ext cx="7772400" cy="457200"/>
+            <a:off x="3749039" y="3035808"/>
+            <a:ext cx="7772400" cy="420624"/>
           </a:xfrm>
           <a:prstGeom prst="rect">
             <a:avLst/>
@@ -13529,7 +14696,7 @@
           <a:p>
             <a:pPr algn="l"/>
             <a:r>
-              <a:rPr sz="1500" b="0">
+              <a:rPr sz="1300" b="0">
                 <a:solidFill>
                   <a:srgbClr val="E5ECF5"/>
                 </a:solidFill>
@@ -13548,8 +14715,8 @@
         </p:nvSpPr>
         <p:spPr>
           <a:xfrm>
-            <a:off x="640080" y="4224528"/>
-            <a:ext cx="3017520" cy="457200"/>
+            <a:off x="640080" y="3529584"/>
+            <a:ext cx="3017520" cy="420624"/>
           </a:xfrm>
           <a:prstGeom prst="rect">
             <a:avLst/>
@@ -13564,7 +14731,7 @@
           <a:p>
             <a:pPr algn="l"/>
             <a:r>
-              <a:rPr sz="1400" b="1">
+              <a:rPr sz="1200" b="1">
                 <a:solidFill>
                   <a:srgbClr val="25C8DD"/>
                 </a:solidFill>
@@ -13583,8 +14750,8 @@
         </p:nvSpPr>
         <p:spPr>
           <a:xfrm>
-            <a:off x="3749039" y="4224528"/>
-            <a:ext cx="7772400" cy="457200"/>
+            <a:off x="3749039" y="3529584"/>
+            <a:ext cx="7772400" cy="420624"/>
           </a:xfrm>
           <a:prstGeom prst="rect">
             <a:avLst/>
@@ -13599,13 +14766,13 @@
           <a:p>
             <a:pPr algn="l"/>
             <a:r>
-              <a:rPr sz="1500" b="0">
+              <a:rPr sz="1300" b="0">
                 <a:solidFill>
                   <a:srgbClr val="E5ECF5"/>
                 </a:solidFill>
                 <a:latin typeface="Droid Sans Fallback"/>
               </a:rPr>
-              <a:t>自动排出集合通信时刻表的整数规划器</a:t>
+              <a:t>离线搜通信结构；输出下降成事件边，不是闹钟</a:t>
             </a:r>
           </a:p>
         </p:txBody>
@@ -13618,8 +14785,8 @@
         </p:nvSpPr>
         <p:spPr>
           <a:xfrm>
-            <a:off x="640080" y="4846320"/>
-            <a:ext cx="3017520" cy="457200"/>
+            <a:off x="640080" y="4023360"/>
+            <a:ext cx="3017520" cy="420624"/>
           </a:xfrm>
           <a:prstGeom prst="rect">
             <a:avLst/>
@@ -13634,7 +14801,7 @@
           <a:p>
             <a:pPr algn="l"/>
             <a:r>
-              <a:rPr sz="1400" b="1">
+              <a:rPr sz="1200" b="1">
                 <a:solidFill>
                   <a:srgbClr val="25C8DD"/>
                 </a:solidFill>
@@ -13653,8 +14820,8 @@
         </p:nvSpPr>
         <p:spPr>
           <a:xfrm>
-            <a:off x="3749039" y="4846320"/>
-            <a:ext cx="7772400" cy="457200"/>
+            <a:off x="3749039" y="4023360"/>
+            <a:ext cx="7772400" cy="420624"/>
           </a:xfrm>
           <a:prstGeom prst="rect">
             <a:avLst/>
@@ -13669,7 +14836,7 @@
           <a:p>
             <a:pPr algn="l"/>
             <a:r>
-              <a:rPr sz="1500" b="0">
+              <a:rPr sz="1300" b="0">
                 <a:solidFill>
                   <a:srgbClr val="E5ECF5"/>
                 </a:solidFill>
@@ -13688,8 +14855,8 @@
         </p:nvSpPr>
         <p:spPr>
           <a:xfrm>
-            <a:off x="640080" y="5468112"/>
-            <a:ext cx="3017520" cy="457200"/>
+            <a:off x="640080" y="4517136"/>
+            <a:ext cx="3017520" cy="420624"/>
           </a:xfrm>
           <a:prstGeom prst="rect">
             <a:avLst/>
@@ -13704,13 +14871,13 @@
           <a:p>
             <a:pPr algn="l"/>
             <a:r>
-              <a:rPr sz="1400" b="1">
+              <a:rPr sz="1200" b="1">
                 <a:solidFill>
                   <a:srgbClr val="25C8DD"/>
                 </a:solidFill>
                 <a:latin typeface="Droid Sans Fallback"/>
               </a:rPr>
-              <a:t>ready</a:t>
+              <a:t>produce 边</a:t>
             </a:r>
           </a:p>
         </p:txBody>
@@ -13723,8 +14890,8 @@
         </p:nvSpPr>
         <p:spPr>
           <a:xfrm>
-            <a:off x="3749039" y="5468112"/>
-            <a:ext cx="7772400" cy="457200"/>
+            <a:off x="3749039" y="4517136"/>
+            <a:ext cx="7772400" cy="420624"/>
           </a:xfrm>
           <a:prstGeom prst="rect">
             <a:avLst/>
@@ -13739,13 +14906,13 @@
           <a:p>
             <a:pPr algn="l"/>
             <a:r>
-              <a:rPr sz="1500" b="0">
+              <a:rPr sz="1300" b="0">
                 <a:solidFill>
                   <a:srgbClr val="E5ECF5"/>
                 </a:solidFill>
                 <a:latin typeface="Droid Sans Fallback"/>
               </a:rPr>
-              <a:t>某一包数据对通信可见的最早时刻（由流图推出）</a:t>
+              <a:t>这些 C-tile 写完才允许发对应一包（运行时硬约束）</a:t>
             </a:r>
           </a:p>
         </p:txBody>
@@ -13758,8 +14925,8 @@
         </p:nvSpPr>
         <p:spPr>
           <a:xfrm>
-            <a:off x="640080" y="6089904"/>
-            <a:ext cx="3017520" cy="457200"/>
+            <a:off x="640080" y="5010912"/>
+            <a:ext cx="3017520" cy="420624"/>
           </a:xfrm>
           <a:prstGeom prst="rect">
             <a:avLst/>
@@ -13774,12 +14941,82 @@
           <a:p>
             <a:pPr algn="l"/>
             <a:r>
-              <a:rPr sz="1400" b="1">
+              <a:rPr sz="1200" b="1">
                 <a:solidFill>
                   <a:srgbClr val="25C8DD"/>
                 </a:solidFill>
                 <a:latin typeface="Droid Sans Fallback"/>
               </a:rPr>
+              <a:t>ready 估时</a:t>
+            </a:r>
+          </a:p>
+        </p:txBody>
+      </p:sp>
+      <p:sp>
+        <p:nvSpPr>
+          <p:cNvPr id="23" name="TextBox 22"/>
+          <p:cNvSpPr txBox="1"/>
+          <p:nvPr/>
+        </p:nvSpPr>
+        <p:spPr>
+          <a:xfrm>
+            <a:off x="3749039" y="5010912"/>
+            <a:ext cx="7772400" cy="420624"/>
+          </a:xfrm>
+          <a:prstGeom prst="rect">
+            <a:avLst/>
+          </a:prstGeom>
+          <a:noFill/>
+        </p:spPr>
+        <p:txBody>
+          <a:bodyPr wrap="square" anchor="ctr">
+            <a:spAutoFit/>
+          </a:bodyPr>
+          <a:lstStyle/>
+          <a:p>
+            <a:pPr algn="l"/>
+            <a:r>
+              <a:rPr sz="1300" b="0">
+                <a:solidFill>
+                  <a:srgbClr val="E5ECF5"/>
+                </a:solidFill>
+                <a:latin typeface="Droid Sans Fallback"/>
+              </a:rPr>
+              <a:t>离线用的数字；运行时不读。不准是必然，只影响是否选到最优结构</a:t>
+            </a:r>
+          </a:p>
+        </p:txBody>
+      </p:sp>
+      <p:sp>
+        <p:nvSpPr>
+          <p:cNvPr id="24" name="TextBox 23"/>
+          <p:cNvSpPr txBox="1"/>
+          <p:nvPr/>
+        </p:nvSpPr>
+        <p:spPr>
+          <a:xfrm>
+            <a:off x="640080" y="5504688"/>
+            <a:ext cx="3017520" cy="420624"/>
+          </a:xfrm>
+          <a:prstGeom prst="rect">
+            <a:avLst/>
+          </a:prstGeom>
+          <a:noFill/>
+        </p:spPr>
+        <p:txBody>
+          <a:bodyPr wrap="square" anchor="ctr">
+            <a:spAutoFit/>
+          </a:bodyPr>
+          <a:lstStyle/>
+          <a:p>
+            <a:pPr algn="l"/>
+            <a:r>
+              <a:rPr sz="1200" b="1">
+                <a:solidFill>
+                  <a:srgbClr val="25C8DD"/>
+                </a:solidFill>
+                <a:latin typeface="Droid Sans Fallback"/>
+              </a:rPr>
               <a:t>Ring / HD</a:t>
             </a:r>
           </a:p>
@@ -13787,14 +15024,14 @@
       </p:sp>
       <p:sp>
         <p:nvSpPr>
-          <p:cNvPr id="23" name="TextBox 22"/>
-          <p:cNvSpPr txBox="1"/>
-          <p:nvPr/>
-        </p:nvSpPr>
-        <p:spPr>
-          <a:xfrm>
-            <a:off x="3749039" y="6089904"/>
-            <a:ext cx="7772400" cy="457200"/>
+          <p:cNvPr id="25" name="TextBox 24"/>
+          <p:cNvSpPr txBox="1"/>
+          <p:nvPr/>
+        </p:nvSpPr>
+        <p:spPr>
+          <a:xfrm>
+            <a:off x="3749039" y="5504688"/>
+            <a:ext cx="7772400" cy="420624"/>
           </a:xfrm>
           <a:prstGeom prst="rect">
             <a:avLst/>
@@ -13809,7 +15046,7 @@
           <a:p>
             <a:pPr algn="l"/>
             <a:r>
-              <a:rPr sz="1500" b="0">
+              <a:rPr sz="1300" b="0">
                 <a:solidFill>
                   <a:srgbClr val="E5ECF5"/>
                 </a:solidFill>

--- a/docs/融合算子自动生成_MM_AllReduce.pptx
+++ b/docs/融合算子自动生成_MM_AllReduce.pptx
@@ -16115,7 +16115,7 @@
                 <a:latin typeface="Droid Sans Fallback"/>
               </a:rPr>
               <a:t>tiling + produce 边
-必给；dur 仅离线可选</a:t>
+950：可见层=UB Memory</a:t>
             </a:r>
           </a:p>
         </p:txBody>
@@ -16310,8 +16310,8 @@
                 </a:solidFill>
                 <a:latin typeface="Droid Sans Fallback"/>
               </a:rPr>
-              <a:t>挂写完事件再 post
-禁止定时器启动</a:t>
+              <a:t>槽写完再 post UB WQE
+走 CCU_SCHED，禁闹钟</a:t>
             </a:r>
           </a:p>
         </p:txBody>
@@ -16972,8 +16972,8 @@
         </p:nvSpPr>
         <p:spPr>
           <a:xfrm>
-            <a:off x="640080" y="1060704"/>
-            <a:ext cx="3017520" cy="420624"/>
+            <a:off x="640080" y="1024128"/>
+            <a:ext cx="3017520" cy="384048"/>
           </a:xfrm>
           <a:prstGeom prst="rect">
             <a:avLst/>
@@ -17007,8 +17007,8 @@
         </p:nvSpPr>
         <p:spPr>
           <a:xfrm>
-            <a:off x="3749039" y="1060704"/>
-            <a:ext cx="7772400" cy="420624"/>
+            <a:off x="3749039" y="1024128"/>
+            <a:ext cx="7772400" cy="384048"/>
           </a:xfrm>
           <a:prstGeom prst="rect">
             <a:avLst/>
@@ -17042,8 +17042,8 @@
         </p:nvSpPr>
         <p:spPr>
           <a:xfrm>
-            <a:off x="640080" y="1554480"/>
-            <a:ext cx="3017520" cy="420624"/>
+            <a:off x="640080" y="1463040"/>
+            <a:ext cx="3017520" cy="384048"/>
           </a:xfrm>
           <a:prstGeom prst="rect">
             <a:avLst/>
@@ -17077,8 +17077,8 @@
         </p:nvSpPr>
         <p:spPr>
           <a:xfrm>
-            <a:off x="3749039" y="1554480"/>
-            <a:ext cx="7772400" cy="420624"/>
+            <a:off x="3749039" y="1463040"/>
+            <a:ext cx="7772400" cy="384048"/>
           </a:xfrm>
           <a:prstGeom prst="rect">
             <a:avLst/>
@@ -17112,8 +17112,8 @@
         </p:nvSpPr>
         <p:spPr>
           <a:xfrm>
-            <a:off x="640080" y="2048256"/>
-            <a:ext cx="3017520" cy="420624"/>
+            <a:off x="640080" y="1901952"/>
+            <a:ext cx="3017520" cy="384048"/>
           </a:xfrm>
           <a:prstGeom prst="rect">
             <a:avLst/>
@@ -17147,8 +17147,8 @@
         </p:nvSpPr>
         <p:spPr>
           <a:xfrm>
-            <a:off x="3749039" y="2048256"/>
-            <a:ext cx="7772400" cy="420624"/>
+            <a:off x="3749039" y="1901952"/>
+            <a:ext cx="7772400" cy="384048"/>
           </a:xfrm>
           <a:prstGeom prst="rect">
             <a:avLst/>
@@ -17182,8 +17182,8 @@
         </p:nvSpPr>
         <p:spPr>
           <a:xfrm>
-            <a:off x="640080" y="2542032"/>
-            <a:ext cx="3017520" cy="420624"/>
+            <a:off x="640080" y="2340864"/>
+            <a:ext cx="3017520" cy="384048"/>
           </a:xfrm>
           <a:prstGeom prst="rect">
             <a:avLst/>
@@ -17217,8 +17217,8 @@
         </p:nvSpPr>
         <p:spPr>
           <a:xfrm>
-            <a:off x="3749039" y="2542032"/>
-            <a:ext cx="7772400" cy="420624"/>
+            <a:off x="3749039" y="2340864"/>
+            <a:ext cx="7772400" cy="384048"/>
           </a:xfrm>
           <a:prstGeom prst="rect">
             <a:avLst/>
@@ -17252,8 +17252,8 @@
         </p:nvSpPr>
         <p:spPr>
           <a:xfrm>
-            <a:off x="640080" y="3035808"/>
-            <a:ext cx="3017520" cy="420624"/>
+            <a:off x="640080" y="2779776"/>
+            <a:ext cx="3017520" cy="384048"/>
           </a:xfrm>
           <a:prstGeom prst="rect">
             <a:avLst/>
@@ -17287,8 +17287,8 @@
         </p:nvSpPr>
         <p:spPr>
           <a:xfrm>
-            <a:off x="3749039" y="3035808"/>
-            <a:ext cx="7772400" cy="420624"/>
+            <a:off x="3749039" y="2779776"/>
+            <a:ext cx="7772400" cy="384048"/>
           </a:xfrm>
           <a:prstGeom prst="rect">
             <a:avLst/>
@@ -17322,8 +17322,8 @@
         </p:nvSpPr>
         <p:spPr>
           <a:xfrm>
-            <a:off x="640080" y="3529584"/>
-            <a:ext cx="3017520" cy="420624"/>
+            <a:off x="640080" y="3218688"/>
+            <a:ext cx="3017520" cy="384048"/>
           </a:xfrm>
           <a:prstGeom prst="rect">
             <a:avLst/>
@@ -17357,8 +17357,8 @@
         </p:nvSpPr>
         <p:spPr>
           <a:xfrm>
-            <a:off x="3749039" y="3529584"/>
-            <a:ext cx="7772400" cy="420624"/>
+            <a:off x="3749039" y="3218688"/>
+            <a:ext cx="7772400" cy="384048"/>
           </a:xfrm>
           <a:prstGeom prst="rect">
             <a:avLst/>
@@ -17392,8 +17392,8 @@
         </p:nvSpPr>
         <p:spPr>
           <a:xfrm>
-            <a:off x="640080" y="4023360"/>
-            <a:ext cx="3017520" cy="420624"/>
+            <a:off x="640080" y="3657600"/>
+            <a:ext cx="3017520" cy="384048"/>
           </a:xfrm>
           <a:prstGeom prst="rect">
             <a:avLst/>
@@ -17427,8 +17427,8 @@
         </p:nvSpPr>
         <p:spPr>
           <a:xfrm>
-            <a:off x="3749039" y="4023360"/>
-            <a:ext cx="7772400" cy="420624"/>
+            <a:off x="3749039" y="3657600"/>
+            <a:ext cx="7772400" cy="384048"/>
           </a:xfrm>
           <a:prstGeom prst="rect">
             <a:avLst/>
@@ -17462,8 +17462,8 @@
         </p:nvSpPr>
         <p:spPr>
           <a:xfrm>
-            <a:off x="640080" y="4517136"/>
-            <a:ext cx="3017520" cy="420624"/>
+            <a:off x="640080" y="4096512"/>
+            <a:ext cx="3017520" cy="384048"/>
           </a:xfrm>
           <a:prstGeom prst="rect">
             <a:avLst/>
@@ -17497,8 +17497,8 @@
         </p:nvSpPr>
         <p:spPr>
           <a:xfrm>
-            <a:off x="3749039" y="4517136"/>
-            <a:ext cx="7772400" cy="420624"/>
+            <a:off x="3749039" y="4096512"/>
+            <a:ext cx="7772400" cy="384048"/>
           </a:xfrm>
           <a:prstGeom prst="rect">
             <a:avLst/>
@@ -17532,8 +17532,8 @@
         </p:nvSpPr>
         <p:spPr>
           <a:xfrm>
-            <a:off x="640080" y="5010912"/>
-            <a:ext cx="3017520" cy="420624"/>
+            <a:off x="640080" y="4535424"/>
+            <a:ext cx="3017520" cy="384048"/>
           </a:xfrm>
           <a:prstGeom prst="rect">
             <a:avLst/>
@@ -17567,8 +17567,8 @@
         </p:nvSpPr>
         <p:spPr>
           <a:xfrm>
-            <a:off x="3749039" y="5010912"/>
-            <a:ext cx="7772400" cy="420624"/>
+            <a:off x="3749039" y="4535424"/>
+            <a:ext cx="7772400" cy="384048"/>
           </a:xfrm>
           <a:prstGeom prst="rect">
             <a:avLst/>
@@ -17602,8 +17602,8 @@
         </p:nvSpPr>
         <p:spPr>
           <a:xfrm>
-            <a:off x="640080" y="5504688"/>
-            <a:ext cx="3017520" cy="420624"/>
+            <a:off x="640080" y="4974336"/>
+            <a:ext cx="3017520" cy="384048"/>
           </a:xfrm>
           <a:prstGeom prst="rect">
             <a:avLst/>
@@ -17637,8 +17637,8 @@
         </p:nvSpPr>
         <p:spPr>
           <a:xfrm>
-            <a:off x="3749039" y="5504688"/>
-            <a:ext cx="7772400" cy="420624"/>
+            <a:off x="3749039" y="4974336"/>
+            <a:ext cx="7772400" cy="384048"/>
           </a:xfrm>
           <a:prstGeom prst="rect">
             <a:avLst/>
@@ -17660,6 +17660,146 @@
                 <a:latin typeface="Droid Sans Fallback"/>
               </a:rPr>
               <a:t>AllReduce 的两种经典传法；本方案建议给定、不搜</a:t>
+            </a:r>
+          </a:p>
+        </p:txBody>
+      </p:sp>
+      <p:sp>
+        <p:nvSpPr>
+          <p:cNvPr id="26" name="TextBox 25"/>
+          <p:cNvSpPr txBox="1"/>
+          <p:nvPr/>
+        </p:nvSpPr>
+        <p:spPr>
+          <a:xfrm>
+            <a:off x="640080" y="5413248"/>
+            <a:ext cx="3017520" cy="384048"/>
+          </a:xfrm>
+          <a:prstGeom prst="rect">
+            <a:avLst/>
+          </a:prstGeom>
+          <a:noFill/>
+        </p:spPr>
+        <p:txBody>
+          <a:bodyPr wrap="square" anchor="ctr">
+            <a:spAutoFit/>
+          </a:bodyPr>
+          <a:lstStyle/>
+          <a:p>
+            <a:pPr algn="l"/>
+            <a:r>
+              <a:rPr sz="1200" b="1">
+                <a:solidFill>
+                  <a:srgbClr val="25C8DD"/>
+                </a:solidFill>
+                <a:latin typeface="Droid Sans Fallback"/>
+              </a:rPr>
+              <a:t>UB Memory</a:t>
+            </a:r>
+          </a:p>
+        </p:txBody>
+      </p:sp>
+      <p:sp>
+        <p:nvSpPr>
+          <p:cNvPr id="27" name="TextBox 26"/>
+          <p:cNvSpPr txBox="1"/>
+          <p:nvPr/>
+        </p:nvSpPr>
+        <p:spPr>
+          <a:xfrm>
+            <a:off x="3749039" y="5413248"/>
+            <a:ext cx="7772400" cy="384048"/>
+          </a:xfrm>
+          <a:prstGeom prst="rect">
+            <a:avLst/>
+          </a:prstGeom>
+          <a:noFill/>
+        </p:spPr>
+        <p:txBody>
+          <a:bodyPr wrap="square" anchor="ctr">
+            <a:spAutoFit/>
+          </a:bodyPr>
+          <a:lstStyle/>
+          <a:p>
+            <a:pPr algn="l"/>
+            <a:r>
+              <a:rPr sz="1300" b="0">
+                <a:solidFill>
+                  <a:srgbClr val="E5ECF5"/>
+                </a:solidFill>
+                <a:latin typeface="Droid Sans Fallback"/>
+              </a:rPr>
+              <a:t>950 上通信可见的片上槽；Y_partial 写这里，不写 HBM</a:t>
+            </a:r>
+          </a:p>
+        </p:txBody>
+      </p:sp>
+      <p:sp>
+        <p:nvSpPr>
+          <p:cNvPr id="28" name="TextBox 27"/>
+          <p:cNvSpPr txBox="1"/>
+          <p:nvPr/>
+        </p:nvSpPr>
+        <p:spPr>
+          <a:xfrm>
+            <a:off x="640080" y="5852159"/>
+            <a:ext cx="3017520" cy="384048"/>
+          </a:xfrm>
+          <a:prstGeom prst="rect">
+            <a:avLst/>
+          </a:prstGeom>
+          <a:noFill/>
+        </p:spPr>
+        <p:txBody>
+          <a:bodyPr wrap="square" anchor="ctr">
+            <a:spAutoFit/>
+          </a:bodyPr>
+          <a:lstStyle/>
+          <a:p>
+            <a:pPr algn="l"/>
+            <a:r>
+              <a:rPr sz="1200" b="1">
+                <a:solidFill>
+                  <a:srgbClr val="25C8DD"/>
+                </a:solidFill>
+                <a:latin typeface="Droid Sans Fallback"/>
+              </a:rPr>
+              <a:t>CCU_SCHED</a:t>
+            </a:r>
+          </a:p>
+        </p:txBody>
+      </p:sp>
+      <p:sp>
+        <p:nvSpPr>
+          <p:cNvPr id="29" name="TextBox 28"/>
+          <p:cNvSpPr txBox="1"/>
+          <p:nvPr/>
+        </p:nvSpPr>
+        <p:spPr>
+          <a:xfrm>
+            <a:off x="3749039" y="5852159"/>
+            <a:ext cx="7772400" cy="384048"/>
+          </a:xfrm>
+          <a:prstGeom prst="rect">
+            <a:avLst/>
+          </a:prstGeom>
+          <a:noFill/>
+        </p:spPr>
+        <p:txBody>
+          <a:bodyPr wrap="square" anchor="ctr">
+            <a:spAutoFit/>
+          </a:bodyPr>
+          <a:lstStyle/>
+          <a:p>
+            <a:pPr algn="l"/>
+            <a:r>
+              <a:rPr sz="1300" b="0">
+                <a:solidFill>
+                  <a:srgbClr val="E5ECF5"/>
+                </a:solidFill>
+                <a:latin typeface="Droid Sans Fallback"/>
+              </a:rPr>
+              <a:t>片上直传展开模式；默认 AICPU_TS 是 HBM↔HBM，不当主路径</a:t>
             </a:r>
           </a:p>
         </p:txBody>
